--- a/report/presentation.pptx
+++ b/report/presentation.pptx
@@ -23,6 +23,8 @@
     <p:sldId id="271" r:id="rId22"/>
     <p:sldId id="272" r:id="rId23"/>
     <p:sldId id="273" r:id="rId24"/>
+    <p:sldId id="274" r:id="rId25"/>
+    <p:sldId id="275" r:id="rId26"/>
   </p:sldIdLst>
   <p:sldSz cx="12191695" cy="6858000" type="screen4x3"/>
   <p:notesSz cx="6858000" cy="9144000"/>
@@ -3227,7 +3229,7 @@
               </a:defRPr>
             </a:pPr>
             <a:r>
-              <a:t>ME6324 — AI in Manufacturing  |  Course Project Report</a:t>
+              <a:t>ME6324, AI in Manufacturing  |  Course Project Report</a:t>
             </a:r>
           </a:p>
         </p:txBody>
@@ -5964,7 +5966,7 @@
               </a:defRPr>
             </a:pPr>
             <a:r>
-              <a:t>Transfer Experiment: Cross-Material Adaptation</a:t>
+              <a:t>Controller Initialization: Method and Result</a:t>
             </a:r>
           </a:p>
         </p:txBody>
@@ -5977,8 +5979,8 @@
         </p:nvSpPr>
         <p:spPr>
           <a:xfrm>
-            <a:off x="457200" y="1188720"/>
-            <a:ext cx="11247120" cy="731520"/>
+            <a:off x="457200" y="1143000"/>
+            <a:ext cx="11247120" cy="457200"/>
           </a:xfrm>
           <a:prstGeom prst="rect">
             <a:avLst/>
@@ -5992,7 +5994,7 @@
           <a:lstStyle/>
           <a:p>
             <a:pPr algn="l">
-              <a:defRPr sz="1500" b="1">
+              <a:defRPr sz="1600" b="1">
                 <a:solidFill>
                   <a:srgbClr val="C80000"/>
                 </a:solidFill>
@@ -6000,649 +6002,31 @@
               </a:defRPr>
             </a:pPr>
             <a:r>
-              <a:t>🎯 Target material (harder alloy, same machine): k₁ × 1.25, k₂ × 1.30, C_wear × 2.0. The source policy was trained for 300,000 steps on the nominal material; the adaptation budget on the target is 50,000 steps.</a:t>
-            </a:r>
-          </a:p>
-        </p:txBody>
-      </p:sp>
-      <p:graphicFrame>
-        <p:nvGraphicFramePr>
-          <p:cNvPr id="5" name="Table 4"/>
-          <p:cNvGraphicFramePr>
-            <a:graphicFrameLocks noGrp="1"/>
-          </p:cNvGraphicFramePr>
-          <p:nvPr/>
-        </p:nvGraphicFramePr>
-        <p:xfrm>
-          <a:off x="640080" y="2011680"/>
-          <a:ext cx="10881360" cy="1737360"/>
-        </p:xfrm>
-        <a:graphic>
-          <a:graphicData uri="http://schemas.openxmlformats.org/drawingml/2006/table">
-            <a:tbl>
-              <a:tblPr firstRow="1" bandRow="1">
-                <a:tableStyleId>{5C22544A-7EE6-4342-B048-85BDC9FD1C3A}</a:tableStyleId>
-              </a:tblPr>
-              <a:tblGrid>
-                <a:gridCol w="4023360"/>
-                <a:gridCol w="1554480"/>
-                <a:gridCol w="1828800"/>
-                <a:gridCol w="2011680"/>
-                <a:gridCol w="1463040"/>
-              </a:tblGrid>
-              <a:tr h="347472">
-                <a:tc>
-                  <a:txBody>
-                    <a:bodyPr/>
-                    <a:lstStyle/>
-                    <a:p>
-                      <a:pPr algn="ctr">
-                        <a:defRPr sz="1300" b="1">
-                          <a:solidFill>
-                            <a:srgbClr val="FFFFFF"/>
-                          </a:solidFill>
-                          <a:latin typeface="Calibri"/>
-                        </a:defRPr>
-                      </a:pPr>
-                      <a:r>
-                        <a:t>Arm</a:t>
-                      </a:r>
-                    </a:p>
-                  </a:txBody>
-                  <a:tcPr>
-                    <a:solidFill>
-                      <a:srgbClr val="003366"/>
-                    </a:solidFill>
-                  </a:tcPr>
-                </a:tc>
-                <a:tc>
-                  <a:txBody>
-                    <a:bodyPr/>
-                    <a:lstStyle/>
-                    <a:p>
-                      <a:pPr algn="ctr">
-                        <a:defRPr sz="1300" b="1">
-                          <a:solidFill>
-                            <a:srgbClr val="FFFFFF"/>
-                          </a:solidFill>
-                          <a:latin typeface="Calibri"/>
-                        </a:defRPr>
-                      </a:pPr>
-                      <a:r>
-                        <a:t>Mean reward</a:t>
-                      </a:r>
-                    </a:p>
-                  </a:txBody>
-                  <a:tcPr>
-                    <a:solidFill>
-                      <a:srgbClr val="003366"/>
-                    </a:solidFill>
-                  </a:tcPr>
-                </a:tc>
-                <a:tc>
-                  <a:txBody>
-                    <a:bodyPr/>
-                    <a:lstStyle/>
-                    <a:p>
-                      <a:pPr algn="ctr">
-                        <a:defRPr sz="1300" b="1">
-                          <a:solidFill>
-                            <a:srgbClr val="FFFFFF"/>
-                          </a:solidFill>
-                          <a:latin typeface="Calibri"/>
-                        </a:defRPr>
-                      </a:pPr>
-                      <a:r>
-                        <a:t>R_a violations</a:t>
-                      </a:r>
-                    </a:p>
-                    <a:p>
-                      <a:pPr algn="ctr">
-                        <a:defRPr sz="1300" b="1">
-                          <a:solidFill>
-                            <a:srgbClr val="FFFFFF"/>
-                          </a:solidFill>
-                          <a:latin typeface="Calibri"/>
-                        </a:defRPr>
-                      </a:pPr>
-                      <a:r>
-                        <a:t>(worst pass)</a:t>
-                      </a:r>
-                    </a:p>
-                  </a:txBody>
-                  <a:tcPr>
-                    <a:solidFill>
-                      <a:srgbClr val="003366"/>
-                    </a:solidFill>
-                  </a:tcPr>
-                </a:tc>
-                <a:tc>
-                  <a:txBody>
-                    <a:bodyPr/>
-                    <a:lstStyle/>
-                    <a:p>
-                      <a:pPr algn="ctr">
-                        <a:defRPr sz="1300" b="1">
-                          <a:solidFill>
-                            <a:srgbClr val="FFFFFF"/>
-                          </a:solidFill>
-                          <a:latin typeface="Calibri"/>
-                        </a:defRPr>
-                      </a:pPr>
-                      <a:r>
-                        <a:t>R_a violations</a:t>
-                      </a:r>
-                    </a:p>
-                    <a:p>
-                      <a:pPr algn="ctr">
-                        <a:defRPr sz="1300" b="1">
-                          <a:solidFill>
-                            <a:srgbClr val="FFFFFF"/>
-                          </a:solidFill>
-                          <a:latin typeface="Calibri"/>
-                        </a:defRPr>
-                      </a:pPr>
-                      <a:r>
-                        <a:t>(finished surface)</a:t>
-                      </a:r>
-                    </a:p>
-                  </a:txBody>
-                  <a:tcPr>
-                    <a:solidFill>
-                      <a:srgbClr val="003366"/>
-                    </a:solidFill>
-                  </a:tcPr>
-                </a:tc>
-                <a:tc>
-                  <a:txBody>
-                    <a:bodyPr/>
-                    <a:lstStyle/>
-                    <a:p>
-                      <a:pPr algn="ctr">
-                        <a:defRPr sz="1300" b="1">
-                          <a:solidFill>
-                            <a:srgbClr val="FFFFFF"/>
-                          </a:solidFill>
-                          <a:latin typeface="Calibri"/>
-                        </a:defRPr>
-                      </a:pPr>
-                      <a:r>
-                        <a:t>Parts</a:t>
-                      </a:r>
-                    </a:p>
-                    <a:p>
-                      <a:pPr algn="ctr">
-                        <a:defRPr sz="1300" b="1">
-                          <a:solidFill>
-                            <a:srgbClr val="FFFFFF"/>
-                          </a:solidFill>
-                          <a:latin typeface="Calibri"/>
-                        </a:defRPr>
-                      </a:pPr>
-                      <a:r>
-                        <a:t>completed</a:t>
-                      </a:r>
-                    </a:p>
-                  </a:txBody>
-                  <a:tcPr>
-                    <a:solidFill>
-                      <a:srgbClr val="003366"/>
-                    </a:solidFill>
-                  </a:tcPr>
-                </a:tc>
-              </a:tr>
-              <a:tr h="347472">
-                <a:tc>
-                  <a:txBody>
-                    <a:bodyPr/>
-                    <a:lstStyle/>
-                    <a:p>
-                      <a:pPr algn="ctr">
-                        <a:defRPr sz="1300">
-                          <a:solidFill>
-                            <a:srgbClr val="333333"/>
-                          </a:solidFill>
-                          <a:latin typeface="Calibri"/>
-                        </a:defRPr>
-                      </a:pPr>
-                      <a:r>
-                        <a:t>Source policy, zero shot</a:t>
-                      </a:r>
-                    </a:p>
-                  </a:txBody>
-                  <a:tcPr/>
-                </a:tc>
-                <a:tc>
-                  <a:txBody>
-                    <a:bodyPr/>
-                    <a:lstStyle/>
-                    <a:p>
-                      <a:pPr algn="ctr">
-                        <a:defRPr sz="1300">
-                          <a:solidFill>
-                            <a:srgbClr val="333333"/>
-                          </a:solidFill>
-                          <a:latin typeface="Calibri"/>
-                        </a:defRPr>
-                      </a:pPr>
-                      <a:r>
-                        <a:t>182.5</a:t>
-                      </a:r>
-                    </a:p>
-                  </a:txBody>
-                  <a:tcPr/>
-                </a:tc>
-                <a:tc>
-                  <a:txBody>
-                    <a:bodyPr/>
-                    <a:lstStyle/>
-                    <a:p>
-                      <a:pPr algn="ctr">
-                        <a:defRPr sz="1300">
-                          <a:solidFill>
-                            <a:srgbClr val="333333"/>
-                          </a:solidFill>
-                          <a:latin typeface="Calibri"/>
-                        </a:defRPr>
-                      </a:pPr>
-                      <a:r>
-                        <a:t>100.0%</a:t>
-                      </a:r>
-                    </a:p>
-                  </a:txBody>
-                  <a:tcPr/>
-                </a:tc>
-                <a:tc>
-                  <a:txBody>
-                    <a:bodyPr/>
-                    <a:lstStyle/>
-                    <a:p>
-                      <a:pPr algn="ctr">
-                        <a:defRPr sz="1300">
-                          <a:solidFill>
-                            <a:srgbClr val="333333"/>
-                          </a:solidFill>
-                          <a:latin typeface="Calibri"/>
-                        </a:defRPr>
-                      </a:pPr>
-                      <a:r>
-                        <a:t>3.3%</a:t>
-                      </a:r>
-                    </a:p>
-                  </a:txBody>
-                  <a:tcPr/>
-                </a:tc>
-                <a:tc>
-                  <a:txBody>
-                    <a:bodyPr/>
-                    <a:lstStyle/>
-                    <a:p>
-                      <a:pPr algn="ctr">
-                        <a:defRPr sz="1300">
-                          <a:solidFill>
-                            <a:srgbClr val="333333"/>
-                          </a:solidFill>
-                          <a:latin typeface="Calibri"/>
-                        </a:defRPr>
-                      </a:pPr>
-                      <a:r>
-                        <a:t>93.3%</a:t>
-                      </a:r>
-                    </a:p>
-                  </a:txBody>
-                  <a:tcPr/>
-                </a:tc>
-              </a:tr>
-              <a:tr h="347472">
-                <a:tc>
-                  <a:txBody>
-                    <a:bodyPr/>
-                    <a:lstStyle/>
-                    <a:p>
-                      <a:pPr algn="ctr">
-                        <a:defRPr sz="1300">
-                          <a:solidFill>
-                            <a:srgbClr val="333333"/>
-                          </a:solidFill>
-                          <a:latin typeface="Calibri"/>
-                        </a:defRPr>
-                      </a:pPr>
-                      <a:r>
-                        <a:t>Source policy, fine tuned (50k)</a:t>
-                      </a:r>
-                    </a:p>
-                  </a:txBody>
-                  <a:tcPr/>
-                </a:tc>
-                <a:tc>
-                  <a:txBody>
-                    <a:bodyPr/>
-                    <a:lstStyle/>
-                    <a:p>
-                      <a:pPr algn="ctr">
-                        <a:defRPr sz="1300">
-                          <a:solidFill>
-                            <a:srgbClr val="333333"/>
-                          </a:solidFill>
-                          <a:latin typeface="Calibri"/>
-                        </a:defRPr>
-                      </a:pPr>
-                      <a:r>
-                        <a:t>196.6</a:t>
-                      </a:r>
-                    </a:p>
-                  </a:txBody>
-                  <a:tcPr/>
-                </a:tc>
-                <a:tc>
-                  <a:txBody>
-                    <a:bodyPr/>
-                    <a:lstStyle/>
-                    <a:p>
-                      <a:pPr algn="ctr">
-                        <a:defRPr sz="1300">
-                          <a:solidFill>
-                            <a:srgbClr val="333333"/>
-                          </a:solidFill>
-                          <a:latin typeface="Calibri"/>
-                        </a:defRPr>
-                      </a:pPr>
-                      <a:r>
-                        <a:t>0.0%</a:t>
-                      </a:r>
-                    </a:p>
-                  </a:txBody>
-                  <a:tcPr/>
-                </a:tc>
-                <a:tc>
-                  <a:txBody>
-                    <a:bodyPr/>
-                    <a:lstStyle/>
-                    <a:p>
-                      <a:pPr algn="ctr">
-                        <a:defRPr sz="1300">
-                          <a:solidFill>
-                            <a:srgbClr val="333333"/>
-                          </a:solidFill>
-                          <a:latin typeface="Calibri"/>
-                        </a:defRPr>
-                      </a:pPr>
-                      <a:r>
-                        <a:t>0.0%</a:t>
-                      </a:r>
-                    </a:p>
-                  </a:txBody>
-                  <a:tcPr/>
-                </a:tc>
-                <a:tc>
-                  <a:txBody>
-                    <a:bodyPr/>
-                    <a:lstStyle/>
-                    <a:p>
-                      <a:pPr algn="ctr">
-                        <a:defRPr sz="1300">
-                          <a:solidFill>
-                            <a:srgbClr val="333333"/>
-                          </a:solidFill>
-                          <a:latin typeface="Calibri"/>
-                        </a:defRPr>
-                      </a:pPr>
-                      <a:r>
-                        <a:t>100.0%</a:t>
-                      </a:r>
-                    </a:p>
-                  </a:txBody>
-                  <a:tcPr/>
-                </a:tc>
-              </a:tr>
-              <a:tr h="347472">
-                <a:tc>
-                  <a:txBody>
-                    <a:bodyPr/>
-                    <a:lstStyle/>
-                    <a:p>
-                      <a:pPr algn="ctr">
-                        <a:defRPr sz="1300">
-                          <a:solidFill>
-                            <a:srgbClr val="333333"/>
-                          </a:solidFill>
-                          <a:latin typeface="Calibri"/>
-                        </a:defRPr>
-                      </a:pPr>
-                      <a:r>
-                        <a:t>Trained on the target from scratch (50k)</a:t>
-                      </a:r>
-                    </a:p>
-                  </a:txBody>
-                  <a:tcPr/>
-                </a:tc>
-                <a:tc>
-                  <a:txBody>
-                    <a:bodyPr/>
-                    <a:lstStyle/>
-                    <a:p>
-                      <a:pPr algn="ctr">
-                        <a:defRPr sz="1300">
-                          <a:solidFill>
-                            <a:srgbClr val="333333"/>
-                          </a:solidFill>
-                          <a:latin typeface="Calibri"/>
-                        </a:defRPr>
-                      </a:pPr>
-                      <a:r>
-                        <a:t>196.6</a:t>
-                      </a:r>
-                    </a:p>
-                  </a:txBody>
-                  <a:tcPr/>
-                </a:tc>
-                <a:tc>
-                  <a:txBody>
-                    <a:bodyPr/>
-                    <a:lstStyle/>
-                    <a:p>
-                      <a:pPr algn="ctr">
-                        <a:defRPr sz="1300">
-                          <a:solidFill>
-                            <a:srgbClr val="333333"/>
-                          </a:solidFill>
-                          <a:latin typeface="Calibri"/>
-                        </a:defRPr>
-                      </a:pPr>
-                      <a:r>
-                        <a:t>0.0%</a:t>
-                      </a:r>
-                    </a:p>
-                  </a:txBody>
-                  <a:tcPr/>
-                </a:tc>
-                <a:tc>
-                  <a:txBody>
-                    <a:bodyPr/>
-                    <a:lstStyle/>
-                    <a:p>
-                      <a:pPr algn="ctr">
-                        <a:defRPr sz="1300">
-                          <a:solidFill>
-                            <a:srgbClr val="333333"/>
-                          </a:solidFill>
-                          <a:latin typeface="Calibri"/>
-                        </a:defRPr>
-                      </a:pPr>
-                      <a:r>
-                        <a:t>0.0%</a:t>
-                      </a:r>
-                    </a:p>
-                  </a:txBody>
-                  <a:tcPr/>
-                </a:tc>
-                <a:tc>
-                  <a:txBody>
-                    <a:bodyPr/>
-                    <a:lstStyle/>
-                    <a:p>
-                      <a:pPr algn="ctr">
-                        <a:defRPr sz="1300">
-                          <a:solidFill>
-                            <a:srgbClr val="333333"/>
-                          </a:solidFill>
-                          <a:latin typeface="Calibri"/>
-                        </a:defRPr>
-                      </a:pPr>
-                      <a:r>
-                        <a:t>100.0%</a:t>
-                      </a:r>
-                    </a:p>
-                  </a:txBody>
-                  <a:tcPr/>
-                </a:tc>
-              </a:tr>
-              <a:tr h="347472">
-                <a:tc>
-                  <a:txBody>
-                    <a:bodyPr/>
-                    <a:lstStyle/>
-                    <a:p>
-                      <a:pPr algn="ctr">
-                        <a:defRPr sz="1300" b="1">
-                          <a:solidFill>
-                            <a:srgbClr val="003366"/>
-                          </a:solidFill>
-                          <a:latin typeface="Calibri"/>
-                        </a:defRPr>
-                      </a:pPr>
-                      <a:r>
-                        <a:t>Production policy, zero shot</a:t>
-                      </a:r>
-                    </a:p>
-                  </a:txBody>
-                  <a:tcPr>
-                    <a:solidFill>
-                      <a:srgbClr val="FFF8DC"/>
-                    </a:solidFill>
-                  </a:tcPr>
-                </a:tc>
-                <a:tc>
-                  <a:txBody>
-                    <a:bodyPr/>
-                    <a:lstStyle/>
-                    <a:p>
-                      <a:pPr algn="ctr">
-                        <a:defRPr sz="1300" b="1">
-                          <a:solidFill>
-                            <a:srgbClr val="003366"/>
-                          </a:solidFill>
-                          <a:latin typeface="Calibri"/>
-                        </a:defRPr>
-                      </a:pPr>
-                      <a:r>
-                        <a:t>200.3</a:t>
-                      </a:r>
-                    </a:p>
-                  </a:txBody>
-                  <a:tcPr>
-                    <a:solidFill>
-                      <a:srgbClr val="FFF8DC"/>
-                    </a:solidFill>
-                  </a:tcPr>
-                </a:tc>
-                <a:tc>
-                  <a:txBody>
-                    <a:bodyPr/>
-                    <a:lstStyle/>
-                    <a:p>
-                      <a:pPr algn="ctr">
-                        <a:defRPr sz="1300" b="1">
-                          <a:solidFill>
-                            <a:srgbClr val="003366"/>
-                          </a:solidFill>
-                          <a:latin typeface="Calibri"/>
-                        </a:defRPr>
-                      </a:pPr>
-                      <a:r>
-                        <a:t>60.0%</a:t>
-                      </a:r>
-                    </a:p>
-                  </a:txBody>
-                  <a:tcPr>
-                    <a:solidFill>
-                      <a:srgbClr val="FFF8DC"/>
-                    </a:solidFill>
-                  </a:tcPr>
-                </a:tc>
-                <a:tc>
-                  <a:txBody>
-                    <a:bodyPr/>
-                    <a:lstStyle/>
-                    <a:p>
-                      <a:pPr algn="ctr">
-                        <a:defRPr sz="1300" b="1">
-                          <a:solidFill>
-                            <a:srgbClr val="003366"/>
-                          </a:solidFill>
-                          <a:latin typeface="Calibri"/>
-                        </a:defRPr>
-                      </a:pPr>
-                      <a:r>
-                        <a:t>0.0%</a:t>
-                      </a:r>
-                    </a:p>
-                  </a:txBody>
-                  <a:tcPr>
-                    <a:solidFill>
-                      <a:srgbClr val="FFF8DC"/>
-                    </a:solidFill>
-                  </a:tcPr>
-                </a:tc>
-                <a:tc>
-                  <a:txBody>
-                    <a:bodyPr/>
-                    <a:lstStyle/>
-                    <a:p>
-                      <a:pPr algn="ctr">
-                        <a:defRPr sz="1300" b="1">
-                          <a:solidFill>
-                            <a:srgbClr val="003366"/>
-                          </a:solidFill>
-                          <a:latin typeface="Calibri"/>
-                        </a:defRPr>
-                      </a:pPr>
-                      <a:r>
-                        <a:t>100.0%</a:t>
-                      </a:r>
-                    </a:p>
-                  </a:txBody>
-                  <a:tcPr>
-                    <a:solidFill>
-                      <a:srgbClr val="FFF8DC"/>
-                    </a:solidFill>
-                  </a:tcPr>
-                </a:tc>
-              </a:tr>
-            </a:tbl>
-          </a:graphicData>
-        </a:graphic>
-      </p:graphicFrame>
-      <p:sp>
-        <p:nvSpPr>
-          <p:cNvPr id="6" name="Rectangle 5"/>
+              <a:t>Question: does a policy that starts from the controller end up better than the expert it started from?</a:t>
+            </a:r>
+          </a:p>
+        </p:txBody>
+      </p:sp>
+      <p:sp>
+        <p:nvSpPr>
+          <p:cNvPr id="5" name="Rectangle 4"/>
           <p:cNvSpPr/>
           <p:nvPr/>
         </p:nvSpPr>
         <p:spPr>
           <a:xfrm>
-            <a:off x="457200" y="3977639"/>
-            <a:ext cx="11247120" cy="2377440"/>
+            <a:off x="457200" y="1737360"/>
+            <a:ext cx="5029200" cy="4480560"/>
           </a:xfrm>
           <a:prstGeom prst="rect">
             <a:avLst/>
           </a:prstGeom>
           <a:solidFill>
-            <a:srgbClr val="FFF8DC"/>
+            <a:srgbClr val="F0F0F0"/>
           </a:solidFill>
-          <a:ln w="25400">
+          <a:ln w="19050">
             <a:solidFill>
-              <a:srgbClr val="CC9900"/>
+              <a:srgbClr val="003366"/>
             </a:solidFill>
           </a:ln>
         </p:spPr>
@@ -6670,14 +6054,14 @@
       </p:sp>
       <p:sp>
         <p:nvSpPr>
-          <p:cNvPr id="7" name="TextBox 6"/>
+          <p:cNvPr id="6" name="TextBox 5"/>
           <p:cNvSpPr txBox="1"/>
           <p:nvPr/>
         </p:nvSpPr>
         <p:spPr>
           <a:xfrm>
-            <a:off x="731520" y="4114800"/>
-            <a:ext cx="10698480" cy="457200"/>
+            <a:off x="731520" y="1874519"/>
+            <a:ext cx="4572000" cy="457200"/>
           </a:xfrm>
           <a:prstGeom prst="rect">
             <a:avLst/>
@@ -6693,27 +6077,27 @@
             <a:pPr algn="l">
               <a:defRPr sz="2200" b="1">
                 <a:solidFill>
-                  <a:srgbClr val="CC9900"/>
-                </a:solidFill>
-                <a:latin typeface="Calibri"/>
-              </a:defRPr>
-            </a:pPr>
-            <a:r>
-              <a:t>⚠ How to read this</a:t>
-            </a:r>
-          </a:p>
-        </p:txBody>
-      </p:sp>
-      <p:sp>
-        <p:nvSpPr>
-          <p:cNvPr id="8" name="TextBox 7"/>
+                  <a:srgbClr val="003366"/>
+                </a:solidFill>
+                <a:latin typeface="Calibri"/>
+              </a:defRPr>
+            </a:pPr>
+            <a:r>
+              <a:t>Method</a:t>
+            </a:r>
+          </a:p>
+        </p:txBody>
+      </p:sp>
+      <p:sp>
+        <p:nvSpPr>
+          <p:cNvPr id="7" name="TextBox 6"/>
           <p:cNvSpPr txBox="1"/>
           <p:nvPr/>
         </p:nvSpPr>
         <p:spPr>
           <a:xfrm>
-            <a:off x="731520" y="4663440"/>
-            <a:ext cx="10698480" cy="1645920"/>
+            <a:off x="731520" y="2423160"/>
+            <a:ext cx="4572000" cy="3657600"/>
           </a:xfrm>
           <a:prstGeom prst="rect">
             <a:avLst/>
@@ -6728,7 +6112,7 @@
           <a:p>
             <a:pPr>
               <a:spcAft>
-                <a:spcPts val="400"/>
+                <a:spcPts val="300"/>
               </a:spcAft>
               <a:defRPr sz="1400">
                 <a:solidFill>
@@ -6738,13 +6122,13 @@
               </a:defRPr>
             </a:pPr>
             <a:r>
-              <a:t>• The production policy was trained across a distribution of materials with the material context in its observation, so the harder material is inside its training distribution and needs no adaptation at all</a:t>
+              <a:t>1. Record the controller on 2000 episodes</a:t>
             </a:r>
           </a:p>
           <a:p>
             <a:pPr>
               <a:spcAft>
-                <a:spcPts val="400"/>
+                <a:spcPts val="300"/>
               </a:spcAft>
               <a:defRPr sz="1400">
                 <a:solidFill>
@@ -6753,14 +6137,11 @@
                 <a:latin typeface="Calibri"/>
               </a:defRPr>
             </a:pPr>
-            <a:r>
-              <a:t>• It scores the highest reward (200.3); the finished surface, which is the part quality, is in spec in every scenario</a:t>
-            </a:r>
           </a:p>
           <a:p>
             <a:pPr>
               <a:spcAft>
-                <a:spcPts val="400"/>
+                <a:spcPts val="300"/>
               </a:spcAft>
               <a:defRPr sz="1400">
                 <a:solidFill>
@@ -6770,13 +6151,13 @@
               </a:defRPr>
             </a:pPr>
             <a:r>
-              <a:t>• Its 60% worst-pass violations fall on the roughing passes, which the reward does not constrain</a:t>
+              <a:t>2. Fit a supervised actor (2x256, Tanh) by</a:t>
             </a:r>
           </a:p>
           <a:p>
             <a:pPr>
               <a:spcAft>
-                <a:spcPts val="400"/>
+                <a:spcPts val="300"/>
               </a:spcAft>
               <a:defRPr sz="1400">
                 <a:solidFill>
@@ -6786,13 +6167,13 @@
               </a:defRPr>
             </a:pPr>
             <a:r>
-              <a:t>• The nominal-trained source policy cannot: 182.5, and it violates the roughness limit in every scenario</a:t>
+              <a:t>   regression on those trajectories</a:t>
             </a:r>
           </a:p>
           <a:p>
             <a:pPr>
               <a:spcAft>
-                <a:spcPts val="400"/>
+                <a:spcPts val="300"/>
               </a:spcAft>
               <a:defRPr sz="1400">
                 <a:solidFill>
@@ -6801,8 +6182,1052 @@
                 <a:latin typeface="Calibri"/>
               </a:defRPr>
             </a:pPr>
-            <a:r>
-              <a:t>• Fine tuning it for 50,000 steps, or training on the target from scratch, both fix it, and both land at 196.6</a:t>
+          </a:p>
+          <a:p>
+            <a:pPr>
+              <a:spcAft>
+                <a:spcPts val="300"/>
+              </a:spcAft>
+              <a:defRPr sz="1400">
+                <a:solidFill>
+                  <a:srgbClr val="333333"/>
+                </a:solidFill>
+                <a:latin typeface="Calibri"/>
+              </a:defRPr>
+            </a:pPr>
+            <a:r>
+              <a:t>3. Copy the fitted weights into a fresh PPO policy</a:t>
+            </a:r>
+          </a:p>
+          <a:p>
+            <a:pPr>
+              <a:spcAft>
+                <a:spcPts val="300"/>
+              </a:spcAft>
+              <a:defRPr sz="1400">
+                <a:solidFill>
+                  <a:srgbClr val="333333"/>
+                </a:solidFill>
+                <a:latin typeface="Calibri"/>
+              </a:defRPr>
+            </a:pPr>
+          </a:p>
+          <a:p>
+            <a:pPr>
+              <a:spcAft>
+                <a:spcPts val="300"/>
+              </a:spcAft>
+              <a:defRPr sz="1400">
+                <a:solidFill>
+                  <a:srgbClr val="333333"/>
+                </a:solidFill>
+                <a:latin typeface="Calibri"/>
+              </a:defRPr>
+            </a:pPr>
+            <a:r>
+              <a:t>4. Train with the production budget (1M steps),</a:t>
+            </a:r>
+          </a:p>
+          <a:p>
+            <a:pPr>
+              <a:spcAft>
+                <a:spcPts val="300"/>
+              </a:spcAft>
+              <a:defRPr sz="1400">
+                <a:solidFill>
+                  <a:srgbClr val="333333"/>
+                </a:solidFill>
+                <a:latin typeface="Calibri"/>
+              </a:defRPr>
+            </a:pPr>
+            <a:r>
+              <a:t>   evaluate on 100 scenarios at w₂ = 0.4</a:t>
+            </a:r>
+          </a:p>
+          <a:p>
+            <a:pPr>
+              <a:spcAft>
+                <a:spcPts val="300"/>
+              </a:spcAft>
+              <a:defRPr sz="1400">
+                <a:solidFill>
+                  <a:srgbClr val="333333"/>
+                </a:solidFill>
+                <a:latin typeface="Calibri"/>
+              </a:defRPr>
+            </a:pPr>
+          </a:p>
+          <a:p>
+            <a:pPr>
+              <a:spcAft>
+                <a:spcPts val="300"/>
+              </a:spcAft>
+              <a:defRPr sz="1400">
+                <a:solidFill>
+                  <a:srgbClr val="333333"/>
+                </a:solidFill>
+                <a:latin typeface="Calibri"/>
+              </a:defRPr>
+            </a:pPr>
+            <a:r>
+              <a:t>MillingDT/agent/controller_init.py</a:t>
+            </a:r>
+          </a:p>
+          <a:p>
+            <a:pPr>
+              <a:spcAft>
+                <a:spcPts val="300"/>
+              </a:spcAft>
+              <a:defRPr sz="1400">
+                <a:solidFill>
+                  <a:srgbClr val="333333"/>
+                </a:solidFill>
+                <a:latin typeface="Calibri"/>
+              </a:defRPr>
+            </a:pPr>
+            <a:r>
+              <a:t>experiments/controller_experiment.py</a:t>
+            </a:r>
+          </a:p>
+        </p:txBody>
+      </p:sp>
+      <p:graphicFrame>
+        <p:nvGraphicFramePr>
+          <p:cNvPr id="8" name="Table 7"/>
+          <p:cNvGraphicFramePr>
+            <a:graphicFrameLocks noGrp="1"/>
+          </p:cNvGraphicFramePr>
+          <p:nvPr/>
+        </p:nvGraphicFramePr>
+        <p:xfrm>
+          <a:off x="5760720" y="1737360"/>
+          <a:ext cx="5943600" cy="3291840"/>
+        </p:xfrm>
+        <a:graphic>
+          <a:graphicData uri="http://schemas.openxmlformats.org/drawingml/2006/table">
+            <a:tbl>
+              <a:tblPr firstRow="1" bandRow="1">
+                <a:tableStyleId>{5C22544A-7EE6-4342-B048-85BDC9FD1C3A}</a:tableStyleId>
+              </a:tblPr>
+              <a:tblGrid>
+                <a:gridCol w="1920240"/>
+                <a:gridCol w="1371600"/>
+                <a:gridCol w="1280160"/>
+                <a:gridCol w="1371600"/>
+              </a:tblGrid>
+              <a:tr h="365760">
+                <a:tc>
+                  <a:txBody>
+                    <a:bodyPr/>
+                    <a:lstStyle/>
+                    <a:p>
+                      <a:pPr algn="ctr">
+                        <a:defRPr sz="1200" b="1">
+                          <a:solidFill>
+                            <a:srgbClr val="FFFFFF"/>
+                          </a:solidFill>
+                          <a:latin typeface="Calibri"/>
+                        </a:defRPr>
+                      </a:pPr>
+                      <a:r>
+                        <a:t>Metric</a:t>
+                      </a:r>
+                    </a:p>
+                  </a:txBody>
+                  <a:tcPr>
+                    <a:solidFill>
+                      <a:srgbClr val="003366"/>
+                    </a:solidFill>
+                  </a:tcPr>
+                </a:tc>
+                <a:tc>
+                  <a:txBody>
+                    <a:bodyPr/>
+                    <a:lstStyle/>
+                    <a:p>
+                      <a:pPr algn="ctr">
+                        <a:defRPr sz="1200" b="1">
+                          <a:solidFill>
+                            <a:srgbClr val="FFFFFF"/>
+                          </a:solidFill>
+                          <a:latin typeface="Calibri"/>
+                        </a:defRPr>
+                      </a:pPr>
+                      <a:r>
+                        <a:t>Receding-horizon</a:t>
+                      </a:r>
+                    </a:p>
+                    <a:p>
+                      <a:pPr algn="ctr">
+                        <a:defRPr sz="1200" b="1">
+                          <a:solidFill>
+                            <a:srgbClr val="FFFFFF"/>
+                          </a:solidFill>
+                          <a:latin typeface="Calibri"/>
+                        </a:defRPr>
+                      </a:pPr>
+                      <a:r>
+                        <a:t>controller</a:t>
+                      </a:r>
+                    </a:p>
+                  </a:txBody>
+                  <a:tcPr>
+                    <a:solidFill>
+                      <a:srgbClr val="003366"/>
+                    </a:solidFill>
+                  </a:tcPr>
+                </a:tc>
+                <a:tc>
+                  <a:txBody>
+                    <a:bodyPr/>
+                    <a:lstStyle/>
+                    <a:p>
+                      <a:pPr algn="ctr">
+                        <a:defRPr sz="1200" b="1">
+                          <a:solidFill>
+                            <a:srgbClr val="FFFFFF"/>
+                          </a:solidFill>
+                          <a:latin typeface="Calibri"/>
+                        </a:defRPr>
+                      </a:pPr>
+                      <a:r>
+                        <a:t>PPO</a:t>
+                      </a:r>
+                    </a:p>
+                    <a:p>
+                      <a:pPr algn="ctr">
+                        <a:defRPr sz="1200" b="1">
+                          <a:solidFill>
+                            <a:srgbClr val="FFFFFF"/>
+                          </a:solidFill>
+                          <a:latin typeface="Calibri"/>
+                        </a:defRPr>
+                      </a:pPr>
+                      <a:r>
+                        <a:t>from scratch</a:t>
+                      </a:r>
+                    </a:p>
+                  </a:txBody>
+                  <a:tcPr>
+                    <a:solidFill>
+                      <a:srgbClr val="003366"/>
+                    </a:solidFill>
+                  </a:tcPr>
+                </a:tc>
+                <a:tc>
+                  <a:txBody>
+                    <a:bodyPr/>
+                    <a:lstStyle/>
+                    <a:p>
+                      <a:pPr algn="ctr">
+                        <a:defRPr sz="1200" b="1">
+                          <a:solidFill>
+                            <a:srgbClr val="FFFFFF"/>
+                          </a:solidFill>
+                          <a:latin typeface="Calibri"/>
+                        </a:defRPr>
+                      </a:pPr>
+                      <a:r>
+                        <a:t>PPO initialized</a:t>
+                      </a:r>
+                    </a:p>
+                    <a:p>
+                      <a:pPr algn="ctr">
+                        <a:defRPr sz="1200" b="1">
+                          <a:solidFill>
+                            <a:srgbClr val="FFFFFF"/>
+                          </a:solidFill>
+                          <a:latin typeface="Calibri"/>
+                        </a:defRPr>
+                      </a:pPr>
+                      <a:r>
+                        <a:t>from controller</a:t>
+                      </a:r>
+                    </a:p>
+                  </a:txBody>
+                  <a:tcPr>
+                    <a:solidFill>
+                      <a:srgbClr val="003366"/>
+                    </a:solidFill>
+                  </a:tcPr>
+                </a:tc>
+              </a:tr>
+              <a:tr h="365760">
+                <a:tc>
+                  <a:txBody>
+                    <a:bodyPr/>
+                    <a:lstStyle/>
+                    <a:p>
+                      <a:pPr algn="ctr">
+                        <a:defRPr sz="1200">
+                          <a:solidFill>
+                            <a:srgbClr val="333333"/>
+                          </a:solidFill>
+                          <a:latin typeface="Calibri"/>
+                        </a:defRPr>
+                      </a:pPr>
+                      <a:r>
+                        <a:t>Mean episode reward</a:t>
+                      </a:r>
+                    </a:p>
+                  </a:txBody>
+                  <a:tcPr/>
+                </a:tc>
+                <a:tc>
+                  <a:txBody>
+                    <a:bodyPr/>
+                    <a:lstStyle/>
+                    <a:p>
+                      <a:pPr algn="ctr">
+                        <a:defRPr sz="1200">
+                          <a:solidFill>
+                            <a:srgbClr val="333333"/>
+                          </a:solidFill>
+                          <a:latin typeface="Calibri"/>
+                        </a:defRPr>
+                      </a:pPr>
+                      <a:r>
+                        <a:t>187.96</a:t>
+                      </a:r>
+                    </a:p>
+                  </a:txBody>
+                  <a:tcPr/>
+                </a:tc>
+                <a:tc>
+                  <a:txBody>
+                    <a:bodyPr/>
+                    <a:lstStyle/>
+                    <a:p>
+                      <a:pPr algn="ctr">
+                        <a:defRPr sz="1200">
+                          <a:solidFill>
+                            <a:srgbClr val="333333"/>
+                          </a:solidFill>
+                          <a:latin typeface="Calibri"/>
+                        </a:defRPr>
+                      </a:pPr>
+                      <a:r>
+                        <a:t>198.57</a:t>
+                      </a:r>
+                    </a:p>
+                  </a:txBody>
+                  <a:tcPr/>
+                </a:tc>
+                <a:tc>
+                  <a:txBody>
+                    <a:bodyPr/>
+                    <a:lstStyle/>
+                    <a:p>
+                      <a:pPr algn="ctr">
+                        <a:defRPr sz="1200">
+                          <a:solidFill>
+                            <a:srgbClr val="333333"/>
+                          </a:solidFill>
+                          <a:latin typeface="Calibri"/>
+                        </a:defRPr>
+                      </a:pPr>
+                      <a:r>
+                        <a:t>199.35</a:t>
+                      </a:r>
+                    </a:p>
+                  </a:txBody>
+                  <a:tcPr/>
+                </a:tc>
+              </a:tr>
+              <a:tr h="365760">
+                <a:tc>
+                  <a:txBody>
+                    <a:bodyPr/>
+                    <a:lstStyle/>
+                    <a:p>
+                      <a:pPr algn="ctr">
+                        <a:defRPr sz="1200">
+                          <a:solidFill>
+                            <a:srgbClr val="333333"/>
+                          </a:solidFill>
+                          <a:latin typeface="Calibri"/>
+                        </a:defRPr>
+                      </a:pPr>
+                      <a:r>
+                        <a:t>Reward std</a:t>
+                      </a:r>
+                    </a:p>
+                  </a:txBody>
+                  <a:tcPr/>
+                </a:tc>
+                <a:tc>
+                  <a:txBody>
+                    <a:bodyPr/>
+                    <a:lstStyle/>
+                    <a:p>
+                      <a:pPr algn="ctr">
+                        <a:defRPr sz="1200">
+                          <a:solidFill>
+                            <a:srgbClr val="333333"/>
+                          </a:solidFill>
+                          <a:latin typeface="Calibri"/>
+                        </a:defRPr>
+                      </a:pPr>
+                      <a:r>
+                        <a:t>65.92</a:t>
+                      </a:r>
+                    </a:p>
+                  </a:txBody>
+                  <a:tcPr/>
+                </a:tc>
+                <a:tc>
+                  <a:txBody>
+                    <a:bodyPr/>
+                    <a:lstStyle/>
+                    <a:p>
+                      <a:pPr algn="ctr">
+                        <a:defRPr sz="1200">
+                          <a:solidFill>
+                            <a:srgbClr val="333333"/>
+                          </a:solidFill>
+                          <a:latin typeface="Calibri"/>
+                        </a:defRPr>
+                      </a:pPr>
+                      <a:r>
+                        <a:t>30.03</a:t>
+                      </a:r>
+                    </a:p>
+                  </a:txBody>
+                  <a:tcPr/>
+                </a:tc>
+                <a:tc>
+                  <a:txBody>
+                    <a:bodyPr/>
+                    <a:lstStyle/>
+                    <a:p>
+                      <a:pPr algn="ctr">
+                        <a:defRPr sz="1200">
+                          <a:solidFill>
+                            <a:srgbClr val="333333"/>
+                          </a:solidFill>
+                          <a:latin typeface="Calibri"/>
+                        </a:defRPr>
+                      </a:pPr>
+                      <a:r>
+                        <a:t>3.35</a:t>
+                      </a:r>
+                    </a:p>
+                  </a:txBody>
+                  <a:tcPr/>
+                </a:tc>
+              </a:tr>
+              <a:tr h="365760">
+                <a:tc>
+                  <a:txBody>
+                    <a:bodyPr/>
+                    <a:lstStyle/>
+                    <a:p>
+                      <a:pPr algn="ctr">
+                        <a:defRPr sz="1200">
+                          <a:solidFill>
+                            <a:srgbClr val="333333"/>
+                          </a:solidFill>
+                          <a:latin typeface="Calibri"/>
+                        </a:defRPr>
+                      </a:pPr>
+                      <a:r>
+                        <a:t>MRR (mm³/min)</a:t>
+                      </a:r>
+                    </a:p>
+                  </a:txBody>
+                  <a:tcPr/>
+                </a:tc>
+                <a:tc>
+                  <a:txBody>
+                    <a:bodyPr/>
+                    <a:lstStyle/>
+                    <a:p>
+                      <a:pPr algn="ctr">
+                        <a:defRPr sz="1200">
+                          <a:solidFill>
+                            <a:srgbClr val="333333"/>
+                          </a:solidFill>
+                          <a:latin typeface="Calibri"/>
+                        </a:defRPr>
+                      </a:pPr>
+                      <a:r>
+                        <a:t>1560.6</a:t>
+                      </a:r>
+                    </a:p>
+                  </a:txBody>
+                  <a:tcPr/>
+                </a:tc>
+                <a:tc>
+                  <a:txBody>
+                    <a:bodyPr/>
+                    <a:lstStyle/>
+                    <a:p>
+                      <a:pPr algn="ctr">
+                        <a:defRPr sz="1200">
+                          <a:solidFill>
+                            <a:srgbClr val="333333"/>
+                          </a:solidFill>
+                          <a:latin typeface="Calibri"/>
+                        </a:defRPr>
+                      </a:pPr>
+                      <a:r>
+                        <a:t>1205.1</a:t>
+                      </a:r>
+                    </a:p>
+                  </a:txBody>
+                  <a:tcPr/>
+                </a:tc>
+                <a:tc>
+                  <a:txBody>
+                    <a:bodyPr/>
+                    <a:lstStyle/>
+                    <a:p>
+                      <a:pPr algn="ctr">
+                        <a:defRPr sz="1200">
+                          <a:solidFill>
+                            <a:srgbClr val="333333"/>
+                          </a:solidFill>
+                          <a:latin typeface="Calibri"/>
+                        </a:defRPr>
+                      </a:pPr>
+                      <a:r>
+                        <a:t>1126.1</a:t>
+                      </a:r>
+                    </a:p>
+                  </a:txBody>
+                  <a:tcPr/>
+                </a:tc>
+              </a:tr>
+              <a:tr h="365760">
+                <a:tc>
+                  <a:txBody>
+                    <a:bodyPr/>
+                    <a:lstStyle/>
+                    <a:p>
+                      <a:pPr algn="ctr">
+                        <a:defRPr sz="1200">
+                          <a:solidFill>
+                            <a:srgbClr val="333333"/>
+                          </a:solidFill>
+                          <a:latin typeface="Calibri"/>
+                        </a:defRPr>
+                      </a:pPr>
+                      <a:r>
+                        <a:t>Energy per part (kJ)</a:t>
+                      </a:r>
+                    </a:p>
+                  </a:txBody>
+                  <a:tcPr/>
+                </a:tc>
+                <a:tc>
+                  <a:txBody>
+                    <a:bodyPr/>
+                    <a:lstStyle/>
+                    <a:p>
+                      <a:pPr algn="ctr">
+                        <a:defRPr sz="1200">
+                          <a:solidFill>
+                            <a:srgbClr val="333333"/>
+                          </a:solidFill>
+                          <a:latin typeface="Calibri"/>
+                        </a:defRPr>
+                      </a:pPr>
+                      <a:r>
+                        <a:t>68.01</a:t>
+                      </a:r>
+                    </a:p>
+                  </a:txBody>
+                  <a:tcPr/>
+                </a:tc>
+                <a:tc>
+                  <a:txBody>
+                    <a:bodyPr/>
+                    <a:lstStyle/>
+                    <a:p>
+                      <a:pPr algn="ctr">
+                        <a:defRPr sz="1200">
+                          <a:solidFill>
+                            <a:srgbClr val="333333"/>
+                          </a:solidFill>
+                          <a:latin typeface="Calibri"/>
+                        </a:defRPr>
+                      </a:pPr>
+                      <a:r>
+                        <a:t>68.35</a:t>
+                      </a:r>
+                    </a:p>
+                  </a:txBody>
+                  <a:tcPr/>
+                </a:tc>
+                <a:tc>
+                  <a:txBody>
+                    <a:bodyPr/>
+                    <a:lstStyle/>
+                    <a:p>
+                      <a:pPr algn="ctr">
+                        <a:defRPr sz="1200">
+                          <a:solidFill>
+                            <a:srgbClr val="333333"/>
+                          </a:solidFill>
+                          <a:latin typeface="Calibri"/>
+                        </a:defRPr>
+                      </a:pPr>
+                      <a:r>
+                        <a:t>77.17</a:t>
+                      </a:r>
+                    </a:p>
+                  </a:txBody>
+                  <a:tcPr/>
+                </a:tc>
+              </a:tr>
+              <a:tr h="365760">
+                <a:tc>
+                  <a:txBody>
+                    <a:bodyPr/>
+                    <a:lstStyle/>
+                    <a:p>
+                      <a:pPr algn="ctr">
+                        <a:defRPr sz="1200">
+                          <a:solidFill>
+                            <a:srgbClr val="333333"/>
+                          </a:solidFill>
+                          <a:latin typeface="Calibri"/>
+                        </a:defRPr>
+                      </a:pPr>
+                      <a:r>
+                        <a:t>Cycle time (s)</a:t>
+                      </a:r>
+                    </a:p>
+                  </a:txBody>
+                  <a:tcPr/>
+                </a:tc>
+                <a:tc>
+                  <a:txBody>
+                    <a:bodyPr/>
+                    <a:lstStyle/>
+                    <a:p>
+                      <a:pPr algn="ctr">
+                        <a:defRPr sz="1200">
+                          <a:solidFill>
+                            <a:srgbClr val="333333"/>
+                          </a:solidFill>
+                          <a:latin typeface="Calibri"/>
+                        </a:defRPr>
+                      </a:pPr>
+                      <a:r>
+                        <a:t>13.54</a:t>
+                      </a:r>
+                    </a:p>
+                  </a:txBody>
+                  <a:tcPr/>
+                </a:tc>
+                <a:tc>
+                  <a:txBody>
+                    <a:bodyPr/>
+                    <a:lstStyle/>
+                    <a:p>
+                      <a:pPr algn="ctr">
+                        <a:defRPr sz="1200">
+                          <a:solidFill>
+                            <a:srgbClr val="333333"/>
+                          </a:solidFill>
+                          <a:latin typeface="Calibri"/>
+                        </a:defRPr>
+                      </a:pPr>
+                      <a:r>
+                        <a:t>20.25</a:t>
+                      </a:r>
+                    </a:p>
+                  </a:txBody>
+                  <a:tcPr/>
+                </a:tc>
+                <a:tc>
+                  <a:txBody>
+                    <a:bodyPr/>
+                    <a:lstStyle/>
+                    <a:p>
+                      <a:pPr algn="ctr">
+                        <a:defRPr sz="1200">
+                          <a:solidFill>
+                            <a:srgbClr val="333333"/>
+                          </a:solidFill>
+                          <a:latin typeface="Calibri"/>
+                        </a:defRPr>
+                      </a:pPr>
+                      <a:r>
+                        <a:t>32.35</a:t>
+                      </a:r>
+                    </a:p>
+                  </a:txBody>
+                  <a:tcPr/>
+                </a:tc>
+              </a:tr>
+              <a:tr h="365760">
+                <a:tc>
+                  <a:txBody>
+                    <a:bodyPr/>
+                    <a:lstStyle/>
+                    <a:p>
+                      <a:pPr algn="ctr">
+                        <a:defRPr sz="1200">
+                          <a:solidFill>
+                            <a:srgbClr val="333333"/>
+                          </a:solidFill>
+                          <a:latin typeface="Calibri"/>
+                        </a:defRPr>
+                      </a:pPr>
+                      <a:r>
+                        <a:t>Ra viol., finished</a:t>
+                      </a:r>
+                    </a:p>
+                  </a:txBody>
+                  <a:tcPr/>
+                </a:tc>
+                <a:tc>
+                  <a:txBody>
+                    <a:bodyPr/>
+                    <a:lstStyle/>
+                    <a:p>
+                      <a:pPr algn="ctr">
+                        <a:defRPr sz="1200">
+                          <a:solidFill>
+                            <a:srgbClr val="333333"/>
+                          </a:solidFill>
+                          <a:latin typeface="Calibri"/>
+                        </a:defRPr>
+                      </a:pPr>
+                      <a:r>
+                        <a:t>0.0%</a:t>
+                      </a:r>
+                    </a:p>
+                  </a:txBody>
+                  <a:tcPr/>
+                </a:tc>
+                <a:tc>
+                  <a:txBody>
+                    <a:bodyPr/>
+                    <a:lstStyle/>
+                    <a:p>
+                      <a:pPr algn="ctr">
+                        <a:defRPr sz="1200">
+                          <a:solidFill>
+                            <a:srgbClr val="333333"/>
+                          </a:solidFill>
+                          <a:latin typeface="Calibri"/>
+                        </a:defRPr>
+                      </a:pPr>
+                      <a:r>
+                        <a:t>0.0%</a:t>
+                      </a:r>
+                    </a:p>
+                  </a:txBody>
+                  <a:tcPr/>
+                </a:tc>
+                <a:tc>
+                  <a:txBody>
+                    <a:bodyPr/>
+                    <a:lstStyle/>
+                    <a:p>
+                      <a:pPr algn="ctr">
+                        <a:defRPr sz="1200">
+                          <a:solidFill>
+                            <a:srgbClr val="333333"/>
+                          </a:solidFill>
+                          <a:latin typeface="Calibri"/>
+                        </a:defRPr>
+                      </a:pPr>
+                      <a:r>
+                        <a:t>0.0%</a:t>
+                      </a:r>
+                    </a:p>
+                  </a:txBody>
+                  <a:tcPr/>
+                </a:tc>
+              </a:tr>
+              <a:tr h="365760">
+                <a:tc>
+                  <a:txBody>
+                    <a:bodyPr/>
+                    <a:lstStyle/>
+                    <a:p>
+                      <a:pPr algn="ctr">
+                        <a:defRPr sz="1200">
+                          <a:solidFill>
+                            <a:srgbClr val="333333"/>
+                          </a:solidFill>
+                          <a:latin typeface="Calibri"/>
+                        </a:defRPr>
+                      </a:pPr>
+                      <a:r>
+                        <a:t>Tool breakage</a:t>
+                      </a:r>
+                    </a:p>
+                  </a:txBody>
+                  <a:tcPr/>
+                </a:tc>
+                <a:tc>
+                  <a:txBody>
+                    <a:bodyPr/>
+                    <a:lstStyle/>
+                    <a:p>
+                      <a:pPr algn="ctr">
+                        <a:defRPr sz="1200">
+                          <a:solidFill>
+                            <a:srgbClr val="333333"/>
+                          </a:solidFill>
+                          <a:latin typeface="Calibri"/>
+                        </a:defRPr>
+                      </a:pPr>
+                      <a:r>
+                        <a:t>5%</a:t>
+                      </a:r>
+                    </a:p>
+                  </a:txBody>
+                  <a:tcPr/>
+                </a:tc>
+                <a:tc>
+                  <a:txBody>
+                    <a:bodyPr/>
+                    <a:lstStyle/>
+                    <a:p>
+                      <a:pPr algn="ctr">
+                        <a:defRPr sz="1200">
+                          <a:solidFill>
+                            <a:srgbClr val="333333"/>
+                          </a:solidFill>
+                          <a:latin typeface="Calibri"/>
+                        </a:defRPr>
+                      </a:pPr>
+                      <a:r>
+                        <a:t>1%</a:t>
+                      </a:r>
+                    </a:p>
+                  </a:txBody>
+                  <a:tcPr/>
+                </a:tc>
+                <a:tc>
+                  <a:txBody>
+                    <a:bodyPr/>
+                    <a:lstStyle/>
+                    <a:p>
+                      <a:pPr algn="ctr">
+                        <a:defRPr sz="1200">
+                          <a:solidFill>
+                            <a:srgbClr val="333333"/>
+                          </a:solidFill>
+                          <a:latin typeface="Calibri"/>
+                        </a:defRPr>
+                      </a:pPr>
+                      <a:r>
+                        <a:t>0%</a:t>
+                      </a:r>
+                    </a:p>
+                  </a:txBody>
+                  <a:tcPr/>
+                </a:tc>
+              </a:tr>
+              <a:tr h="365760">
+                <a:tc>
+                  <a:txBody>
+                    <a:bodyPr/>
+                    <a:lstStyle/>
+                    <a:p>
+                      <a:pPr algn="ctr">
+                        <a:defRPr sz="1200">
+                          <a:solidFill>
+                            <a:srgbClr val="333333"/>
+                          </a:solidFill>
+                          <a:latin typeface="Calibri"/>
+                        </a:defRPr>
+                      </a:pPr>
+                      <a:r>
+                        <a:t>Parts completed</a:t>
+                      </a:r>
+                    </a:p>
+                  </a:txBody>
+                  <a:tcPr/>
+                </a:tc>
+                <a:tc>
+                  <a:txBody>
+                    <a:bodyPr/>
+                    <a:lstStyle/>
+                    <a:p>
+                      <a:pPr algn="ctr">
+                        <a:defRPr sz="1200">
+                          <a:solidFill>
+                            <a:srgbClr val="333333"/>
+                          </a:solidFill>
+                          <a:latin typeface="Calibri"/>
+                        </a:defRPr>
+                      </a:pPr>
+                      <a:r>
+                        <a:t>95%</a:t>
+                      </a:r>
+                    </a:p>
+                  </a:txBody>
+                  <a:tcPr/>
+                </a:tc>
+                <a:tc>
+                  <a:txBody>
+                    <a:bodyPr/>
+                    <a:lstStyle/>
+                    <a:p>
+                      <a:pPr algn="ctr">
+                        <a:defRPr sz="1200">
+                          <a:solidFill>
+                            <a:srgbClr val="333333"/>
+                          </a:solidFill>
+                          <a:latin typeface="Calibri"/>
+                        </a:defRPr>
+                      </a:pPr>
+                      <a:r>
+                        <a:t>99%</a:t>
+                      </a:r>
+                    </a:p>
+                  </a:txBody>
+                  <a:tcPr/>
+                </a:tc>
+                <a:tc>
+                  <a:txBody>
+                    <a:bodyPr/>
+                    <a:lstStyle/>
+                    <a:p>
+                      <a:pPr algn="ctr">
+                        <a:defRPr sz="1200">
+                          <a:solidFill>
+                            <a:srgbClr val="333333"/>
+                          </a:solidFill>
+                          <a:latin typeface="Calibri"/>
+                        </a:defRPr>
+                      </a:pPr>
+                      <a:r>
+                        <a:t>100%</a:t>
+                      </a:r>
+                    </a:p>
+                  </a:txBody>
+                  <a:tcPr/>
+                </a:tc>
+              </a:tr>
+            </a:tbl>
+          </a:graphicData>
+        </a:graphic>
+      </p:graphicFrame>
+      <p:sp>
+        <p:nvSpPr>
+          <p:cNvPr id="9" name="Rectangle 8"/>
+          <p:cNvSpPr/>
+          <p:nvPr/>
+        </p:nvSpPr>
+        <p:spPr>
+          <a:xfrm>
+            <a:off x="5760720" y="5166360"/>
+            <a:ext cx="5943600" cy="1051560"/>
+          </a:xfrm>
+          <a:prstGeom prst="rect">
+            <a:avLst/>
+          </a:prstGeom>
+          <a:solidFill>
+            <a:srgbClr val="FFF8DC"/>
+          </a:solidFill>
+          <a:ln w="25400">
+            <a:solidFill>
+              <a:srgbClr val="CC9900"/>
+            </a:solidFill>
+          </a:ln>
+        </p:spPr>
+        <p:style>
+          <a:lnRef idx="1">
+            <a:schemeClr val="accent1"/>
+          </a:lnRef>
+          <a:fillRef idx="3">
+            <a:schemeClr val="accent1"/>
+          </a:fillRef>
+          <a:effectRef idx="2">
+            <a:schemeClr val="accent1"/>
+          </a:effectRef>
+          <a:fontRef idx="minor">
+            <a:schemeClr val="lt1"/>
+          </a:fontRef>
+        </p:style>
+        <p:txBody>
+          <a:bodyPr rtlCol="0" anchor="ctr"/>
+          <a:lstStyle/>
+          <a:p>
+            <a:pPr algn="ctr"/>
+          </a:p>
+        </p:txBody>
+      </p:sp>
+      <p:sp>
+        <p:nvSpPr>
+          <p:cNvPr id="10" name="TextBox 9"/>
+          <p:cNvSpPr txBox="1"/>
+          <p:nvPr/>
+        </p:nvSpPr>
+        <p:spPr>
+          <a:xfrm>
+            <a:off x="5989320" y="5257800"/>
+            <a:ext cx="5486400" cy="365760"/>
+          </a:xfrm>
+          <a:prstGeom prst="rect">
+            <a:avLst/>
+          </a:prstGeom>
+          <a:noFill/>
+        </p:spPr>
+        <p:txBody>
+          <a:bodyPr wrap="square">
+            <a:spAutoFit/>
+          </a:bodyPr>
+          <a:lstStyle/>
+          <a:p>
+            <a:pPr algn="l">
+              <a:defRPr sz="1500" b="1">
+                <a:solidFill>
+                  <a:srgbClr val="CC9900"/>
+                </a:solidFill>
+                <a:latin typeface="Calibri"/>
+              </a:defRPr>
+            </a:pPr>
+            <a:r>
+              <a:t>Same 100 scenarios, same energy weight w₂ = 0.4</a:t>
+            </a:r>
+          </a:p>
+        </p:txBody>
+      </p:sp>
+      <p:sp>
+        <p:nvSpPr>
+          <p:cNvPr id="11" name="TextBox 10"/>
+          <p:cNvSpPr txBox="1"/>
+          <p:nvPr/>
+        </p:nvSpPr>
+        <p:spPr>
+          <a:xfrm>
+            <a:off x="5989320" y="5623560"/>
+            <a:ext cx="5486400" cy="548640"/>
+          </a:xfrm>
+          <a:prstGeom prst="rect">
+            <a:avLst/>
+          </a:prstGeom>
+          <a:noFill/>
+        </p:spPr>
+        <p:txBody>
+          <a:bodyPr wrap="square">
+            <a:spAutoFit/>
+          </a:bodyPr>
+          <a:lstStyle/>
+          <a:p>
+            <a:pPr>
+              <a:spcAft>
+                <a:spcPts val="200"/>
+              </a:spcAft>
+              <a:defRPr sz="1300">
+                <a:solidFill>
+                  <a:srgbClr val="333333"/>
+                </a:solidFill>
+                <a:latin typeface="Calibri"/>
+              </a:defRPr>
+            </a:pPr>
+            <a:r>
+              <a:t>All three arms keep the finished surface in spec (0% violations)</a:t>
             </a:r>
           </a:p>
         </p:txBody>
@@ -6907,7 +7332,7 @@
               </a:defRPr>
             </a:pPr>
             <a:r>
-              <a:t>Interactive Digital Twin Workstation (Streamlit)</a:t>
+              <a:t>Controller Initialization: What It Shows</a:t>
             </a:r>
           </a:p>
         </p:txBody>
@@ -6920,18 +7345,18 @@
         </p:nvSpPr>
         <p:spPr>
           <a:xfrm>
-            <a:off x="457200" y="1280160"/>
-            <a:ext cx="11247120" cy="914400"/>
+            <a:off x="457200" y="1234440"/>
+            <a:ext cx="5532120" cy="3291840"/>
           </a:xfrm>
           <a:prstGeom prst="rect">
             <a:avLst/>
           </a:prstGeom>
           <a:solidFill>
-            <a:srgbClr val="F0F0F0"/>
+            <a:srgbClr val="FFF8DC"/>
           </a:solidFill>
-          <a:ln w="12700">
+          <a:ln w="25400">
             <a:solidFill>
-              <a:srgbClr val="003366"/>
+              <a:srgbClr val="CC9900"/>
             </a:solidFill>
           </a:ln>
         </p:spPr>
@@ -6966,7 +7391,7 @@
         <p:spPr>
           <a:xfrm>
             <a:off x="731520" y="1371600"/>
-            <a:ext cx="2286000" cy="731520"/>
+            <a:ext cx="5029200" cy="457200"/>
           </a:xfrm>
           <a:prstGeom prst="rect">
             <a:avLst/>
@@ -6980,15 +7405,15 @@
           <a:lstStyle/>
           <a:p>
             <a:pPr algn="l">
-              <a:defRPr sz="1800" b="1">
-                <a:solidFill>
-                  <a:srgbClr val="003366"/>
-                </a:solidFill>
-                <a:latin typeface="Calibri"/>
-              </a:defRPr>
-            </a:pPr>
-            <a:r>
-              <a:t>📐 2D Stock Depletion</a:t>
+              <a:defRPr sz="2000" b="1">
+                <a:solidFill>
+                  <a:srgbClr val="CC9900"/>
+                </a:solidFill>
+                <a:latin typeface="Calibri"/>
+              </a:defRPr>
+            </a:pPr>
+            <a:r>
+              <a:t>No advantage over the controller</a:t>
             </a:r>
           </a:p>
         </p:txBody>
@@ -7001,8 +7426,8 @@
         </p:nvSpPr>
         <p:spPr>
           <a:xfrm>
-            <a:off x="3200400" y="1371600"/>
-            <a:ext cx="8229600" cy="731520"/>
+            <a:off x="731520" y="1920240"/>
+            <a:ext cx="5029200" cy="2468880"/>
           </a:xfrm>
           <a:prstGeom prst="rect">
             <a:avLst/>
@@ -7015,8 +7440,11 @@
           </a:bodyPr>
           <a:lstStyle/>
           <a:p>
-            <a:pPr algn="l">
-              <a:defRPr sz="1600" b="0">
+            <a:pPr>
+              <a:spcAft>
+                <a:spcPts val="600"/>
+              </a:spcAft>
+              <a:defRPr sz="1500">
                 <a:solidFill>
                   <a:srgbClr val="333333"/>
                 </a:solidFill>
@@ -7024,7 +7452,39 @@
               </a:defRPr>
             </a:pPr>
             <a:r>
-              <a:t>Cylindrical billet cross-section; pass-by-pass cutout; remaining κ, a_p; tool engagement diagram</a:t>
+              <a:t>• The controller still removes 38% more material per minute (1560.6 against 1126.1 mm³/min)</a:t>
+            </a:r>
+          </a:p>
+          <a:p>
+            <a:pPr>
+              <a:spcAft>
+                <a:spcPts val="600"/>
+              </a:spcAft>
+              <a:defRPr sz="1500">
+                <a:solidFill>
+                  <a:srgbClr val="333333"/>
+                </a:solidFill>
+                <a:latin typeface="Calibri"/>
+              </a:defRPr>
+            </a:pPr>
+            <a:r>
+              <a:t>• and finishes in 13.5 s against 32.3 s</a:t>
+            </a:r>
+          </a:p>
+          <a:p>
+            <a:pPr>
+              <a:spcAft>
+                <a:spcPts val="600"/>
+              </a:spcAft>
+              <a:defRPr sz="1500">
+                <a:solidFill>
+                  <a:srgbClr val="333333"/>
+                </a:solidFill>
+                <a:latin typeface="Calibri"/>
+              </a:defRPr>
+            </a:pPr>
+            <a:r>
+              <a:t>• The reward cannot separate the two learned policies: 199.35 against 198.57 is a gap of 0.8, while the standard error of the mean over 100 scenarios is 30.0/√100 = 3.0</a:t>
             </a:r>
           </a:p>
         </p:txBody>
@@ -7037,8 +7497,8 @@
         </p:nvSpPr>
         <p:spPr>
           <a:xfrm>
-            <a:off x="457200" y="2286000"/>
-            <a:ext cx="11247120" cy="914400"/>
+            <a:off x="6217920" y="1234440"/>
+            <a:ext cx="5532120" cy="3291840"/>
           </a:xfrm>
           <a:prstGeom prst="rect">
             <a:avLst/>
@@ -7046,7 +7506,7 @@
           <a:solidFill>
             <a:srgbClr val="F0F0F0"/>
           </a:solidFill>
-          <a:ln w="12700">
+          <a:ln w="19050">
             <a:solidFill>
               <a:srgbClr val="003366"/>
             </a:solidFill>
@@ -7082,8 +7542,8 @@
         </p:nvSpPr>
         <p:spPr>
           <a:xfrm>
-            <a:off x="731520" y="2377440"/>
-            <a:ext cx="2286000" cy="731520"/>
+            <a:off x="6492240" y="1371600"/>
+            <a:ext cx="5029200" cy="731520"/>
           </a:xfrm>
           <a:prstGeom prst="rect">
             <a:avLst/>
@@ -7097,7 +7557,7 @@
           <a:lstStyle/>
           <a:p>
             <a:pPr algn="l">
-              <a:defRPr sz="1800" b="1">
+              <a:defRPr sz="2000" b="1">
                 <a:solidFill>
                   <a:srgbClr val="003366"/>
                 </a:solidFill>
@@ -7105,7 +7565,7 @@
               </a:defRPr>
             </a:pPr>
             <a:r>
-              <a:t>📊 Micro-Topography</a:t>
+              <a:t>Consistency, paid for with throughput and energy</a:t>
             </a:r>
           </a:p>
         </p:txBody>
@@ -7118,8 +7578,8 @@
         </p:nvSpPr>
         <p:spPr>
           <a:xfrm>
-            <a:off x="3200400" y="2377440"/>
-            <a:ext cx="8229600" cy="731520"/>
+            <a:off x="6492240" y="1920240"/>
+            <a:ext cx="5029200" cy="2468880"/>
           </a:xfrm>
           <a:prstGeom prst="rect">
             <a:avLst/>
@@ -7132,8 +7592,11 @@
           </a:bodyPr>
           <a:lstStyle/>
           <a:p>
-            <a:pPr algn="l">
-              <a:defRPr sz="1600" b="0">
+            <a:pPr>
+              <a:spcAft>
+                <a:spcPts val="600"/>
+              </a:spcAft>
+              <a:defRPr sz="1500">
                 <a:solidFill>
                   <a:srgbClr val="333333"/>
                 </a:solidFill>
@@ -7141,7 +7604,39 @@
               </a:defRPr>
             </a:pPr>
             <a:r>
-              <a:t>Feed-mark cusp profile: y_cusp(x) ≈ x²/(8r_ε) + noise; ISO 1302 R_a overlay with 1.6 μm ceiling</a:t>
+              <a:t>• Reward std across the 100 scenarios falls from 30.0 to 3.4, tool breakage falls to zero, every part is completed</a:t>
+            </a:r>
+          </a:p>
+          <a:p>
+            <a:pPr>
+              <a:spcAft>
+                <a:spcPts val="600"/>
+              </a:spcAft>
+              <a:defRPr sz="1500">
+                <a:solidFill>
+                  <a:srgbClr val="333333"/>
+                </a:solidFill>
+                <a:latin typeface="Calibri"/>
+              </a:defRPr>
+            </a:pPr>
+            <a:r>
+              <a:t>• Against the from-scratch policy: 6.6% less removal rate and 12.9% more energy per part</a:t>
+            </a:r>
+          </a:p>
+          <a:p>
+            <a:pPr>
+              <a:spcAft>
+                <a:spcPts val="600"/>
+              </a:spcAft>
+              <a:defRPr sz="1500">
+                <a:solidFill>
+                  <a:srgbClr val="333333"/>
+                </a:solidFill>
+                <a:latin typeface="Calibri"/>
+              </a:defRPr>
+            </a:pPr>
+            <a:r>
+              <a:t>• The controller is the least reliable arm of the three: std 65.9, 5% breakage, 95% of the parts completed</a:t>
             </a:r>
           </a:p>
         </p:txBody>
@@ -7154,16 +7649,16 @@
         </p:nvSpPr>
         <p:spPr>
           <a:xfrm>
-            <a:off x="457200" y="3291840"/>
-            <a:ext cx="11247120" cy="914400"/>
+            <a:off x="457200" y="4754880"/>
+            <a:ext cx="11292840" cy="1463040"/>
           </a:xfrm>
           <a:prstGeom prst="rect">
             <a:avLst/>
           </a:prstGeom>
           <a:solidFill>
-            <a:srgbClr val="F0F0F0"/>
+            <a:srgbClr val="E6F0FA"/>
           </a:solidFill>
-          <a:ln w="12700">
+          <a:ln w="19050">
             <a:solidFill>
               <a:srgbClr val="003366"/>
             </a:solidFill>
@@ -7199,8 +7694,8 @@
         </p:nvSpPr>
         <p:spPr>
           <a:xfrm>
-            <a:off x="731520" y="3383280"/>
-            <a:ext cx="2286000" cy="731520"/>
+            <a:off x="731520" y="4892040"/>
+            <a:ext cx="10698480" cy="457200"/>
           </a:xfrm>
           <a:prstGeom prst="rect">
             <a:avLst/>
@@ -7214,7 +7709,7 @@
           <a:lstStyle/>
           <a:p>
             <a:pPr algn="l">
-              <a:defRPr sz="1800" b="1">
+              <a:defRPr sz="2000" b="1">
                 <a:solidFill>
                   <a:srgbClr val="003366"/>
                 </a:solidFill>
@@ -7222,7 +7717,7 @@
               </a:defRPr>
             </a:pPr>
             <a:r>
-              <a:t>📝 G-Code Generator</a:t>
+              <a:t>What the work claims</a:t>
             </a:r>
           </a:p>
         </p:txBody>
@@ -7235,8 +7730,8 @@
         </p:nvSpPr>
         <p:spPr>
           <a:xfrm>
-            <a:off x="3200400" y="3383280"/>
-            <a:ext cx="8229600" cy="731520"/>
+            <a:off x="731520" y="5394960"/>
+            <a:ext cx="10698480" cy="731520"/>
           </a:xfrm>
           <a:prstGeom prst="rect">
             <a:avLst/>
@@ -7249,8 +7744,11 @@
           </a:bodyPr>
           <a:lstStyle/>
           <a:p>
-            <a:pPr algn="l">
-              <a:defRPr sz="1600" b="0">
+            <a:pPr>
+              <a:spcAft>
+                <a:spcPts val="400"/>
+              </a:spcAft>
+              <a:defRPr sz="1600">
                 <a:solidFill>
                   <a:srgbClr val="333333"/>
                 </a:solidFill>
@@ -7258,277 +7756,7 @@
               </a:defRPr>
             </a:pPr>
             <a:r>
-              <a:t>ISO 6983 Fanuc/Siemens compliant; emits exact PPO parameter sequence; tool/diameter aware</a:t>
-            </a:r>
-          </a:p>
-        </p:txBody>
-      </p:sp>
-      <p:sp>
-        <p:nvSpPr>
-          <p:cNvPr id="13" name="Rectangle 12"/>
-          <p:cNvSpPr/>
-          <p:nvPr/>
-        </p:nvSpPr>
-        <p:spPr>
-          <a:xfrm>
-            <a:off x="457200" y="4297680"/>
-            <a:ext cx="11247120" cy="914400"/>
-          </a:xfrm>
-          <a:prstGeom prst="rect">
-            <a:avLst/>
-          </a:prstGeom>
-          <a:solidFill>
-            <a:srgbClr val="F0F0F0"/>
-          </a:solidFill>
-          <a:ln w="12700">
-            <a:solidFill>
-              <a:srgbClr val="003366"/>
-            </a:solidFill>
-          </a:ln>
-        </p:spPr>
-        <p:style>
-          <a:lnRef idx="1">
-            <a:schemeClr val="accent1"/>
-          </a:lnRef>
-          <a:fillRef idx="3">
-            <a:schemeClr val="accent1"/>
-          </a:fillRef>
-          <a:effectRef idx="2">
-            <a:schemeClr val="accent1"/>
-          </a:effectRef>
-          <a:fontRef idx="minor">
-            <a:schemeClr val="lt1"/>
-          </a:fontRef>
-        </p:style>
-        <p:txBody>
-          <a:bodyPr rtlCol="0" anchor="ctr"/>
-          <a:lstStyle/>
-          <a:p>
-            <a:pPr algn="ctr"/>
-          </a:p>
-        </p:txBody>
-      </p:sp>
-      <p:sp>
-        <p:nvSpPr>
-          <p:cNvPr id="14" name="TextBox 13"/>
-          <p:cNvSpPr txBox="1"/>
-          <p:nvPr/>
-        </p:nvSpPr>
-        <p:spPr>
-          <a:xfrm>
-            <a:off x="731520" y="4389120"/>
-            <a:ext cx="2286000" cy="731520"/>
-          </a:xfrm>
-          <a:prstGeom prst="rect">
-            <a:avLst/>
-          </a:prstGeom>
-          <a:noFill/>
-        </p:spPr>
-        <p:txBody>
-          <a:bodyPr wrap="square">
-            <a:spAutoFit/>
-          </a:bodyPr>
-          <a:lstStyle/>
-          <a:p>
-            <a:pPr algn="l">
-              <a:defRPr sz="1800" b="1">
-                <a:solidFill>
-                  <a:srgbClr val="003366"/>
-                </a:solidFill>
-                <a:latin typeface="Calibri"/>
-              </a:defRPr>
-            </a:pPr>
-            <a:r>
-              <a:t>⚔️ Multi-Controller</a:t>
-            </a:r>
-          </a:p>
-        </p:txBody>
-      </p:sp>
-      <p:sp>
-        <p:nvSpPr>
-          <p:cNvPr id="15" name="TextBox 14"/>
-          <p:cNvSpPr txBox="1"/>
-          <p:nvPr/>
-        </p:nvSpPr>
-        <p:spPr>
-          <a:xfrm>
-            <a:off x="3200400" y="4389120"/>
-            <a:ext cx="8229600" cy="731520"/>
-          </a:xfrm>
-          <a:prstGeom prst="rect">
-            <a:avLst/>
-          </a:prstGeom>
-          <a:noFill/>
-        </p:spPr>
-        <p:txBody>
-          <a:bodyPr wrap="square">
-            <a:spAutoFit/>
-          </a:bodyPr>
-          <a:lstStyle/>
-          <a:p>
-            <a:pPr algn="l">
-              <a:defRPr sz="1600" b="0">
-                <a:solidFill>
-                  <a:srgbClr val="333333"/>
-                </a:solidFill>
-                <a:latin typeface="Calibri"/>
-              </a:defRPr>
-            </a:pPr>
-            <a:r>
-              <a:t>Side-by-side: PPO vs NSGA-II vs Rule-Based vs Constant-High; live telemetry overlay</a:t>
-            </a:r>
-          </a:p>
-        </p:txBody>
-      </p:sp>
-      <p:sp>
-        <p:nvSpPr>
-          <p:cNvPr id="16" name="Rectangle 15"/>
-          <p:cNvSpPr/>
-          <p:nvPr/>
-        </p:nvSpPr>
-        <p:spPr>
-          <a:xfrm>
-            <a:off x="457200" y="5303520"/>
-            <a:ext cx="11247120" cy="914400"/>
-          </a:xfrm>
-          <a:prstGeom prst="rect">
-            <a:avLst/>
-          </a:prstGeom>
-          <a:solidFill>
-            <a:srgbClr val="F0F0F0"/>
-          </a:solidFill>
-          <a:ln w="12700">
-            <a:solidFill>
-              <a:srgbClr val="003366"/>
-            </a:solidFill>
-          </a:ln>
-        </p:spPr>
-        <p:style>
-          <a:lnRef idx="1">
-            <a:schemeClr val="accent1"/>
-          </a:lnRef>
-          <a:fillRef idx="3">
-            <a:schemeClr val="accent1"/>
-          </a:fillRef>
-          <a:effectRef idx="2">
-            <a:schemeClr val="accent1"/>
-          </a:effectRef>
-          <a:fontRef idx="minor">
-            <a:schemeClr val="lt1"/>
-          </a:fontRef>
-        </p:style>
-        <p:txBody>
-          <a:bodyPr rtlCol="0" anchor="ctr"/>
-          <a:lstStyle/>
-          <a:p>
-            <a:pPr algn="ctr"/>
-          </a:p>
-        </p:txBody>
-      </p:sp>
-      <p:sp>
-        <p:nvSpPr>
-          <p:cNvPr id="17" name="TextBox 16"/>
-          <p:cNvSpPr txBox="1"/>
-          <p:nvPr/>
-        </p:nvSpPr>
-        <p:spPr>
-          <a:xfrm>
-            <a:off x="731520" y="5394960"/>
-            <a:ext cx="2286000" cy="731520"/>
-          </a:xfrm>
-          <a:prstGeom prst="rect">
-            <a:avLst/>
-          </a:prstGeom>
-          <a:noFill/>
-        </p:spPr>
-        <p:txBody>
-          <a:bodyPr wrap="square">
-            <a:spAutoFit/>
-          </a:bodyPr>
-          <a:lstStyle/>
-          <a:p>
-            <a:pPr algn="l">
-              <a:defRPr sz="1800" b="1">
-                <a:solidFill>
-                  <a:srgbClr val="003366"/>
-                </a:solidFill>
-                <a:latin typeface="Calibri"/>
-              </a:defRPr>
-            </a:pPr>
-            <a:r>
-              <a:t>⚡ Cached Loading</a:t>
-            </a:r>
-          </a:p>
-        </p:txBody>
-      </p:sp>
-      <p:sp>
-        <p:nvSpPr>
-          <p:cNvPr id="18" name="TextBox 17"/>
-          <p:cNvSpPr txBox="1"/>
-          <p:nvPr/>
-        </p:nvSpPr>
-        <p:spPr>
-          <a:xfrm>
-            <a:off x="3200400" y="5394960"/>
-            <a:ext cx="8229600" cy="731520"/>
-          </a:xfrm>
-          <a:prstGeom prst="rect">
-            <a:avLst/>
-          </a:prstGeom>
-          <a:noFill/>
-        </p:spPr>
-        <p:txBody>
-          <a:bodyPr wrap="square">
-            <a:spAutoFit/>
-          </a:bodyPr>
-          <a:lstStyle/>
-          <a:p>
-            <a:pPr algn="l">
-              <a:defRPr sz="1600" b="0">
-                <a:solidFill>
-                  <a:srgbClr val="333333"/>
-                </a:solidFill>
-                <a:latin typeface="Calibri"/>
-              </a:defRPr>
-            </a:pPr>
-            <a:r>
-              <a:t>@st.cache_resource loads 1M-step PPO model once per session</a:t>
-            </a:r>
-          </a:p>
-        </p:txBody>
-      </p:sp>
-      <p:sp>
-        <p:nvSpPr>
-          <p:cNvPr id="19" name="TextBox 18"/>
-          <p:cNvSpPr txBox="1"/>
-          <p:nvPr/>
-        </p:nvSpPr>
-        <p:spPr>
-          <a:xfrm>
-            <a:off x="457200" y="6217920"/>
-            <a:ext cx="10972800" cy="457200"/>
-          </a:xfrm>
-          <a:prstGeom prst="rect">
-            <a:avLst/>
-          </a:prstGeom>
-          <a:noFill/>
-        </p:spPr>
-        <p:txBody>
-          <a:bodyPr wrap="square">
-            <a:spAutoFit/>
-          </a:bodyPr>
-          <a:lstStyle/>
-          <a:p>
-            <a:pPr algn="ctr">
-              <a:defRPr sz="2000" b="1">
-                <a:solidFill>
-                  <a:srgbClr val="003366"/>
-                </a:solidFill>
-                <a:latin typeface="Calibri"/>
-              </a:defRPr>
-            </a:pPr>
-            <a:r>
-              <a:t>Launch:  streamlit run app.py</a:t>
+              <a:t>The reinforcement learning agent navigates the energy/throughput trade-off inside a fixed constraint set. It does not beat a classical controller that re-optimizes every pass with the exact physics.</a:t>
             </a:r>
           </a:p>
         </p:txBody>
@@ -7633,7 +7861,7 @@
               </a:defRPr>
             </a:pPr>
             <a:r>
-              <a:t>Software Engineering: Reproducibility &amp; Quality</a:t>
+              <a:t>Transfer Experiment: Cross-Material Adaptation</a:t>
             </a:r>
           </a:p>
         </p:txBody>
@@ -7647,7 +7875,7 @@
         <p:spPr>
           <a:xfrm>
             <a:off x="457200" y="1188720"/>
-            <a:ext cx="5486400" cy="365760"/>
+            <a:ext cx="11247120" cy="731520"/>
           </a:xfrm>
           <a:prstGeom prst="rect">
             <a:avLst/>
@@ -7661,29 +7889,728 @@
           <a:lstStyle/>
           <a:p>
             <a:pPr algn="l">
-              <a:defRPr sz="1600" b="1">
-                <a:solidFill>
-                  <a:srgbClr val="003366"/>
-                </a:solidFill>
-                <a:latin typeface="Calibri"/>
-              </a:defRPr>
-            </a:pPr>
-            <a:r>
-              <a:t>Architecture &amp; Reproducibility</a:t>
-            </a:r>
-          </a:p>
-        </p:txBody>
-      </p:sp>
-      <p:sp>
-        <p:nvSpPr>
-          <p:cNvPr id="5" name="TextBox 4"/>
+              <a:defRPr sz="1500" b="1">
+                <a:solidFill>
+                  <a:srgbClr val="C80000"/>
+                </a:solidFill>
+                <a:latin typeface="Calibri"/>
+              </a:defRPr>
+            </a:pPr>
+            <a:r>
+              <a:t>🎯 Target material (harder alloy, same machine): k₁ × 1.25, k₂ × 1.30, C_wear × 2.0. The source policy was trained for 300,000 steps on the nominal material; the adaptation budget on the target is 50,000 steps.</a:t>
+            </a:r>
+          </a:p>
+        </p:txBody>
+      </p:sp>
+      <p:graphicFrame>
+        <p:nvGraphicFramePr>
+          <p:cNvPr id="5" name="Table 4"/>
+          <p:cNvGraphicFramePr>
+            <a:graphicFrameLocks noGrp="1"/>
+          </p:cNvGraphicFramePr>
+          <p:nvPr/>
+        </p:nvGraphicFramePr>
+        <p:xfrm>
+          <a:off x="640080" y="2011680"/>
+          <a:ext cx="10881360" cy="1737360"/>
+        </p:xfrm>
+        <a:graphic>
+          <a:graphicData uri="http://schemas.openxmlformats.org/drawingml/2006/table">
+            <a:tbl>
+              <a:tblPr firstRow="1" bandRow="1">
+                <a:tableStyleId>{5C22544A-7EE6-4342-B048-85BDC9FD1C3A}</a:tableStyleId>
+              </a:tblPr>
+              <a:tblGrid>
+                <a:gridCol w="4023360"/>
+                <a:gridCol w="1554480"/>
+                <a:gridCol w="1828800"/>
+                <a:gridCol w="2011680"/>
+                <a:gridCol w="1463040"/>
+              </a:tblGrid>
+              <a:tr h="347472">
+                <a:tc>
+                  <a:txBody>
+                    <a:bodyPr/>
+                    <a:lstStyle/>
+                    <a:p>
+                      <a:pPr algn="ctr">
+                        <a:defRPr sz="1300" b="1">
+                          <a:solidFill>
+                            <a:srgbClr val="FFFFFF"/>
+                          </a:solidFill>
+                          <a:latin typeface="Calibri"/>
+                        </a:defRPr>
+                      </a:pPr>
+                      <a:r>
+                        <a:t>Arm</a:t>
+                      </a:r>
+                    </a:p>
+                  </a:txBody>
+                  <a:tcPr>
+                    <a:solidFill>
+                      <a:srgbClr val="003366"/>
+                    </a:solidFill>
+                  </a:tcPr>
+                </a:tc>
+                <a:tc>
+                  <a:txBody>
+                    <a:bodyPr/>
+                    <a:lstStyle/>
+                    <a:p>
+                      <a:pPr algn="ctr">
+                        <a:defRPr sz="1300" b="1">
+                          <a:solidFill>
+                            <a:srgbClr val="FFFFFF"/>
+                          </a:solidFill>
+                          <a:latin typeface="Calibri"/>
+                        </a:defRPr>
+                      </a:pPr>
+                      <a:r>
+                        <a:t>Mean reward</a:t>
+                      </a:r>
+                    </a:p>
+                  </a:txBody>
+                  <a:tcPr>
+                    <a:solidFill>
+                      <a:srgbClr val="003366"/>
+                    </a:solidFill>
+                  </a:tcPr>
+                </a:tc>
+                <a:tc>
+                  <a:txBody>
+                    <a:bodyPr/>
+                    <a:lstStyle/>
+                    <a:p>
+                      <a:pPr algn="ctr">
+                        <a:defRPr sz="1300" b="1">
+                          <a:solidFill>
+                            <a:srgbClr val="FFFFFF"/>
+                          </a:solidFill>
+                          <a:latin typeface="Calibri"/>
+                        </a:defRPr>
+                      </a:pPr>
+                      <a:r>
+                        <a:t>R_a violations</a:t>
+                      </a:r>
+                    </a:p>
+                    <a:p>
+                      <a:pPr algn="ctr">
+                        <a:defRPr sz="1300" b="1">
+                          <a:solidFill>
+                            <a:srgbClr val="FFFFFF"/>
+                          </a:solidFill>
+                          <a:latin typeface="Calibri"/>
+                        </a:defRPr>
+                      </a:pPr>
+                      <a:r>
+                        <a:t>(worst pass)</a:t>
+                      </a:r>
+                    </a:p>
+                  </a:txBody>
+                  <a:tcPr>
+                    <a:solidFill>
+                      <a:srgbClr val="003366"/>
+                    </a:solidFill>
+                  </a:tcPr>
+                </a:tc>
+                <a:tc>
+                  <a:txBody>
+                    <a:bodyPr/>
+                    <a:lstStyle/>
+                    <a:p>
+                      <a:pPr algn="ctr">
+                        <a:defRPr sz="1300" b="1">
+                          <a:solidFill>
+                            <a:srgbClr val="FFFFFF"/>
+                          </a:solidFill>
+                          <a:latin typeface="Calibri"/>
+                        </a:defRPr>
+                      </a:pPr>
+                      <a:r>
+                        <a:t>R_a violations</a:t>
+                      </a:r>
+                    </a:p>
+                    <a:p>
+                      <a:pPr algn="ctr">
+                        <a:defRPr sz="1300" b="1">
+                          <a:solidFill>
+                            <a:srgbClr val="FFFFFF"/>
+                          </a:solidFill>
+                          <a:latin typeface="Calibri"/>
+                        </a:defRPr>
+                      </a:pPr>
+                      <a:r>
+                        <a:t>(finished surface)</a:t>
+                      </a:r>
+                    </a:p>
+                  </a:txBody>
+                  <a:tcPr>
+                    <a:solidFill>
+                      <a:srgbClr val="003366"/>
+                    </a:solidFill>
+                  </a:tcPr>
+                </a:tc>
+                <a:tc>
+                  <a:txBody>
+                    <a:bodyPr/>
+                    <a:lstStyle/>
+                    <a:p>
+                      <a:pPr algn="ctr">
+                        <a:defRPr sz="1300" b="1">
+                          <a:solidFill>
+                            <a:srgbClr val="FFFFFF"/>
+                          </a:solidFill>
+                          <a:latin typeface="Calibri"/>
+                        </a:defRPr>
+                      </a:pPr>
+                      <a:r>
+                        <a:t>Parts</a:t>
+                      </a:r>
+                    </a:p>
+                    <a:p>
+                      <a:pPr algn="ctr">
+                        <a:defRPr sz="1300" b="1">
+                          <a:solidFill>
+                            <a:srgbClr val="FFFFFF"/>
+                          </a:solidFill>
+                          <a:latin typeface="Calibri"/>
+                        </a:defRPr>
+                      </a:pPr>
+                      <a:r>
+                        <a:t>completed</a:t>
+                      </a:r>
+                    </a:p>
+                  </a:txBody>
+                  <a:tcPr>
+                    <a:solidFill>
+                      <a:srgbClr val="003366"/>
+                    </a:solidFill>
+                  </a:tcPr>
+                </a:tc>
+              </a:tr>
+              <a:tr h="347472">
+                <a:tc>
+                  <a:txBody>
+                    <a:bodyPr/>
+                    <a:lstStyle/>
+                    <a:p>
+                      <a:pPr algn="ctr">
+                        <a:defRPr sz="1300">
+                          <a:solidFill>
+                            <a:srgbClr val="333333"/>
+                          </a:solidFill>
+                          <a:latin typeface="Calibri"/>
+                        </a:defRPr>
+                      </a:pPr>
+                      <a:r>
+                        <a:t>Source policy, zero shot</a:t>
+                      </a:r>
+                    </a:p>
+                  </a:txBody>
+                  <a:tcPr/>
+                </a:tc>
+                <a:tc>
+                  <a:txBody>
+                    <a:bodyPr/>
+                    <a:lstStyle/>
+                    <a:p>
+                      <a:pPr algn="ctr">
+                        <a:defRPr sz="1300">
+                          <a:solidFill>
+                            <a:srgbClr val="333333"/>
+                          </a:solidFill>
+                          <a:latin typeface="Calibri"/>
+                        </a:defRPr>
+                      </a:pPr>
+                      <a:r>
+                        <a:t>182.5</a:t>
+                      </a:r>
+                    </a:p>
+                  </a:txBody>
+                  <a:tcPr/>
+                </a:tc>
+                <a:tc>
+                  <a:txBody>
+                    <a:bodyPr/>
+                    <a:lstStyle/>
+                    <a:p>
+                      <a:pPr algn="ctr">
+                        <a:defRPr sz="1300">
+                          <a:solidFill>
+                            <a:srgbClr val="333333"/>
+                          </a:solidFill>
+                          <a:latin typeface="Calibri"/>
+                        </a:defRPr>
+                      </a:pPr>
+                      <a:r>
+                        <a:t>100.0%</a:t>
+                      </a:r>
+                    </a:p>
+                  </a:txBody>
+                  <a:tcPr/>
+                </a:tc>
+                <a:tc>
+                  <a:txBody>
+                    <a:bodyPr/>
+                    <a:lstStyle/>
+                    <a:p>
+                      <a:pPr algn="ctr">
+                        <a:defRPr sz="1300">
+                          <a:solidFill>
+                            <a:srgbClr val="333333"/>
+                          </a:solidFill>
+                          <a:latin typeface="Calibri"/>
+                        </a:defRPr>
+                      </a:pPr>
+                      <a:r>
+                        <a:t>3.3%</a:t>
+                      </a:r>
+                    </a:p>
+                  </a:txBody>
+                  <a:tcPr/>
+                </a:tc>
+                <a:tc>
+                  <a:txBody>
+                    <a:bodyPr/>
+                    <a:lstStyle/>
+                    <a:p>
+                      <a:pPr algn="ctr">
+                        <a:defRPr sz="1300">
+                          <a:solidFill>
+                            <a:srgbClr val="333333"/>
+                          </a:solidFill>
+                          <a:latin typeface="Calibri"/>
+                        </a:defRPr>
+                      </a:pPr>
+                      <a:r>
+                        <a:t>93.3%</a:t>
+                      </a:r>
+                    </a:p>
+                  </a:txBody>
+                  <a:tcPr/>
+                </a:tc>
+              </a:tr>
+              <a:tr h="347472">
+                <a:tc>
+                  <a:txBody>
+                    <a:bodyPr/>
+                    <a:lstStyle/>
+                    <a:p>
+                      <a:pPr algn="ctr">
+                        <a:defRPr sz="1300">
+                          <a:solidFill>
+                            <a:srgbClr val="333333"/>
+                          </a:solidFill>
+                          <a:latin typeface="Calibri"/>
+                        </a:defRPr>
+                      </a:pPr>
+                      <a:r>
+                        <a:t>Source policy, fine tuned (50k)</a:t>
+                      </a:r>
+                    </a:p>
+                  </a:txBody>
+                  <a:tcPr/>
+                </a:tc>
+                <a:tc>
+                  <a:txBody>
+                    <a:bodyPr/>
+                    <a:lstStyle/>
+                    <a:p>
+                      <a:pPr algn="ctr">
+                        <a:defRPr sz="1300">
+                          <a:solidFill>
+                            <a:srgbClr val="333333"/>
+                          </a:solidFill>
+                          <a:latin typeface="Calibri"/>
+                        </a:defRPr>
+                      </a:pPr>
+                      <a:r>
+                        <a:t>196.6</a:t>
+                      </a:r>
+                    </a:p>
+                  </a:txBody>
+                  <a:tcPr/>
+                </a:tc>
+                <a:tc>
+                  <a:txBody>
+                    <a:bodyPr/>
+                    <a:lstStyle/>
+                    <a:p>
+                      <a:pPr algn="ctr">
+                        <a:defRPr sz="1300">
+                          <a:solidFill>
+                            <a:srgbClr val="333333"/>
+                          </a:solidFill>
+                          <a:latin typeface="Calibri"/>
+                        </a:defRPr>
+                      </a:pPr>
+                      <a:r>
+                        <a:t>0.0%</a:t>
+                      </a:r>
+                    </a:p>
+                  </a:txBody>
+                  <a:tcPr/>
+                </a:tc>
+                <a:tc>
+                  <a:txBody>
+                    <a:bodyPr/>
+                    <a:lstStyle/>
+                    <a:p>
+                      <a:pPr algn="ctr">
+                        <a:defRPr sz="1300">
+                          <a:solidFill>
+                            <a:srgbClr val="333333"/>
+                          </a:solidFill>
+                          <a:latin typeface="Calibri"/>
+                        </a:defRPr>
+                      </a:pPr>
+                      <a:r>
+                        <a:t>0.0%</a:t>
+                      </a:r>
+                    </a:p>
+                  </a:txBody>
+                  <a:tcPr/>
+                </a:tc>
+                <a:tc>
+                  <a:txBody>
+                    <a:bodyPr/>
+                    <a:lstStyle/>
+                    <a:p>
+                      <a:pPr algn="ctr">
+                        <a:defRPr sz="1300">
+                          <a:solidFill>
+                            <a:srgbClr val="333333"/>
+                          </a:solidFill>
+                          <a:latin typeface="Calibri"/>
+                        </a:defRPr>
+                      </a:pPr>
+                      <a:r>
+                        <a:t>100.0%</a:t>
+                      </a:r>
+                    </a:p>
+                  </a:txBody>
+                  <a:tcPr/>
+                </a:tc>
+              </a:tr>
+              <a:tr h="347472">
+                <a:tc>
+                  <a:txBody>
+                    <a:bodyPr/>
+                    <a:lstStyle/>
+                    <a:p>
+                      <a:pPr algn="ctr">
+                        <a:defRPr sz="1300">
+                          <a:solidFill>
+                            <a:srgbClr val="333333"/>
+                          </a:solidFill>
+                          <a:latin typeface="Calibri"/>
+                        </a:defRPr>
+                      </a:pPr>
+                      <a:r>
+                        <a:t>Trained on the target from scratch (50k)</a:t>
+                      </a:r>
+                    </a:p>
+                  </a:txBody>
+                  <a:tcPr/>
+                </a:tc>
+                <a:tc>
+                  <a:txBody>
+                    <a:bodyPr/>
+                    <a:lstStyle/>
+                    <a:p>
+                      <a:pPr algn="ctr">
+                        <a:defRPr sz="1300">
+                          <a:solidFill>
+                            <a:srgbClr val="333333"/>
+                          </a:solidFill>
+                          <a:latin typeface="Calibri"/>
+                        </a:defRPr>
+                      </a:pPr>
+                      <a:r>
+                        <a:t>196.6</a:t>
+                      </a:r>
+                    </a:p>
+                  </a:txBody>
+                  <a:tcPr/>
+                </a:tc>
+                <a:tc>
+                  <a:txBody>
+                    <a:bodyPr/>
+                    <a:lstStyle/>
+                    <a:p>
+                      <a:pPr algn="ctr">
+                        <a:defRPr sz="1300">
+                          <a:solidFill>
+                            <a:srgbClr val="333333"/>
+                          </a:solidFill>
+                          <a:latin typeface="Calibri"/>
+                        </a:defRPr>
+                      </a:pPr>
+                      <a:r>
+                        <a:t>0.0%</a:t>
+                      </a:r>
+                    </a:p>
+                  </a:txBody>
+                  <a:tcPr/>
+                </a:tc>
+                <a:tc>
+                  <a:txBody>
+                    <a:bodyPr/>
+                    <a:lstStyle/>
+                    <a:p>
+                      <a:pPr algn="ctr">
+                        <a:defRPr sz="1300">
+                          <a:solidFill>
+                            <a:srgbClr val="333333"/>
+                          </a:solidFill>
+                          <a:latin typeface="Calibri"/>
+                        </a:defRPr>
+                      </a:pPr>
+                      <a:r>
+                        <a:t>0.0%</a:t>
+                      </a:r>
+                    </a:p>
+                  </a:txBody>
+                  <a:tcPr/>
+                </a:tc>
+                <a:tc>
+                  <a:txBody>
+                    <a:bodyPr/>
+                    <a:lstStyle/>
+                    <a:p>
+                      <a:pPr algn="ctr">
+                        <a:defRPr sz="1300">
+                          <a:solidFill>
+                            <a:srgbClr val="333333"/>
+                          </a:solidFill>
+                          <a:latin typeface="Calibri"/>
+                        </a:defRPr>
+                      </a:pPr>
+                      <a:r>
+                        <a:t>100.0%</a:t>
+                      </a:r>
+                    </a:p>
+                  </a:txBody>
+                  <a:tcPr/>
+                </a:tc>
+              </a:tr>
+              <a:tr h="347472">
+                <a:tc>
+                  <a:txBody>
+                    <a:bodyPr/>
+                    <a:lstStyle/>
+                    <a:p>
+                      <a:pPr algn="ctr">
+                        <a:defRPr sz="1300" b="1">
+                          <a:solidFill>
+                            <a:srgbClr val="003366"/>
+                          </a:solidFill>
+                          <a:latin typeface="Calibri"/>
+                        </a:defRPr>
+                      </a:pPr>
+                      <a:r>
+                        <a:t>Production policy, zero shot</a:t>
+                      </a:r>
+                    </a:p>
+                  </a:txBody>
+                  <a:tcPr>
+                    <a:solidFill>
+                      <a:srgbClr val="FFF8DC"/>
+                    </a:solidFill>
+                  </a:tcPr>
+                </a:tc>
+                <a:tc>
+                  <a:txBody>
+                    <a:bodyPr/>
+                    <a:lstStyle/>
+                    <a:p>
+                      <a:pPr algn="ctr">
+                        <a:defRPr sz="1300" b="1">
+                          <a:solidFill>
+                            <a:srgbClr val="003366"/>
+                          </a:solidFill>
+                          <a:latin typeface="Calibri"/>
+                        </a:defRPr>
+                      </a:pPr>
+                      <a:r>
+                        <a:t>200.3</a:t>
+                      </a:r>
+                    </a:p>
+                  </a:txBody>
+                  <a:tcPr>
+                    <a:solidFill>
+                      <a:srgbClr val="FFF8DC"/>
+                    </a:solidFill>
+                  </a:tcPr>
+                </a:tc>
+                <a:tc>
+                  <a:txBody>
+                    <a:bodyPr/>
+                    <a:lstStyle/>
+                    <a:p>
+                      <a:pPr algn="ctr">
+                        <a:defRPr sz="1300" b="1">
+                          <a:solidFill>
+                            <a:srgbClr val="003366"/>
+                          </a:solidFill>
+                          <a:latin typeface="Calibri"/>
+                        </a:defRPr>
+                      </a:pPr>
+                      <a:r>
+                        <a:t>60.0%</a:t>
+                      </a:r>
+                    </a:p>
+                  </a:txBody>
+                  <a:tcPr>
+                    <a:solidFill>
+                      <a:srgbClr val="FFF8DC"/>
+                    </a:solidFill>
+                  </a:tcPr>
+                </a:tc>
+                <a:tc>
+                  <a:txBody>
+                    <a:bodyPr/>
+                    <a:lstStyle/>
+                    <a:p>
+                      <a:pPr algn="ctr">
+                        <a:defRPr sz="1300" b="1">
+                          <a:solidFill>
+                            <a:srgbClr val="003366"/>
+                          </a:solidFill>
+                          <a:latin typeface="Calibri"/>
+                        </a:defRPr>
+                      </a:pPr>
+                      <a:r>
+                        <a:t>0.0%</a:t>
+                      </a:r>
+                    </a:p>
+                  </a:txBody>
+                  <a:tcPr>
+                    <a:solidFill>
+                      <a:srgbClr val="FFF8DC"/>
+                    </a:solidFill>
+                  </a:tcPr>
+                </a:tc>
+                <a:tc>
+                  <a:txBody>
+                    <a:bodyPr/>
+                    <a:lstStyle/>
+                    <a:p>
+                      <a:pPr algn="ctr">
+                        <a:defRPr sz="1300" b="1">
+                          <a:solidFill>
+                            <a:srgbClr val="003366"/>
+                          </a:solidFill>
+                          <a:latin typeface="Calibri"/>
+                        </a:defRPr>
+                      </a:pPr>
+                      <a:r>
+                        <a:t>100.0%</a:t>
+                      </a:r>
+                    </a:p>
+                  </a:txBody>
+                  <a:tcPr>
+                    <a:solidFill>
+                      <a:srgbClr val="FFF8DC"/>
+                    </a:solidFill>
+                  </a:tcPr>
+                </a:tc>
+              </a:tr>
+            </a:tbl>
+          </a:graphicData>
+        </a:graphic>
+      </p:graphicFrame>
+      <p:sp>
+        <p:nvSpPr>
+          <p:cNvPr id="6" name="Rectangle 5"/>
+          <p:cNvSpPr/>
+          <p:nvPr/>
+        </p:nvSpPr>
+        <p:spPr>
+          <a:xfrm>
+            <a:off x="457200" y="3977639"/>
+            <a:ext cx="11247120" cy="2377440"/>
+          </a:xfrm>
+          <a:prstGeom prst="rect">
+            <a:avLst/>
+          </a:prstGeom>
+          <a:solidFill>
+            <a:srgbClr val="FFF8DC"/>
+          </a:solidFill>
+          <a:ln w="25400">
+            <a:solidFill>
+              <a:srgbClr val="CC9900"/>
+            </a:solidFill>
+          </a:ln>
+        </p:spPr>
+        <p:style>
+          <a:lnRef idx="1">
+            <a:schemeClr val="accent1"/>
+          </a:lnRef>
+          <a:fillRef idx="3">
+            <a:schemeClr val="accent1"/>
+          </a:fillRef>
+          <a:effectRef idx="2">
+            <a:schemeClr val="accent1"/>
+          </a:effectRef>
+          <a:fontRef idx="minor">
+            <a:schemeClr val="lt1"/>
+          </a:fontRef>
+        </p:style>
+        <p:txBody>
+          <a:bodyPr rtlCol="0" anchor="ctr"/>
+          <a:lstStyle/>
+          <a:p>
+            <a:pPr algn="ctr"/>
+          </a:p>
+        </p:txBody>
+      </p:sp>
+      <p:sp>
+        <p:nvSpPr>
+          <p:cNvPr id="7" name="TextBox 6"/>
           <p:cNvSpPr txBox="1"/>
           <p:nvPr/>
         </p:nvSpPr>
         <p:spPr>
           <a:xfrm>
-            <a:off x="457200" y="1600200"/>
-            <a:ext cx="5486400" cy="4937760"/>
+            <a:off x="731520" y="4114800"/>
+            <a:ext cx="10698480" cy="457200"/>
+          </a:xfrm>
+          <a:prstGeom prst="rect">
+            <a:avLst/>
+          </a:prstGeom>
+          <a:noFill/>
+        </p:spPr>
+        <p:txBody>
+          <a:bodyPr wrap="square">
+            <a:spAutoFit/>
+          </a:bodyPr>
+          <a:lstStyle/>
+          <a:p>
+            <a:pPr algn="l">
+              <a:defRPr sz="2200" b="1">
+                <a:solidFill>
+                  <a:srgbClr val="CC9900"/>
+                </a:solidFill>
+                <a:latin typeface="Calibri"/>
+              </a:defRPr>
+            </a:pPr>
+            <a:r>
+              <a:t>⚠ How to read this</a:t>
+            </a:r>
+          </a:p>
+        </p:txBody>
+      </p:sp>
+      <p:sp>
+        <p:nvSpPr>
+          <p:cNvPr id="8" name="TextBox 7"/>
+          <p:cNvSpPr txBox="1"/>
+          <p:nvPr/>
+        </p:nvSpPr>
+        <p:spPr>
+          <a:xfrm>
+            <a:off x="731520" y="4663440"/>
+            <a:ext cx="10698480" cy="1645920"/>
           </a:xfrm>
           <a:prstGeom prst="rect">
             <a:avLst/>
@@ -7708,7 +8635,7 @@
               </a:defRPr>
             </a:pPr>
             <a:r>
-              <a:t>Architecture:</a:t>
+              <a:t>• The production policy was trained across a distribution of materials with the material context in its observation, so the harder material is inside its training distribution and needs no adaptation at all</a:t>
             </a:r>
           </a:p>
           <a:p>
@@ -7724,7 +8651,7 @@
               </a:defRPr>
             </a:pPr>
             <a:r>
-              <a:t>  config/  →  physics, scenarios, paths (single source)</a:t>
+              <a:t>• It scores the highest reward (200.3); the finished surface, which is the part quality, is in spec in every scenario</a:t>
             </a:r>
           </a:p>
           <a:p>
@@ -7740,7 +8667,7 @@
               </a:defRPr>
             </a:pPr>
             <a:r>
-              <a:t>  env/     →  Gymnasium env, 1 registration</a:t>
+              <a:t>• Its 60% worst-pass violations fall on the roughing passes, which the reward does not constrain</a:t>
             </a:r>
           </a:p>
           <a:p>
@@ -7756,7 +8683,7 @@
               </a:defRPr>
             </a:pPr>
             <a:r>
-              <a:t>  agent/   →  train, eval, ablation, transfer, pipeline</a:t>
+              <a:t>• The nominal-trained source policy cannot: 182.5, and it violates the roughness limit in every scenario</a:t>
             </a:r>
           </a:p>
           <a:p>
@@ -7772,492 +8699,7 @@
               </a:defRPr>
             </a:pPr>
             <a:r>
-              <a:t>  baselines/ →  5 classical + receding-horizon</a:t>
-            </a:r>
-          </a:p>
-          <a:p>
-            <a:pPr>
-              <a:spcAft>
-                <a:spcPts val="400"/>
-              </a:spcAft>
-              <a:defRPr sz="1400">
-                <a:solidFill>
-                  <a:srgbClr val="333333"/>
-                </a:solidFill>
-                <a:latin typeface="Calibri"/>
-              </a:defRPr>
-            </a:pPr>
-            <a:r>
-              <a:t>  sim/     →  stock depletion, micro-topography, G-code</a:t>
-            </a:r>
-          </a:p>
-          <a:p>
-            <a:pPr>
-              <a:spcAft>
-                <a:spcPts val="400"/>
-              </a:spcAft>
-              <a:defRPr sz="1400">
-                <a:solidFill>
-                  <a:srgbClr val="333333"/>
-                </a:solidFill>
-                <a:latin typeface="Calibri"/>
-              </a:defRPr>
-            </a:pPr>
-            <a:r>
-              <a:t>  viz/     →  shared plotting utilities</a:t>
-            </a:r>
-          </a:p>
-          <a:p>
-            <a:pPr>
-              <a:spcAft>
-                <a:spcPts val="400"/>
-              </a:spcAft>
-              <a:defRPr sz="1400">
-                <a:solidFill>
-                  <a:srgbClr val="333333"/>
-                </a:solidFill>
-                <a:latin typeface="Calibri"/>
-              </a:defRPr>
-            </a:pPr>
-          </a:p>
-          <a:p>
-            <a:pPr>
-              <a:spcAft>
-                <a:spcPts val="400"/>
-              </a:spcAft>
-              <a:defRPr sz="1400">
-                <a:solidFill>
-                  <a:srgbClr val="333333"/>
-                </a:solidFill>
-                <a:latin typeface="Calibri"/>
-              </a:defRPr>
-            </a:pPr>
-            <a:r>
-              <a:t>Reproducibility:</a:t>
-            </a:r>
-          </a:p>
-          <a:p>
-            <a:pPr>
-              <a:spcAft>
-                <a:spcPts val="400"/>
-              </a:spcAft>
-              <a:defRPr sz="1400">
-                <a:solidFill>
-                  <a:srgbClr val="333333"/>
-                </a:solidFill>
-                <a:latin typeface="Calibri"/>
-              </a:defRPr>
-            </a:pPr>
-            <a:r>
-              <a:t>  • Global seeding (Python, NumPy, PyTorch, CUDA)</a:t>
-            </a:r>
-          </a:p>
-          <a:p>
-            <a:pPr>
-              <a:spcAft>
-                <a:spcPts val="400"/>
-              </a:spcAft>
-              <a:defRPr sz="1400">
-                <a:solidFill>
-                  <a:srgbClr val="333333"/>
-                </a:solidFill>
-                <a:latin typeface="Calibri"/>
-              </a:defRPr>
-            </a:pPr>
-            <a:r>
-              <a:t>  • Shared scenario tables (train = eval)</a:t>
-            </a:r>
-          </a:p>
-          <a:p>
-            <a:pPr>
-              <a:spcAft>
-                <a:spcPts val="400"/>
-              </a:spcAft>
-              <a:defRPr sz="1400">
-                <a:solidFill>
-                  <a:srgbClr val="333333"/>
-                </a:solidFill>
-                <a:latin typeface="Calibri"/>
-              </a:defRPr>
-            </a:pPr>
-            <a:r>
-              <a:t>  • summarize_results.py regenerates RESULTS.md</a:t>
-            </a:r>
-          </a:p>
-          <a:p>
-            <a:pPr>
-              <a:spcAft>
-                <a:spcPts val="400"/>
-              </a:spcAft>
-              <a:defRPr sz="1400">
-                <a:solidFill>
-                  <a:srgbClr val="333333"/>
-                </a:solidFill>
-                <a:latin typeface="Calibri"/>
-              </a:defRPr>
-            </a:pPr>
-            <a:r>
-              <a:t>  • All randomness deterministic given seed</a:t>
-            </a:r>
-          </a:p>
-          <a:p>
-            <a:pPr>
-              <a:spcAft>
-                <a:spcPts val="400"/>
-              </a:spcAft>
-              <a:defRPr sz="1400">
-                <a:solidFill>
-                  <a:srgbClr val="333333"/>
-                </a:solidFill>
-                <a:latin typeface="Calibri"/>
-              </a:defRPr>
-            </a:pPr>
-            <a:r>
-              <a:t>  • Centralized paths (config/paths.py), env ID (env/__init__.py)</a:t>
-            </a:r>
-          </a:p>
-        </p:txBody>
-      </p:sp>
-      <p:sp>
-        <p:nvSpPr>
-          <p:cNvPr id="6" name="TextBox 5"/>
-          <p:cNvSpPr txBox="1"/>
-          <p:nvPr/>
-        </p:nvSpPr>
-        <p:spPr>
-          <a:xfrm>
-            <a:off x="6217920" y="1188720"/>
-            <a:ext cx="5486400" cy="365760"/>
-          </a:xfrm>
-          <a:prstGeom prst="rect">
-            <a:avLst/>
-          </a:prstGeom>
-          <a:noFill/>
-        </p:spPr>
-        <p:txBody>
-          <a:bodyPr wrap="square">
-            <a:spAutoFit/>
-          </a:bodyPr>
-          <a:lstStyle/>
-          <a:p>
-            <a:pPr algn="l">
-              <a:defRPr sz="1600" b="1">
-                <a:solidFill>
-                  <a:srgbClr val="003366"/>
-                </a:solidFill>
-                <a:latin typeface="Calibri"/>
-              </a:defRPr>
-            </a:pPr>
-            <a:r>
-              <a:t>Test Coverage &amp; Quality</a:t>
-            </a:r>
-          </a:p>
-        </p:txBody>
-      </p:sp>
-      <p:sp>
-        <p:nvSpPr>
-          <p:cNvPr id="7" name="TextBox 6"/>
-          <p:cNvSpPr txBox="1"/>
-          <p:nvPr/>
-        </p:nvSpPr>
-        <p:spPr>
-          <a:xfrm>
-            <a:off x="6217920" y="1600200"/>
-            <a:ext cx="5486400" cy="4937760"/>
-          </a:xfrm>
-          <a:prstGeom prst="rect">
-            <a:avLst/>
-          </a:prstGeom>
-          <a:noFill/>
-        </p:spPr>
-        <p:txBody>
-          <a:bodyPr wrap="square">
-            <a:spAutoFit/>
-          </a:bodyPr>
-          <a:lstStyle/>
-          <a:p>
-            <a:pPr>
-              <a:spcAft>
-                <a:spcPts val="400"/>
-              </a:spcAft>
-              <a:defRPr sz="1400">
-                <a:solidFill>
-                  <a:srgbClr val="333333"/>
-                </a:solidFill>
-                <a:latin typeface="Calibri"/>
-              </a:defRPr>
-            </a:pPr>
-            <a:r>
-              <a:t>Testing (34 tests):</a:t>
-            </a:r>
-          </a:p>
-          <a:p>
-            <a:pPr>
-              <a:spcAft>
-                <a:spcPts val="400"/>
-              </a:spcAft>
-              <a:defRPr sz="1400">
-                <a:solidFill>
-                  <a:srgbClr val="333333"/>
-                </a:solidFill>
-                <a:latin typeface="Calibri"/>
-              </a:defRPr>
-            </a:pPr>
-            <a:r>
-              <a:t>  • 22 env tests: clipping, truncation, soft norm, 11-D</a:t>
-            </a:r>
-          </a:p>
-          <a:p>
-            <a:pPr>
-              <a:spcAft>
-                <a:spcPts val="400"/>
-              </a:spcAft>
-              <a:defRPr sz="1400">
-                <a:solidFill>
-                  <a:srgbClr val="333333"/>
-                </a:solidFill>
-                <a:latin typeface="Calibri"/>
-              </a:defRPr>
-            </a:pPr>
-            <a:r>
-              <a:t>    observation, constants, overrides, accumulators, energy</a:t>
-            </a:r>
-          </a:p>
-          <a:p>
-            <a:pPr>
-              <a:spcAft>
-                <a:spcPts val="400"/>
-              </a:spcAft>
-              <a:defRPr sz="1400">
-                <a:solidFill>
-                  <a:srgbClr val="333333"/>
-                </a:solidFill>
-                <a:latin typeface="Calibri"/>
-              </a:defRPr>
-            </a:pPr>
-            <a:r>
-              <a:t>    norm, Gym checker, randomization, pinned values, scenario</a:t>
-            </a:r>
-          </a:p>
-          <a:p>
-            <a:pPr>
-              <a:spcAft>
-                <a:spcPts val="400"/>
-              </a:spcAft>
-              <a:defRPr sz="1400">
-                <a:solidFill>
-                  <a:srgbClr val="333333"/>
-                </a:solidFill>
-                <a:latin typeface="Calibri"/>
-              </a:defRPr>
-            </a:pPr>
-            <a:r>
-              <a:t>    scales, context (weight, material, random weight), speed</a:t>
-            </a:r>
-          </a:p>
-          <a:p>
-            <a:pPr>
-              <a:spcAft>
-                <a:spcPts val="400"/>
-              </a:spcAft>
-              <a:defRPr sz="1400">
-                <a:solidFill>
-                  <a:srgbClr val="333333"/>
-                </a:solidFill>
-                <a:latin typeface="Calibri"/>
-              </a:defRPr>
-            </a:pPr>
-            <a:r>
-              <a:t>    dependence, energy minimum, shared physics</a:t>
-            </a:r>
-          </a:p>
-          <a:p>
-            <a:pPr>
-              <a:spcAft>
-                <a:spcPts val="400"/>
-              </a:spcAft>
-              <a:defRPr sz="1400">
-                <a:solidFill>
-                  <a:srgbClr val="333333"/>
-                </a:solidFill>
-                <a:latin typeface="Calibri"/>
-              </a:defRPr>
-            </a:pPr>
-            <a:r>
-              <a:t>  • 2 reward tests: golden values (w₂ = 0.0, 0.4, 0.75),</a:t>
-            </a:r>
-          </a:p>
-          <a:p>
-            <a:pPr>
-              <a:spcAft>
-                <a:spcPts val="400"/>
-              </a:spcAft>
-              <a:defRPr sz="1400">
-                <a:solidFill>
-                  <a:srgbClr val="333333"/>
-                </a:solidFill>
-                <a:latin typeface="Calibri"/>
-              </a:defRPr>
-            </a:pPr>
-            <a:r>
-              <a:t>    finishing penalty</a:t>
-            </a:r>
-          </a:p>
-          <a:p>
-            <a:pPr>
-              <a:spcAft>
-                <a:spcPts val="400"/>
-              </a:spcAft>
-              <a:defRPr sz="1400">
-                <a:solidFill>
-                  <a:srgbClr val="333333"/>
-                </a:solidFill>
-                <a:latin typeface="Calibri"/>
-              </a:defRPr>
-            </a:pPr>
-            <a:r>
-              <a:t>  • 5 integration: train→eval roundtrip, one registration,</a:t>
-            </a:r>
-          </a:p>
-          <a:p>
-            <a:pPr>
-              <a:spcAft>
-                <a:spcPts val="400"/>
-              </a:spcAft>
-              <a:defRPr sz="1400">
-                <a:solidFill>
-                  <a:srgbClr val="333333"/>
-                </a:solidFill>
-                <a:latin typeface="Calibri"/>
-              </a:defRPr>
-            </a:pPr>
-            <a:r>
-              <a:t>    context in the observation, one policy at a pinned weight,</a:t>
-            </a:r>
-          </a:p>
-          <a:p>
-            <a:pPr>
-              <a:spcAft>
-                <a:spcPts val="400"/>
-              </a:spcAft>
-              <a:defRPr sz="1400">
-                <a:solidFill>
-                  <a:srgbClr val="333333"/>
-                </a:solidFill>
-                <a:latin typeface="Calibri"/>
-              </a:defRPr>
-            </a:pPr>
-            <a:r>
-              <a:t>    baseline artifact</a:t>
-            </a:r>
-          </a:p>
-          <a:p>
-            <a:pPr>
-              <a:spcAft>
-                <a:spcPts val="400"/>
-              </a:spcAft>
-              <a:defRPr sz="1400">
-                <a:solidFill>
-                  <a:srgbClr val="333333"/>
-                </a:solidFill>
-                <a:latin typeface="Calibri"/>
-              </a:defRPr>
-            </a:pPr>
-            <a:r>
-              <a:t>  • 3 callback: heartbeat delivery, failure report, interval</a:t>
-            </a:r>
-          </a:p>
-          <a:p>
-            <a:pPr>
-              <a:spcAft>
-                <a:spcPts val="400"/>
-              </a:spcAft>
-              <a:defRPr sz="1400">
-                <a:solidFill>
-                  <a:srgbClr val="333333"/>
-                </a:solidFill>
-                <a:latin typeface="Calibri"/>
-              </a:defRPr>
-            </a:pPr>
-            <a:r>
-              <a:t>  • 2 training: convergence, reproducibility</a:t>
-            </a:r>
-          </a:p>
-          <a:p>
-            <a:pPr>
-              <a:spcAft>
-                <a:spcPts val="400"/>
-              </a:spcAft>
-              <a:defRPr sz="1400">
-                <a:solidFill>
-                  <a:srgbClr val="333333"/>
-                </a:solidFill>
-                <a:latin typeface="Calibri"/>
-              </a:defRPr>
-            </a:pPr>
-          </a:p>
-          <a:p>
-            <a:pPr>
-              <a:spcAft>
-                <a:spcPts val="400"/>
-              </a:spcAft>
-              <a:defRPr sz="1400">
-                <a:solidFill>
-                  <a:srgbClr val="333333"/>
-                </a:solidFill>
-                <a:latin typeface="Calibri"/>
-              </a:defRPr>
-            </a:pPr>
-            <a:r>
-              <a:t>Code Quality:</a:t>
-            </a:r>
-          </a:p>
-          <a:p>
-            <a:pPr>
-              <a:spcAft>
-                <a:spcPts val="400"/>
-              </a:spcAft>
-              <a:defRPr sz="1400">
-                <a:solidFill>
-                  <a:srgbClr val="333333"/>
-                </a:solidFill>
-                <a:latin typeface="Calibri"/>
-              </a:defRPr>
-            </a:pPr>
-            <a:r>
-              <a:t>  • No unused imports (AST verified)</a:t>
-            </a:r>
-          </a:p>
-          <a:p>
-            <a:pPr>
-              <a:spcAft>
-                <a:spcPts val="400"/>
-              </a:spcAft>
-              <a:defRPr sz="1400">
-                <a:solidFill>
-                  <a:srgbClr val="333333"/>
-                </a:solidFill>
-                <a:latin typeface="Calibri"/>
-              </a:defRPr>
-            </a:pPr>
-            <a:r>
-              <a:t>  • Conventional commits, clean git history</a:t>
-            </a:r>
-          </a:p>
-          <a:p>
-            <a:pPr>
-              <a:spcAft>
-                <a:spcPts val="400"/>
-              </a:spcAft>
-              <a:defRPr sz="1400">
-                <a:solidFill>
-                  <a:srgbClr val="333333"/>
-                </a:solidFill>
-                <a:latin typeface="Calibri"/>
-              </a:defRPr>
-            </a:pPr>
-            <a:r>
-              <a:t>  • Lit citations in physics_constants.py</a:t>
+              <a:t>• Fine tuning it for 50,000 steps, or training on the target from scratch, both fix it, and both land at 196.6</a:t>
             </a:r>
           </a:p>
         </p:txBody>
@@ -8362,7 +8804,7 @@
               </a:defRPr>
             </a:pPr>
             <a:r>
-              <a:t>Discussion: What Worked, Limitations, Future Work</a:t>
+              <a:t>Interactive Digital Twin Workstation (Streamlit)</a:t>
             </a:r>
           </a:p>
         </p:txBody>
@@ -8375,8 +8817,8 @@
         </p:nvSpPr>
         <p:spPr>
           <a:xfrm>
-            <a:off x="365760" y="1188720"/>
-            <a:ext cx="3566160" cy="5303520"/>
+            <a:off x="457200" y="1280160"/>
+            <a:ext cx="11247120" cy="914400"/>
           </a:xfrm>
           <a:prstGeom prst="rect">
             <a:avLst/>
@@ -8384,7 +8826,7 @@
           <a:solidFill>
             <a:srgbClr val="F0F0F0"/>
           </a:solidFill>
-          <a:ln w="19050">
+          <a:ln w="12700">
             <a:solidFill>
               <a:srgbClr val="003366"/>
             </a:solidFill>
@@ -8420,8 +8862,8 @@
         </p:nvSpPr>
         <p:spPr>
           <a:xfrm>
-            <a:off x="548640" y="1280160"/>
-            <a:ext cx="3200400" cy="457200"/>
+            <a:off x="731520" y="1371600"/>
+            <a:ext cx="2286000" cy="731520"/>
           </a:xfrm>
           <a:prstGeom prst="rect">
             <a:avLst/>
@@ -8435,7 +8877,7 @@
           <a:lstStyle/>
           <a:p>
             <a:pPr algn="l">
-              <a:defRPr sz="2000" b="1">
+              <a:defRPr sz="1800" b="1">
                 <a:solidFill>
                   <a:srgbClr val="003366"/>
                 </a:solidFill>
@@ -8443,7 +8885,7 @@
               </a:defRPr>
             </a:pPr>
             <a:r>
-              <a:t>✅ What Worked</a:t>
+              <a:t>📐 2D Stock Depletion</a:t>
             </a:r>
           </a:p>
         </p:txBody>
@@ -8456,8 +8898,8 @@
         </p:nvSpPr>
         <p:spPr>
           <a:xfrm>
-            <a:off x="548640" y="1828800"/>
-            <a:ext cx="3200400" cy="4389120"/>
+            <a:off x="3200400" y="1371600"/>
+            <a:ext cx="8229600" cy="731520"/>
           </a:xfrm>
           <a:prstGeom prst="rect">
             <a:avLst/>
@@ -8470,11 +8912,8 @@
           </a:bodyPr>
           <a:lstStyle/>
           <a:p>
-            <a:pPr>
-              <a:spcAft>
-                <a:spcPts val="800"/>
-              </a:spcAft>
-              <a:defRPr sz="1500">
+            <a:pPr algn="l">
+              <a:defRPr sz="1600" b="0">
                 <a:solidFill>
                   <a:srgbClr val="333333"/>
                 </a:solidFill>
@@ -8482,87 +8921,7 @@
               </a:defRPr>
             </a:pPr>
             <a:r>
-              <a:t>Speed-dependent k_c creates genuine trade-off</a:t>
-            </a:r>
-          </a:p>
-          <a:p>
-            <a:pPr>
-              <a:spcAft>
-                <a:spcPts val="800"/>
-              </a:spcAft>
-              <a:defRPr sz="1500">
-                <a:solidFill>
-                  <a:srgbClr val="333333"/>
-                </a:solidFill>
-                <a:latin typeface="Calibri"/>
-              </a:defRPr>
-            </a:pPr>
-            <a:r>
-              <a:t>Domain randomization → 99% completion, 0% finished violations</a:t>
-            </a:r>
-          </a:p>
-          <a:p>
-            <a:pPr>
-              <a:spcAft>
-                <a:spcPts val="800"/>
-              </a:spcAft>
-              <a:defRPr sz="1500">
-                <a:solidFill>
-                  <a:srgbClr val="333333"/>
-                </a:solidFill>
-                <a:latin typeface="Calibri"/>
-              </a:defRPr>
-            </a:pPr>
-            <a:r>
-              <a:t>One policy beats the 21 per-weight policies</a:t>
-            </a:r>
-          </a:p>
-          <a:p>
-            <a:pPr>
-              <a:spcAft>
-                <a:spcPts val="800"/>
-              </a:spcAft>
-              <a:defRPr sz="1500">
-                <a:solidFill>
-                  <a:srgbClr val="333333"/>
-                </a:solidFill>
-                <a:latin typeface="Calibri"/>
-              </a:defRPr>
-            </a:pPr>
-            <a:r>
-              <a:t>Training across materials makes the adaptation unnecessary</a:t>
-            </a:r>
-          </a:p>
-          <a:p>
-            <a:pPr>
-              <a:spcAft>
-                <a:spcPts val="800"/>
-              </a:spcAft>
-              <a:defRPr sz="1500">
-                <a:solidFill>
-                  <a:srgbClr val="333333"/>
-                </a:solidFill>
-                <a:latin typeface="Calibri"/>
-              </a:defRPr>
-            </a:pPr>
-            <a:r>
-              <a:t>Receding-horizon = strong, fair baseline (same physics)</a:t>
-            </a:r>
-          </a:p>
-          <a:p>
-            <a:pPr>
-              <a:spcAft>
-                <a:spcPts val="800"/>
-              </a:spcAft>
-              <a:defRPr sz="1500">
-                <a:solidFill>
-                  <a:srgbClr val="333333"/>
-                </a:solidFill>
-                <a:latin typeface="Calibri"/>
-              </a:defRPr>
-            </a:pPr>
-            <a:r>
-              <a:t>Full reproducibility: one script regenerates all tables</a:t>
+              <a:t>Cylindrical billet cross-section; pass-by-pass cutout; remaining κ, a_p; tool engagement diagram</a:t>
             </a:r>
           </a:p>
         </p:txBody>
@@ -8575,8 +8934,8 @@
         </p:nvSpPr>
         <p:spPr>
           <a:xfrm>
-            <a:off x="4069080" y="1188720"/>
-            <a:ext cx="3566160" cy="5303520"/>
+            <a:off x="457200" y="2286000"/>
+            <a:ext cx="11247120" cy="914400"/>
           </a:xfrm>
           <a:prstGeom prst="rect">
             <a:avLst/>
@@ -8584,7 +8943,7 @@
           <a:solidFill>
             <a:srgbClr val="F0F0F0"/>
           </a:solidFill>
-          <a:ln w="19050">
+          <a:ln w="12700">
             <a:solidFill>
               <a:srgbClr val="003366"/>
             </a:solidFill>
@@ -8620,8 +8979,8 @@
         </p:nvSpPr>
         <p:spPr>
           <a:xfrm>
-            <a:off x="4251960" y="1280160"/>
-            <a:ext cx="3200400" cy="457200"/>
+            <a:off x="731520" y="2377440"/>
+            <a:ext cx="2286000" cy="731520"/>
           </a:xfrm>
           <a:prstGeom prst="rect">
             <a:avLst/>
@@ -8635,7 +8994,7 @@
           <a:lstStyle/>
           <a:p>
             <a:pPr algn="l">
-              <a:defRPr sz="2000" b="1">
+              <a:defRPr sz="1800" b="1">
                 <a:solidFill>
                   <a:srgbClr val="003366"/>
                 </a:solidFill>
@@ -8643,7 +9002,7 @@
               </a:defRPr>
             </a:pPr>
             <a:r>
-              <a:t>⚠️ Limitations</a:t>
+              <a:t>📊 Micro-Topography</a:t>
             </a:r>
           </a:p>
         </p:txBody>
@@ -8656,8 +9015,8 @@
         </p:nvSpPr>
         <p:spPr>
           <a:xfrm>
-            <a:off x="4251960" y="1828800"/>
-            <a:ext cx="3200400" cy="4389120"/>
+            <a:off x="3200400" y="2377440"/>
+            <a:ext cx="8229600" cy="731520"/>
           </a:xfrm>
           <a:prstGeom prst="rect">
             <a:avLst/>
@@ -8670,11 +9029,8 @@
           </a:bodyPr>
           <a:lstStyle/>
           <a:p>
-            <a:pPr>
-              <a:spcAft>
-                <a:spcPts val="800"/>
-              </a:spcAft>
-              <a:defRPr sz="1500">
+            <a:pPr algn="l">
+              <a:defRPr sz="1600" b="0">
                 <a:solidFill>
                   <a:srgbClr val="333333"/>
                 </a:solidFill>
@@ -8682,71 +9038,7 @@
               </a:defRPr>
             </a:pPr>
             <a:r>
-              <a:t>PPO is level with the receding-horizon, not ahead of it</a:t>
-            </a:r>
-          </a:p>
-          <a:p>
-            <a:pPr>
-              <a:spcAft>
-                <a:spcPts val="800"/>
-              </a:spcAft>
-              <a:defRPr sz="1500">
-                <a:solidFill>
-                  <a:srgbClr val="333333"/>
-                </a:solidFill>
-                <a:latin typeface="Calibri"/>
-              </a:defRPr>
-            </a:pPr>
-            <a:r>
-              <a:t>Ablation uses 150k steps/weight (vs 1M production)</a:t>
-            </a:r>
-          </a:p>
-          <a:p>
-            <a:pPr>
-              <a:spcAft>
-                <a:spcPts val="800"/>
-              </a:spcAft>
-              <a:defRPr sz="1500">
-                <a:solidFill>
-                  <a:srgbClr val="333333"/>
-                </a:solidFill>
-                <a:latin typeface="Calibri"/>
-              </a:defRPr>
-            </a:pPr>
-            <a:r>
-              <a:t>The reward charges a pass, the metric is a part</a:t>
-            </a:r>
-          </a:p>
-          <a:p>
-            <a:pPr>
-              <a:spcAft>
-                <a:spcPts val="800"/>
-              </a:spcAft>
-              <a:defRPr sz="1500">
-                <a:solidFill>
-                  <a:srgbClr val="333333"/>
-                </a:solidFill>
-                <a:latin typeface="Calibri"/>
-              </a:defRPr>
-            </a:pPr>
-            <a:r>
-              <a:t>Micro-topography is simplified (no chatter/vibration)</a:t>
-            </a:r>
-          </a:p>
-          <a:p>
-            <a:pPr>
-              <a:spcAft>
-                <a:spcPts val="800"/>
-              </a:spcAft>
-              <a:defRPr sz="1500">
-                <a:solidFill>
-                  <a:srgbClr val="333333"/>
-                </a:solidFill>
-                <a:latin typeface="Calibri"/>
-              </a:defRPr>
-            </a:pPr>
-            <a:r>
-              <a:t>Sim-only — no real machine calibration yet</a:t>
+              <a:t>Feed-mark cusp profile: y_cusp(x) ≈ x²/(8r_ε) + noise; ISO 1302 R_a overlay with 1.6 μm ceiling</a:t>
             </a:r>
           </a:p>
         </p:txBody>
@@ -8759,8 +9051,8 @@
         </p:nvSpPr>
         <p:spPr>
           <a:xfrm>
-            <a:off x="7772400" y="1188720"/>
-            <a:ext cx="3566160" cy="5303520"/>
+            <a:off x="457200" y="3291840"/>
+            <a:ext cx="11247120" cy="914400"/>
           </a:xfrm>
           <a:prstGeom prst="rect">
             <a:avLst/>
@@ -8768,7 +9060,7 @@
           <a:solidFill>
             <a:srgbClr val="F0F0F0"/>
           </a:solidFill>
-          <a:ln w="19050">
+          <a:ln w="12700">
             <a:solidFill>
               <a:srgbClr val="003366"/>
             </a:solidFill>
@@ -8804,8 +9096,8 @@
         </p:nvSpPr>
         <p:spPr>
           <a:xfrm>
-            <a:off x="7955280" y="1280160"/>
-            <a:ext cx="3200400" cy="457200"/>
+            <a:off x="731520" y="3383280"/>
+            <a:ext cx="2286000" cy="731520"/>
           </a:xfrm>
           <a:prstGeom prst="rect">
             <a:avLst/>
@@ -8819,7 +9111,7 @@
           <a:lstStyle/>
           <a:p>
             <a:pPr algn="l">
-              <a:defRPr sz="2000" b="1">
+              <a:defRPr sz="1800" b="1">
                 <a:solidFill>
                   <a:srgbClr val="003366"/>
                 </a:solidFill>
@@ -8827,7 +9119,7 @@
               </a:defRPr>
             </a:pPr>
             <a:r>
-              <a:t>🚀 Future Work</a:t>
+              <a:t>📝 G-Code Generator</a:t>
             </a:r>
           </a:p>
         </p:txBody>
@@ -8840,8 +9132,8 @@
         </p:nvSpPr>
         <p:spPr>
           <a:xfrm>
-            <a:off x="7955280" y="1828800"/>
-            <a:ext cx="3200400" cy="4389120"/>
+            <a:off x="3200400" y="3383280"/>
+            <a:ext cx="8229600" cy="731520"/>
           </a:xfrm>
           <a:prstGeom prst="rect">
             <a:avLst/>
@@ -8854,11 +9146,8 @@
           </a:bodyPr>
           <a:lstStyle/>
           <a:p>
-            <a:pPr>
-              <a:spcAft>
-                <a:spcPts val="800"/>
-              </a:spcAft>
-              <a:defRPr sz="1500">
+            <a:pPr algn="l">
+              <a:defRPr sz="1600" b="0">
                 <a:solidFill>
                   <a:srgbClr val="333333"/>
                 </a:solidFill>
@@ -8866,15 +9155,116 @@
               </a:defRPr>
             </a:pPr>
             <a:r>
-              <a:t>Controller-initialized RL (BC + fine-tune)</a:t>
-            </a:r>
-          </a:p>
-          <a:p>
-            <a:pPr>
-              <a:spcAft>
-                <a:spcPts val="800"/>
-              </a:spcAft>
-              <a:defRPr sz="1500">
+              <a:t>ISO 6983 Fanuc/Siemens compliant; emits exact PPO parameter sequence; tool/diameter aware</a:t>
+            </a:r>
+          </a:p>
+        </p:txBody>
+      </p:sp>
+      <p:sp>
+        <p:nvSpPr>
+          <p:cNvPr id="13" name="Rectangle 12"/>
+          <p:cNvSpPr/>
+          <p:nvPr/>
+        </p:nvSpPr>
+        <p:spPr>
+          <a:xfrm>
+            <a:off x="457200" y="4297680"/>
+            <a:ext cx="11247120" cy="914400"/>
+          </a:xfrm>
+          <a:prstGeom prst="rect">
+            <a:avLst/>
+          </a:prstGeom>
+          <a:solidFill>
+            <a:srgbClr val="F0F0F0"/>
+          </a:solidFill>
+          <a:ln w="12700">
+            <a:solidFill>
+              <a:srgbClr val="003366"/>
+            </a:solidFill>
+          </a:ln>
+        </p:spPr>
+        <p:style>
+          <a:lnRef idx="1">
+            <a:schemeClr val="accent1"/>
+          </a:lnRef>
+          <a:fillRef idx="3">
+            <a:schemeClr val="accent1"/>
+          </a:fillRef>
+          <a:effectRef idx="2">
+            <a:schemeClr val="accent1"/>
+          </a:effectRef>
+          <a:fontRef idx="minor">
+            <a:schemeClr val="lt1"/>
+          </a:fontRef>
+        </p:style>
+        <p:txBody>
+          <a:bodyPr rtlCol="0" anchor="ctr"/>
+          <a:lstStyle/>
+          <a:p>
+            <a:pPr algn="ctr"/>
+          </a:p>
+        </p:txBody>
+      </p:sp>
+      <p:sp>
+        <p:nvSpPr>
+          <p:cNvPr id="14" name="TextBox 13"/>
+          <p:cNvSpPr txBox="1"/>
+          <p:nvPr/>
+        </p:nvSpPr>
+        <p:spPr>
+          <a:xfrm>
+            <a:off x="731520" y="4389120"/>
+            <a:ext cx="2286000" cy="731520"/>
+          </a:xfrm>
+          <a:prstGeom prst="rect">
+            <a:avLst/>
+          </a:prstGeom>
+          <a:noFill/>
+        </p:spPr>
+        <p:txBody>
+          <a:bodyPr wrap="square">
+            <a:spAutoFit/>
+          </a:bodyPr>
+          <a:lstStyle/>
+          <a:p>
+            <a:pPr algn="l">
+              <a:defRPr sz="1800" b="1">
+                <a:solidFill>
+                  <a:srgbClr val="003366"/>
+                </a:solidFill>
+                <a:latin typeface="Calibri"/>
+              </a:defRPr>
+            </a:pPr>
+            <a:r>
+              <a:t>⚔️ Multi-Controller</a:t>
+            </a:r>
+          </a:p>
+        </p:txBody>
+      </p:sp>
+      <p:sp>
+        <p:nvSpPr>
+          <p:cNvPr id="15" name="TextBox 14"/>
+          <p:cNvSpPr txBox="1"/>
+          <p:nvPr/>
+        </p:nvSpPr>
+        <p:spPr>
+          <a:xfrm>
+            <a:off x="3200400" y="4389120"/>
+            <a:ext cx="8229600" cy="731520"/>
+          </a:xfrm>
+          <a:prstGeom prst="rect">
+            <a:avLst/>
+          </a:prstGeom>
+          <a:noFill/>
+        </p:spPr>
+        <p:txBody>
+          <a:bodyPr wrap="square">
+            <a:spAutoFit/>
+          </a:bodyPr>
+          <a:lstStyle/>
+          <a:p>
+            <a:pPr algn="l">
+              <a:defRPr sz="1600" b="0">
                 <a:solidFill>
                   <a:srgbClr val="333333"/>
                 </a:solidFill>
@@ -8882,15 +9272,116 @@
               </a:defRPr>
             </a:pPr>
             <a:r>
-              <a:t>Sim-to-real: calibrate on machine data, add noise/delay</a:t>
-            </a:r>
-          </a:p>
-          <a:p>
-            <a:pPr>
-              <a:spcAft>
-                <a:spcPts val="800"/>
-              </a:spcAft>
-              <a:defRPr sz="1500">
+              <a:t>Side-by-side: PPO vs NSGA-II vs Rule-Based vs Constant-High; live telemetry overlay</a:t>
+            </a:r>
+          </a:p>
+        </p:txBody>
+      </p:sp>
+      <p:sp>
+        <p:nvSpPr>
+          <p:cNvPr id="16" name="Rectangle 15"/>
+          <p:cNvSpPr/>
+          <p:nvPr/>
+        </p:nvSpPr>
+        <p:spPr>
+          <a:xfrm>
+            <a:off x="457200" y="5303520"/>
+            <a:ext cx="11247120" cy="914400"/>
+          </a:xfrm>
+          <a:prstGeom prst="rect">
+            <a:avLst/>
+          </a:prstGeom>
+          <a:solidFill>
+            <a:srgbClr val="F0F0F0"/>
+          </a:solidFill>
+          <a:ln w="12700">
+            <a:solidFill>
+              <a:srgbClr val="003366"/>
+            </a:solidFill>
+          </a:ln>
+        </p:spPr>
+        <p:style>
+          <a:lnRef idx="1">
+            <a:schemeClr val="accent1"/>
+          </a:lnRef>
+          <a:fillRef idx="3">
+            <a:schemeClr val="accent1"/>
+          </a:fillRef>
+          <a:effectRef idx="2">
+            <a:schemeClr val="accent1"/>
+          </a:effectRef>
+          <a:fontRef idx="minor">
+            <a:schemeClr val="lt1"/>
+          </a:fontRef>
+        </p:style>
+        <p:txBody>
+          <a:bodyPr rtlCol="0" anchor="ctr"/>
+          <a:lstStyle/>
+          <a:p>
+            <a:pPr algn="ctr"/>
+          </a:p>
+        </p:txBody>
+      </p:sp>
+      <p:sp>
+        <p:nvSpPr>
+          <p:cNvPr id="17" name="TextBox 16"/>
+          <p:cNvSpPr txBox="1"/>
+          <p:nvPr/>
+        </p:nvSpPr>
+        <p:spPr>
+          <a:xfrm>
+            <a:off x="731520" y="5394960"/>
+            <a:ext cx="2286000" cy="731520"/>
+          </a:xfrm>
+          <a:prstGeom prst="rect">
+            <a:avLst/>
+          </a:prstGeom>
+          <a:noFill/>
+        </p:spPr>
+        <p:txBody>
+          <a:bodyPr wrap="square">
+            <a:spAutoFit/>
+          </a:bodyPr>
+          <a:lstStyle/>
+          <a:p>
+            <a:pPr algn="l">
+              <a:defRPr sz="1800" b="1">
+                <a:solidFill>
+                  <a:srgbClr val="003366"/>
+                </a:solidFill>
+                <a:latin typeface="Calibri"/>
+              </a:defRPr>
+            </a:pPr>
+            <a:r>
+              <a:t>⚡ Cached Loading</a:t>
+            </a:r>
+          </a:p>
+        </p:txBody>
+      </p:sp>
+      <p:sp>
+        <p:nvSpPr>
+          <p:cNvPr id="18" name="TextBox 17"/>
+          <p:cNvSpPr txBox="1"/>
+          <p:nvPr/>
+        </p:nvSpPr>
+        <p:spPr>
+          <a:xfrm>
+            <a:off x="3200400" y="5394960"/>
+            <a:ext cx="8229600" cy="731520"/>
+          </a:xfrm>
+          <a:prstGeom prst="rect">
+            <a:avLst/>
+          </a:prstGeom>
+          <a:noFill/>
+        </p:spPr>
+        <p:txBody>
+          <a:bodyPr wrap="square">
+            <a:spAutoFit/>
+          </a:bodyPr>
+          <a:lstStyle/>
+          <a:p>
+            <a:pPr algn="l">
+              <a:defRPr sz="1600" b="0">
                 <a:solidFill>
                   <a:srgbClr val="333333"/>
                 </a:solidFill>
@@ -8898,55 +9389,43 @@
               </a:defRPr>
             </a:pPr>
             <a:r>
-              <a:t>True multi-objective RL (Pareto-conditioned, hypervolume)</a:t>
-            </a:r>
-          </a:p>
-          <a:p>
-            <a:pPr>
-              <a:spcAft>
-                <a:spcPts val="800"/>
-              </a:spcAft>
-              <a:defRPr sz="1500">
-                <a:solidFill>
-                  <a:srgbClr val="333333"/>
-                </a:solidFill>
-                <a:latin typeface="Calibri"/>
-              </a:defRPr>
-            </a:pPr>
-            <a:r>
-              <a:t>Online adaptation: runtime w₂ optimizer for energy budget</a:t>
-            </a:r>
-          </a:p>
-          <a:p>
-            <a:pPr>
-              <a:spcAft>
-                <a:spcPts val="800"/>
-              </a:spcAft>
-              <a:defRPr sz="1500">
-                <a:solidFill>
-                  <a:srgbClr val="333333"/>
-                </a:solidFill>
-                <a:latin typeface="Calibri"/>
-              </a:defRPr>
-            </a:pPr>
-            <a:r>
-              <a:t>Full 3D Digital Twin: toolpath viz, collision checking</a:t>
-            </a:r>
-          </a:p>
-          <a:p>
-            <a:pPr>
-              <a:spcAft>
-                <a:spcPts val="800"/>
-              </a:spcAft>
-              <a:defRPr sz="1500">
-                <a:solidFill>
-                  <a:srgbClr val="333333"/>
-                </a:solidFill>
-                <a:latin typeface="Calibri"/>
-              </a:defRPr>
-            </a:pPr>
-            <a:r>
-              <a:t>Deploy on edge hardware for real-time control</a:t>
+              <a:t>@st.cache_resource loads 1M-step PPO model once per session</a:t>
+            </a:r>
+          </a:p>
+        </p:txBody>
+      </p:sp>
+      <p:sp>
+        <p:nvSpPr>
+          <p:cNvPr id="19" name="TextBox 18"/>
+          <p:cNvSpPr txBox="1"/>
+          <p:nvPr/>
+        </p:nvSpPr>
+        <p:spPr>
+          <a:xfrm>
+            <a:off x="457200" y="6217920"/>
+            <a:ext cx="10972800" cy="457200"/>
+          </a:xfrm>
+          <a:prstGeom prst="rect">
+            <a:avLst/>
+          </a:prstGeom>
+          <a:noFill/>
+        </p:spPr>
+        <p:txBody>
+          <a:bodyPr wrap="square">
+            <a:spAutoFit/>
+          </a:bodyPr>
+          <a:lstStyle/>
+          <a:p>
+            <a:pPr algn="ctr">
+              <a:defRPr sz="2000" b="1">
+                <a:solidFill>
+                  <a:srgbClr val="003366"/>
+                </a:solidFill>
+                <a:latin typeface="Calibri"/>
+              </a:defRPr>
+            </a:pPr>
+            <a:r>
+              <a:t>Launch:  streamlit run app.py</a:t>
             </a:r>
           </a:p>
         </p:txBody>
@@ -8965,7 +9444,7 @@
     <p:bg>
       <p:bgPr>
         <a:solidFill>
-          <a:srgbClr val="003366"/>
+          <a:srgbClr val="FFFFFF"/>
         </a:solidFill>
         <a:effectLst/>
       </p:bgPr>
@@ -8985,14 +9464,14 @@
         </p:nvSpPr>
         <p:spPr>
           <a:xfrm>
-            <a:off x="457200" y="731520"/>
-            <a:ext cx="11247120" cy="50800"/>
+            <a:off x="0" y="0"/>
+            <a:ext cx="12191695" cy="1005840"/>
           </a:xfrm>
           <a:prstGeom prst="rect">
             <a:avLst/>
           </a:prstGeom>
           <a:solidFill>
-            <a:srgbClr val="CC9900"/>
+            <a:srgbClr val="003366"/>
           </a:solidFill>
           <a:ln>
             <a:noFill/>
@@ -9028,8 +9507,8 @@
         </p:nvSpPr>
         <p:spPr>
           <a:xfrm>
-            <a:off x="914400" y="1097280"/>
-            <a:ext cx="10362895" cy="914400"/>
+            <a:off x="457200" y="182880"/>
+            <a:ext cx="10972800" cy="640080"/>
           </a:xfrm>
           <a:prstGeom prst="rect">
             <a:avLst/>
@@ -9042,8 +9521,8 @@
           </a:bodyPr>
           <a:lstStyle/>
           <a:p>
-            <a:pPr algn="ctr">
-              <a:defRPr sz="4000" b="1">
+            <a:pPr algn="l">
+              <a:defRPr sz="3000" b="1">
                 <a:solidFill>
                   <a:srgbClr val="FFFFFF"/>
                 </a:solidFill>
@@ -9051,7 +9530,7 @@
               </a:defRPr>
             </a:pPr>
             <a:r>
-              <a:t>Conclusion</a:t>
+              <a:t>Software Engineering: Reproducibility &amp; Quality</a:t>
             </a:r>
           </a:p>
         </p:txBody>
@@ -9064,8 +9543,8 @@
         </p:nvSpPr>
         <p:spPr>
           <a:xfrm>
-            <a:off x="914400" y="2057400"/>
-            <a:ext cx="10362895" cy="411480"/>
+            <a:off x="457200" y="1188720"/>
+            <a:ext cx="5486400" cy="365760"/>
           </a:xfrm>
           <a:prstGeom prst="rect">
             <a:avLst/>
@@ -9079,15 +9558,15 @@
           <a:lstStyle/>
           <a:p>
             <a:pPr algn="l">
-              <a:defRPr sz="1600" b="0">
-                <a:solidFill>
-                  <a:srgbClr val="FFFFFF"/>
-                </a:solidFill>
-                <a:latin typeface="Calibri"/>
-              </a:defRPr>
-            </a:pPr>
-            <a:r>
-              <a:t>🏭 Physics-grounded Digital Twin: speed-dependent cutting energy, tool wear, roughness, breakage</a:t>
+              <a:defRPr sz="1600" b="1">
+                <a:solidFill>
+                  <a:srgbClr val="003366"/>
+                </a:solidFill>
+                <a:latin typeface="Calibri"/>
+              </a:defRPr>
+            </a:pPr>
+            <a:r>
+              <a:t>Architecture &amp; Reproducibility</a:t>
             </a:r>
           </a:p>
         </p:txBody>
@@ -9100,8 +9579,8 @@
         </p:nvSpPr>
         <p:spPr>
           <a:xfrm>
-            <a:off x="914400" y="2514600"/>
-            <a:ext cx="10362895" cy="411480"/>
+            <a:off x="457200" y="1600200"/>
+            <a:ext cx="5486400" cy="4937760"/>
           </a:xfrm>
           <a:prstGeom prst="rect">
             <a:avLst/>
@@ -9114,16 +9593,240 @@
           </a:bodyPr>
           <a:lstStyle/>
           <a:p>
-            <a:pPr algn="l">
-              <a:defRPr sz="1600" b="0">
-                <a:solidFill>
-                  <a:srgbClr val="FFFFFF"/>
-                </a:solidFill>
-                <a:latin typeface="Calibri"/>
-              </a:defRPr>
-            </a:pPr>
-            <a:r>
-              <a:t>🤖 One environment (MillingDTEnv-v1): domain randomization, 11-D observation with the context</a:t>
+            <a:pPr>
+              <a:spcAft>
+                <a:spcPts val="400"/>
+              </a:spcAft>
+              <a:defRPr sz="1400">
+                <a:solidFill>
+                  <a:srgbClr val="333333"/>
+                </a:solidFill>
+                <a:latin typeface="Calibri"/>
+              </a:defRPr>
+            </a:pPr>
+            <a:r>
+              <a:t>Architecture:</a:t>
+            </a:r>
+          </a:p>
+          <a:p>
+            <a:pPr>
+              <a:spcAft>
+                <a:spcPts val="400"/>
+              </a:spcAft>
+              <a:defRPr sz="1400">
+                <a:solidFill>
+                  <a:srgbClr val="333333"/>
+                </a:solidFill>
+                <a:latin typeface="Calibri"/>
+              </a:defRPr>
+            </a:pPr>
+            <a:r>
+              <a:t>  MillingDT/  →  config, env, agent (controller init),</a:t>
+            </a:r>
+          </a:p>
+          <a:p>
+            <a:pPr>
+              <a:spcAft>
+                <a:spcPts val="400"/>
+              </a:spcAft>
+              <a:defRPr sz="1400">
+                <a:solidFill>
+                  <a:srgbClr val="333333"/>
+                </a:solidFill>
+                <a:latin typeface="Calibri"/>
+              </a:defRPr>
+            </a:pPr>
+            <a:r>
+              <a:t>                  baselines, sim, utils</a:t>
+            </a:r>
+          </a:p>
+          <a:p>
+            <a:pPr>
+              <a:spcAft>
+                <a:spcPts val="400"/>
+              </a:spcAft>
+              <a:defRPr sz="1400">
+                <a:solidFill>
+                  <a:srgbClr val="333333"/>
+                </a:solidFill>
+                <a:latin typeface="Calibri"/>
+              </a:defRPr>
+            </a:pPr>
+            <a:r>
+              <a:t>  experiments/ →  train, eval, ablation, baselines,</a:t>
+            </a:r>
+          </a:p>
+          <a:p>
+            <a:pPr>
+              <a:spcAft>
+                <a:spcPts val="400"/>
+              </a:spcAft>
+              <a:defRPr sz="1400">
+                <a:solidFill>
+                  <a:srgbClr val="333333"/>
+                </a:solidFill>
+                <a:latin typeface="Calibri"/>
+              </a:defRPr>
+            </a:pPr>
+            <a:r>
+              <a:t>                  transfer, controller experiment, pipeline</a:t>
+            </a:r>
+          </a:p>
+          <a:p>
+            <a:pPr>
+              <a:spcAft>
+                <a:spcPts val="400"/>
+              </a:spcAft>
+              <a:defRPr sz="1400">
+                <a:solidFill>
+                  <a:srgbClr val="333333"/>
+                </a:solidFill>
+                <a:latin typeface="Calibri"/>
+              </a:defRPr>
+            </a:pPr>
+            <a:r>
+              <a:t>  viz/         →  shared plotting utilities</a:t>
+            </a:r>
+          </a:p>
+          <a:p>
+            <a:pPr>
+              <a:spcAft>
+                <a:spcPts val="400"/>
+              </a:spcAft>
+              <a:defRPr sz="1400">
+                <a:solidFill>
+                  <a:srgbClr val="333333"/>
+                </a:solidFill>
+                <a:latin typeface="Calibri"/>
+              </a:defRPr>
+            </a:pPr>
+            <a:r>
+              <a:t>  results/     →  one directory per run (models, log,</a:t>
+            </a:r>
+          </a:p>
+          <a:p>
+            <a:pPr>
+              <a:spcAft>
+                <a:spcPts val="400"/>
+              </a:spcAft>
+              <a:defRPr sz="1400">
+                <a:solidFill>
+                  <a:srgbClr val="333333"/>
+                </a:solidFill>
+                <a:latin typeface="Calibri"/>
+              </a:defRPr>
+            </a:pPr>
+            <a:r>
+              <a:t>                  metrics, plots)</a:t>
+            </a:r>
+          </a:p>
+          <a:p>
+            <a:pPr>
+              <a:spcAft>
+                <a:spcPts val="400"/>
+              </a:spcAft>
+              <a:defRPr sz="1400">
+                <a:solidFill>
+                  <a:srgbClr val="333333"/>
+                </a:solidFill>
+                <a:latin typeface="Calibri"/>
+              </a:defRPr>
+            </a:pPr>
+          </a:p>
+          <a:p>
+            <a:pPr>
+              <a:spcAft>
+                <a:spcPts val="400"/>
+              </a:spcAft>
+              <a:defRPr sz="1400">
+                <a:solidFill>
+                  <a:srgbClr val="333333"/>
+                </a:solidFill>
+                <a:latin typeface="Calibri"/>
+              </a:defRPr>
+            </a:pPr>
+            <a:r>
+              <a:t>Reproducibility:</a:t>
+            </a:r>
+          </a:p>
+          <a:p>
+            <a:pPr>
+              <a:spcAft>
+                <a:spcPts val="400"/>
+              </a:spcAft>
+              <a:defRPr sz="1400">
+                <a:solidFill>
+                  <a:srgbClr val="333333"/>
+                </a:solidFill>
+                <a:latin typeface="Calibri"/>
+              </a:defRPr>
+            </a:pPr>
+            <a:r>
+              <a:t>  • Global seeding (Python, NumPy, PyTorch, CUDA)</a:t>
+            </a:r>
+          </a:p>
+          <a:p>
+            <a:pPr>
+              <a:spcAft>
+                <a:spcPts val="400"/>
+              </a:spcAft>
+              <a:defRPr sz="1400">
+                <a:solidFill>
+                  <a:srgbClr val="333333"/>
+                </a:solidFill>
+                <a:latin typeface="Calibri"/>
+              </a:defRPr>
+            </a:pPr>
+            <a:r>
+              <a:t>  • Shared scenario tables (train = eval)</a:t>
+            </a:r>
+          </a:p>
+          <a:p>
+            <a:pPr>
+              <a:spcAft>
+                <a:spcPts val="400"/>
+              </a:spcAft>
+              <a:defRPr sz="1400">
+                <a:solidFill>
+                  <a:srgbClr val="333333"/>
+                </a:solidFill>
+                <a:latin typeface="Calibri"/>
+              </a:defRPr>
+            </a:pPr>
+            <a:r>
+              <a:t>  • experiments/summarize_results.py regenerates RESULTS.md</a:t>
+            </a:r>
+          </a:p>
+          <a:p>
+            <a:pPr>
+              <a:spcAft>
+                <a:spcPts val="400"/>
+              </a:spcAft>
+              <a:defRPr sz="1400">
+                <a:solidFill>
+                  <a:srgbClr val="333333"/>
+                </a:solidFill>
+                <a:latin typeface="Calibri"/>
+              </a:defRPr>
+            </a:pPr>
+            <a:r>
+              <a:t>  • All randomness deterministic given seed</a:t>
+            </a:r>
+          </a:p>
+          <a:p>
+            <a:pPr>
+              <a:spcAft>
+                <a:spcPts val="400"/>
+              </a:spcAft>
+              <a:defRPr sz="1400">
+                <a:solidFill>
+                  <a:srgbClr val="333333"/>
+                </a:solidFill>
+                <a:latin typeface="Calibri"/>
+              </a:defRPr>
+            </a:pPr>
+            <a:r>
+              <a:t>  • Centralized constants and paths (MillingDT/config/)</a:t>
             </a:r>
           </a:p>
         </p:txBody>
@@ -9136,8 +9839,8 @@
         </p:nvSpPr>
         <p:spPr>
           <a:xfrm>
-            <a:off x="914400" y="2971800"/>
-            <a:ext cx="10362895" cy="411480"/>
+            <a:off x="6217920" y="1188720"/>
+            <a:ext cx="5486400" cy="365760"/>
           </a:xfrm>
           <a:prstGeom prst="rect">
             <a:avLst/>
@@ -9151,15 +9854,15 @@
           <a:lstStyle/>
           <a:p>
             <a:pPr algn="l">
-              <a:defRPr sz="1600" b="0">
-                <a:solidFill>
-                  <a:srgbClr val="FFFFFF"/>
-                </a:solidFill>
-                <a:latin typeface="Calibri"/>
-              </a:defRPr>
-            </a:pPr>
-            <a:r>
-              <a:t>📊 One production policy (1M steps): the energy weight is a runtime query, not a retrain</a:t>
+              <a:defRPr sz="1600" b="1">
+                <a:solidFill>
+                  <a:srgbClr val="003366"/>
+                </a:solidFill>
+                <a:latin typeface="Calibri"/>
+              </a:defRPr>
+            </a:pPr>
+            <a:r>
+              <a:t>Test Coverage &amp; Quality</a:t>
             </a:r>
           </a:p>
         </p:txBody>
@@ -9172,8 +9875,8 @@
         </p:nvSpPr>
         <p:spPr>
           <a:xfrm>
-            <a:off x="914400" y="3429000"/>
-            <a:ext cx="10362895" cy="411480"/>
+            <a:off x="6217920" y="1600200"/>
+            <a:ext cx="5486400" cy="4937760"/>
           </a:xfrm>
           <a:prstGeom prst="rect">
             <a:avLst/>
@@ -9186,239 +9889,288 @@
           </a:bodyPr>
           <a:lstStyle/>
           <a:p>
-            <a:pPr algn="l">
-              <a:defRPr sz="1600" b="0">
-                <a:solidFill>
-                  <a:srgbClr val="FFFFFF"/>
-                </a:solidFill>
-                <a:latin typeface="Calibri"/>
-              </a:defRPr>
-            </a:pPr>
-            <a:r>
-              <a:t>🔬 Monte Carlo (100 scenarios, 95% CIs), ablation frontier, sweep vs 21 per-weight policies</a:t>
-            </a:r>
-          </a:p>
-        </p:txBody>
-      </p:sp>
-      <p:sp>
-        <p:nvSpPr>
-          <p:cNvPr id="8" name="TextBox 7"/>
-          <p:cNvSpPr txBox="1"/>
-          <p:nvPr/>
-        </p:nvSpPr>
-        <p:spPr>
-          <a:xfrm>
-            <a:off x="914400" y="3886200"/>
-            <a:ext cx="10362895" cy="411480"/>
-          </a:xfrm>
-          <a:prstGeom prst="rect">
-            <a:avLst/>
-          </a:prstGeom>
-          <a:noFill/>
-        </p:spPr>
-        <p:txBody>
-          <a:bodyPr wrap="square">
-            <a:spAutoFit/>
-          </a:bodyPr>
-          <a:lstStyle/>
-          <a:p>
-            <a:pPr algn="l">
-              <a:defRPr sz="1600" b="0">
-                <a:solidFill>
-                  <a:srgbClr val="FFFFFF"/>
-                </a:solidFill>
-                <a:latin typeface="Calibri"/>
-              </a:defRPr>
-            </a:pPr>
-            <a:r>
-              <a:t>⚔️ Six baselines on the same 50 episodes — level on the reward, no RL advantage yet</a:t>
-            </a:r>
-          </a:p>
-        </p:txBody>
-      </p:sp>
-      <p:sp>
-        <p:nvSpPr>
-          <p:cNvPr id="9" name="TextBox 8"/>
-          <p:cNvSpPr txBox="1"/>
-          <p:nvPr/>
-        </p:nvSpPr>
-        <p:spPr>
-          <a:xfrm>
-            <a:off x="914400" y="4343400"/>
-            <a:ext cx="10362895" cy="411480"/>
-          </a:xfrm>
-          <a:prstGeom prst="rect">
-            <a:avLst/>
-          </a:prstGeom>
-          <a:noFill/>
-        </p:spPr>
-        <p:txBody>
-          <a:bodyPr wrap="square">
-            <a:spAutoFit/>
-          </a:bodyPr>
-          <a:lstStyle/>
-          <a:p>
-            <a:pPr algn="l">
-              <a:defRPr sz="1600" b="0">
-                <a:solidFill>
-                  <a:srgbClr val="FFFFFF"/>
-                </a:solidFill>
-                <a:latin typeface="Calibri"/>
-              </a:defRPr>
-            </a:pPr>
-            <a:r>
-              <a:t>🔄 Transfer: the production policy needs no adaptation; the nominal-trained one does</a:t>
-            </a:r>
-          </a:p>
-        </p:txBody>
-      </p:sp>
-      <p:sp>
-        <p:nvSpPr>
-          <p:cNvPr id="10" name="TextBox 9"/>
-          <p:cNvSpPr txBox="1"/>
-          <p:nvPr/>
-        </p:nvSpPr>
-        <p:spPr>
-          <a:xfrm>
-            <a:off x="914400" y="4800600"/>
-            <a:ext cx="10362895" cy="411480"/>
-          </a:xfrm>
-          <a:prstGeom prst="rect">
-            <a:avLst/>
-          </a:prstGeom>
-          <a:noFill/>
-        </p:spPr>
-        <p:txBody>
-          <a:bodyPr wrap="square">
-            <a:spAutoFit/>
-          </a:bodyPr>
-          <a:lstStyle/>
-          <a:p>
-            <a:pPr algn="l">
-              <a:defRPr sz="1600" b="0">
-                <a:solidFill>
-                  <a:srgbClr val="FFFFFF"/>
-                </a:solidFill>
-                <a:latin typeface="Calibri"/>
-              </a:defRPr>
-            </a:pPr>
-            <a:r>
-              <a:t>🖥️ Interactive workstation: 2D stock depletion, micro-topography, G-code, controllers</a:t>
-            </a:r>
-          </a:p>
-        </p:txBody>
-      </p:sp>
-      <p:sp>
-        <p:nvSpPr>
-          <p:cNvPr id="11" name="TextBox 10"/>
-          <p:cNvSpPr txBox="1"/>
-          <p:nvPr/>
-        </p:nvSpPr>
-        <p:spPr>
-          <a:xfrm>
-            <a:off x="914400" y="5257800"/>
-            <a:ext cx="10362895" cy="411480"/>
-          </a:xfrm>
-          <a:prstGeom prst="rect">
-            <a:avLst/>
-          </a:prstGeom>
-          <a:noFill/>
-        </p:spPr>
-        <p:txBody>
-          <a:bodyPr wrap="square">
-            <a:spAutoFit/>
-          </a:bodyPr>
-          <a:lstStyle/>
-          <a:p>
-            <a:pPr algn="l">
-              <a:defRPr sz="1600" b="0">
-                <a:solidFill>
-                  <a:srgbClr val="FFFFFF"/>
-                </a:solidFill>
-                <a:latin typeface="Calibri"/>
-              </a:defRPr>
-            </a:pPr>
-            <a:r>
-              <a:t>🔁 Full reproducibility: every result table from committed artifacts by one script</a:t>
-            </a:r>
-          </a:p>
-        </p:txBody>
-      </p:sp>
-      <p:sp>
-        <p:nvSpPr>
-          <p:cNvPr id="12" name="Rectangle 11"/>
-          <p:cNvSpPr/>
-          <p:nvPr/>
-        </p:nvSpPr>
-        <p:spPr>
-          <a:xfrm>
-            <a:off x="914400" y="5669280"/>
-            <a:ext cx="10362895" cy="50800"/>
-          </a:xfrm>
-          <a:prstGeom prst="rect">
-            <a:avLst/>
-          </a:prstGeom>
-          <a:solidFill>
-            <a:srgbClr val="CC9900"/>
-          </a:solidFill>
-          <a:ln>
-            <a:noFill/>
-          </a:ln>
-        </p:spPr>
-        <p:style>
-          <a:lnRef idx="1">
-            <a:schemeClr val="accent1"/>
-          </a:lnRef>
-          <a:fillRef idx="3">
-            <a:schemeClr val="accent1"/>
-          </a:fillRef>
-          <a:effectRef idx="2">
-            <a:schemeClr val="accent1"/>
-          </a:effectRef>
-          <a:fontRef idx="minor">
-            <a:schemeClr val="lt1"/>
-          </a:fontRef>
-        </p:style>
-        <p:txBody>
-          <a:bodyPr rtlCol="0" anchor="ctr"/>
-          <a:lstStyle/>
-          <a:p>
-            <a:pPr algn="ctr"/>
-          </a:p>
-        </p:txBody>
-      </p:sp>
-      <p:sp>
-        <p:nvSpPr>
-          <p:cNvPr id="13" name="TextBox 12"/>
-          <p:cNvSpPr txBox="1"/>
-          <p:nvPr/>
-        </p:nvSpPr>
-        <p:spPr>
-          <a:xfrm>
-            <a:off x="914400" y="5779008"/>
-            <a:ext cx="10362895" cy="822960"/>
-          </a:xfrm>
-          <a:prstGeom prst="rect">
-            <a:avLst/>
-          </a:prstGeom>
-          <a:noFill/>
-        </p:spPr>
-        <p:txBody>
-          <a:bodyPr wrap="square">
-            <a:spAutoFit/>
-          </a:bodyPr>
-          <a:lstStyle/>
-          <a:p>
-            <a:pPr algn="ctr">
-              <a:defRPr sz="1500" b="1">
-                <a:solidFill>
-                  <a:srgbClr val="CC9900"/>
-                </a:solidFill>
-                <a:latin typeface="Calibri"/>
-              </a:defRPr>
-            </a:pPr>
-            <a:r>
-              <a:t>Key Scientific Finding: The speed-dependent specific cutting energy creates a genuine energy/throughput trade-off. Across the measured frontier the removal rate falls 8.4% while the energy of the part falls 9.5%. One conditioned policy reaches that whole frontier at runtime, beats the 21 policies trained per weight, and transfers to a harder material with no adaptation.</a:t>
+            <a:pPr>
+              <a:spcAft>
+                <a:spcPts val="400"/>
+              </a:spcAft>
+              <a:defRPr sz="1400">
+                <a:solidFill>
+                  <a:srgbClr val="333333"/>
+                </a:solidFill>
+                <a:latin typeface="Calibri"/>
+              </a:defRPr>
+            </a:pPr>
+            <a:r>
+              <a:t>Testing (34 tests):</a:t>
+            </a:r>
+          </a:p>
+          <a:p>
+            <a:pPr>
+              <a:spcAft>
+                <a:spcPts val="400"/>
+              </a:spcAft>
+              <a:defRPr sz="1400">
+                <a:solidFill>
+                  <a:srgbClr val="333333"/>
+                </a:solidFill>
+                <a:latin typeface="Calibri"/>
+              </a:defRPr>
+            </a:pPr>
+            <a:r>
+              <a:t>  • 22 env tests: clipping, truncation, soft norm, 11-D</a:t>
+            </a:r>
+          </a:p>
+          <a:p>
+            <a:pPr>
+              <a:spcAft>
+                <a:spcPts val="400"/>
+              </a:spcAft>
+              <a:defRPr sz="1400">
+                <a:solidFill>
+                  <a:srgbClr val="333333"/>
+                </a:solidFill>
+                <a:latin typeface="Calibri"/>
+              </a:defRPr>
+            </a:pPr>
+            <a:r>
+              <a:t>    observation, constants, overrides, accumulators, energy</a:t>
+            </a:r>
+          </a:p>
+          <a:p>
+            <a:pPr>
+              <a:spcAft>
+                <a:spcPts val="400"/>
+              </a:spcAft>
+              <a:defRPr sz="1400">
+                <a:solidFill>
+                  <a:srgbClr val="333333"/>
+                </a:solidFill>
+                <a:latin typeface="Calibri"/>
+              </a:defRPr>
+            </a:pPr>
+            <a:r>
+              <a:t>    norm, Gym checker, randomization, pinned values, scenario</a:t>
+            </a:r>
+          </a:p>
+          <a:p>
+            <a:pPr>
+              <a:spcAft>
+                <a:spcPts val="400"/>
+              </a:spcAft>
+              <a:defRPr sz="1400">
+                <a:solidFill>
+                  <a:srgbClr val="333333"/>
+                </a:solidFill>
+                <a:latin typeface="Calibri"/>
+              </a:defRPr>
+            </a:pPr>
+            <a:r>
+              <a:t>    scales, context (weight, material, random weight), speed</a:t>
+            </a:r>
+          </a:p>
+          <a:p>
+            <a:pPr>
+              <a:spcAft>
+                <a:spcPts val="400"/>
+              </a:spcAft>
+              <a:defRPr sz="1400">
+                <a:solidFill>
+                  <a:srgbClr val="333333"/>
+                </a:solidFill>
+                <a:latin typeface="Calibri"/>
+              </a:defRPr>
+            </a:pPr>
+            <a:r>
+              <a:t>    dependence, energy minimum, shared physics</a:t>
+            </a:r>
+          </a:p>
+          <a:p>
+            <a:pPr>
+              <a:spcAft>
+                <a:spcPts val="400"/>
+              </a:spcAft>
+              <a:defRPr sz="1400">
+                <a:solidFill>
+                  <a:srgbClr val="333333"/>
+                </a:solidFill>
+                <a:latin typeface="Calibri"/>
+              </a:defRPr>
+            </a:pPr>
+            <a:r>
+              <a:t>  • 2 reward tests: golden values (w₂ = 0.0, 0.4, 0.75),</a:t>
+            </a:r>
+          </a:p>
+          <a:p>
+            <a:pPr>
+              <a:spcAft>
+                <a:spcPts val="400"/>
+              </a:spcAft>
+              <a:defRPr sz="1400">
+                <a:solidFill>
+                  <a:srgbClr val="333333"/>
+                </a:solidFill>
+                <a:latin typeface="Calibri"/>
+              </a:defRPr>
+            </a:pPr>
+            <a:r>
+              <a:t>    finishing penalty</a:t>
+            </a:r>
+          </a:p>
+          <a:p>
+            <a:pPr>
+              <a:spcAft>
+                <a:spcPts val="400"/>
+              </a:spcAft>
+              <a:defRPr sz="1400">
+                <a:solidFill>
+                  <a:srgbClr val="333333"/>
+                </a:solidFill>
+                <a:latin typeface="Calibri"/>
+              </a:defRPr>
+            </a:pPr>
+            <a:r>
+              <a:t>  • 5 integration: train→eval roundtrip, one registration,</a:t>
+            </a:r>
+          </a:p>
+          <a:p>
+            <a:pPr>
+              <a:spcAft>
+                <a:spcPts val="400"/>
+              </a:spcAft>
+              <a:defRPr sz="1400">
+                <a:solidFill>
+                  <a:srgbClr val="333333"/>
+                </a:solidFill>
+                <a:latin typeface="Calibri"/>
+              </a:defRPr>
+            </a:pPr>
+            <a:r>
+              <a:t>    context in the observation, one policy at a pinned weight,</a:t>
+            </a:r>
+          </a:p>
+          <a:p>
+            <a:pPr>
+              <a:spcAft>
+                <a:spcPts val="400"/>
+              </a:spcAft>
+              <a:defRPr sz="1400">
+                <a:solidFill>
+                  <a:srgbClr val="333333"/>
+                </a:solidFill>
+                <a:latin typeface="Calibri"/>
+              </a:defRPr>
+            </a:pPr>
+            <a:r>
+              <a:t>    baseline artifact</a:t>
+            </a:r>
+          </a:p>
+          <a:p>
+            <a:pPr>
+              <a:spcAft>
+                <a:spcPts val="400"/>
+              </a:spcAft>
+              <a:defRPr sz="1400">
+                <a:solidFill>
+                  <a:srgbClr val="333333"/>
+                </a:solidFill>
+                <a:latin typeface="Calibri"/>
+              </a:defRPr>
+            </a:pPr>
+            <a:r>
+              <a:t>  • 3 callback: heartbeat delivery, failure report, interval</a:t>
+            </a:r>
+          </a:p>
+          <a:p>
+            <a:pPr>
+              <a:spcAft>
+                <a:spcPts val="400"/>
+              </a:spcAft>
+              <a:defRPr sz="1400">
+                <a:solidFill>
+                  <a:srgbClr val="333333"/>
+                </a:solidFill>
+                <a:latin typeface="Calibri"/>
+              </a:defRPr>
+            </a:pPr>
+            <a:r>
+              <a:t>  • 2 training: convergence, reproducibility</a:t>
+            </a:r>
+          </a:p>
+          <a:p>
+            <a:pPr>
+              <a:spcAft>
+                <a:spcPts val="400"/>
+              </a:spcAft>
+              <a:defRPr sz="1400">
+                <a:solidFill>
+                  <a:srgbClr val="333333"/>
+                </a:solidFill>
+                <a:latin typeface="Calibri"/>
+              </a:defRPr>
+            </a:pPr>
+          </a:p>
+          <a:p>
+            <a:pPr>
+              <a:spcAft>
+                <a:spcPts val="400"/>
+              </a:spcAft>
+              <a:defRPr sz="1400">
+                <a:solidFill>
+                  <a:srgbClr val="333333"/>
+                </a:solidFill>
+                <a:latin typeface="Calibri"/>
+              </a:defRPr>
+            </a:pPr>
+            <a:r>
+              <a:t>Code Quality:</a:t>
+            </a:r>
+          </a:p>
+          <a:p>
+            <a:pPr>
+              <a:spcAft>
+                <a:spcPts val="400"/>
+              </a:spcAft>
+              <a:defRPr sz="1400">
+                <a:solidFill>
+                  <a:srgbClr val="333333"/>
+                </a:solidFill>
+                <a:latin typeface="Calibri"/>
+              </a:defRPr>
+            </a:pPr>
+            <a:r>
+              <a:t>  • No unused imports (AST verified)</a:t>
+            </a:r>
+          </a:p>
+          <a:p>
+            <a:pPr>
+              <a:spcAft>
+                <a:spcPts val="400"/>
+              </a:spcAft>
+              <a:defRPr sz="1400">
+                <a:solidFill>
+                  <a:srgbClr val="333333"/>
+                </a:solidFill>
+                <a:latin typeface="Calibri"/>
+              </a:defRPr>
+            </a:pPr>
+            <a:r>
+              <a:t>  • Conventional commits, clean git history</a:t>
+            </a:r>
+          </a:p>
+          <a:p>
+            <a:pPr>
+              <a:spcAft>
+                <a:spcPts val="400"/>
+              </a:spcAft>
+              <a:defRPr sz="1400">
+                <a:solidFill>
+                  <a:srgbClr val="333333"/>
+                </a:solidFill>
+                <a:latin typeface="Calibri"/>
+              </a:defRPr>
+            </a:pPr>
+            <a:r>
+              <a:t>  • Constants and paths in MillingDT/config/</a:t>
             </a:r>
           </a:p>
         </p:txBody>
@@ -9523,7 +10275,7 @@
               </a:defRPr>
             </a:pPr>
             <a:r>
-              <a:t>Reproducibility: All Commands Run from Project Root</a:t>
+              <a:t>Discussion: What Worked, Limitations, Future Work</a:t>
             </a:r>
           </a:p>
         </p:txBody>
@@ -9536,8 +10288,8 @@
         </p:nvSpPr>
         <p:spPr>
           <a:xfrm>
-            <a:off x="457200" y="1280160"/>
-            <a:ext cx="11247120" cy="411480"/>
+            <a:off x="365760" y="1188720"/>
+            <a:ext cx="3566160" cy="5303520"/>
           </a:xfrm>
           <a:prstGeom prst="rect">
             <a:avLst/>
@@ -9545,8 +10297,10 @@
           <a:solidFill>
             <a:srgbClr val="F0F0F0"/>
           </a:solidFill>
-          <a:ln>
-            <a:noFill/>
+          <a:ln w="19050">
+            <a:solidFill>
+              <a:srgbClr val="003366"/>
+            </a:solidFill>
           </a:ln>
         </p:spPr>
         <p:style>
@@ -9579,8 +10333,8 @@
         </p:nvSpPr>
         <p:spPr>
           <a:xfrm>
-            <a:off x="640080" y="1298448"/>
-            <a:ext cx="2286000" cy="365760"/>
+            <a:off x="548640" y="1280160"/>
+            <a:ext cx="3200400" cy="457200"/>
           </a:xfrm>
           <a:prstGeom prst="rect">
             <a:avLst/>
@@ -9594,7 +10348,7 @@
           <a:lstStyle/>
           <a:p>
             <a:pPr algn="l">
-              <a:defRPr sz="1500" b="1">
+              <a:defRPr sz="2000" b="1">
                 <a:solidFill>
                   <a:srgbClr val="003366"/>
                 </a:solidFill>
@@ -9602,7 +10356,7 @@
               </a:defRPr>
             </a:pPr>
             <a:r>
-              <a:t>Tests</a:t>
+              <a:t>✅ What Worked</a:t>
             </a:r>
           </a:p>
         </p:txBody>
@@ -9615,8 +10369,8 @@
         </p:nvSpPr>
         <p:spPr>
           <a:xfrm>
-            <a:off x="3017520" y="1298448"/>
-            <a:ext cx="8503920" cy="365760"/>
+            <a:off x="548640" y="1828800"/>
+            <a:ext cx="3200400" cy="4389120"/>
           </a:xfrm>
           <a:prstGeom prst="rect">
             <a:avLst/>
@@ -9629,16 +10383,115 @@
           </a:bodyPr>
           <a:lstStyle/>
           <a:p>
-            <a:pPr algn="l">
-              <a:defRPr sz="1400" b="0">
+            <a:pPr>
+              <a:spcAft>
+                <a:spcPts val="800"/>
+              </a:spcAft>
+              <a:defRPr sz="1500">
                 <a:solidFill>
                   <a:srgbClr val="333333"/>
                 </a:solidFill>
-                <a:latin typeface="Consolas"/>
-              </a:defRPr>
-            </a:pPr>
-            <a:r>
-              <a:t>pytest tests/ -v</a:t>
+                <a:latin typeface="Calibri"/>
+              </a:defRPr>
+            </a:pPr>
+            <a:r>
+              <a:t>Speed-dependent k_c creates genuine trade-off</a:t>
+            </a:r>
+          </a:p>
+          <a:p>
+            <a:pPr>
+              <a:spcAft>
+                <a:spcPts val="800"/>
+              </a:spcAft>
+              <a:defRPr sz="1500">
+                <a:solidFill>
+                  <a:srgbClr val="333333"/>
+                </a:solidFill>
+                <a:latin typeface="Calibri"/>
+              </a:defRPr>
+            </a:pPr>
+            <a:r>
+              <a:t>Domain randomization → 99% completion, 0% finished violations</a:t>
+            </a:r>
+          </a:p>
+          <a:p>
+            <a:pPr>
+              <a:spcAft>
+                <a:spcPts val="800"/>
+              </a:spcAft>
+              <a:defRPr sz="1500">
+                <a:solidFill>
+                  <a:srgbClr val="333333"/>
+                </a:solidFill>
+                <a:latin typeface="Calibri"/>
+              </a:defRPr>
+            </a:pPr>
+            <a:r>
+              <a:t>One policy beats the 21 per-weight policies</a:t>
+            </a:r>
+          </a:p>
+          <a:p>
+            <a:pPr>
+              <a:spcAft>
+                <a:spcPts val="800"/>
+              </a:spcAft>
+              <a:defRPr sz="1500">
+                <a:solidFill>
+                  <a:srgbClr val="333333"/>
+                </a:solidFill>
+                <a:latin typeface="Calibri"/>
+              </a:defRPr>
+            </a:pPr>
+            <a:r>
+              <a:t>Training across materials makes the adaptation unnecessary</a:t>
+            </a:r>
+          </a:p>
+          <a:p>
+            <a:pPr>
+              <a:spcAft>
+                <a:spcPts val="800"/>
+              </a:spcAft>
+              <a:defRPr sz="1500">
+                <a:solidFill>
+                  <a:srgbClr val="333333"/>
+                </a:solidFill>
+                <a:latin typeface="Calibri"/>
+              </a:defRPr>
+            </a:pPr>
+            <a:r>
+              <a:t>Receding-horizon = strong, fair baseline (same physics)</a:t>
+            </a:r>
+          </a:p>
+          <a:p>
+            <a:pPr>
+              <a:spcAft>
+                <a:spcPts val="800"/>
+              </a:spcAft>
+              <a:defRPr sz="1500">
+                <a:solidFill>
+                  <a:srgbClr val="333333"/>
+                </a:solidFill>
+                <a:latin typeface="Calibri"/>
+              </a:defRPr>
+            </a:pPr>
+            <a:r>
+              <a:t>Controller initialization buys consistency: reward std 30.0 → 3.4, no tool breakage</a:t>
+            </a:r>
+          </a:p>
+          <a:p>
+            <a:pPr>
+              <a:spcAft>
+                <a:spcPts val="800"/>
+              </a:spcAft>
+              <a:defRPr sz="1500">
+                <a:solidFill>
+                  <a:srgbClr val="333333"/>
+                </a:solidFill>
+                <a:latin typeface="Calibri"/>
+              </a:defRPr>
+            </a:pPr>
+            <a:r>
+              <a:t>Full reproducibility: one script regenerates all tables</a:t>
             </a:r>
           </a:p>
         </p:txBody>
@@ -9651,17 +10504,19 @@
         </p:nvSpPr>
         <p:spPr>
           <a:xfrm>
-            <a:off x="457200" y="1737360"/>
-            <a:ext cx="11247120" cy="411480"/>
+            <a:off x="4069080" y="1188720"/>
+            <a:ext cx="3566160" cy="5303520"/>
           </a:xfrm>
           <a:prstGeom prst="rect">
             <a:avLst/>
           </a:prstGeom>
           <a:solidFill>
-            <a:srgbClr val="FFFFFF"/>
+            <a:srgbClr val="F0F0F0"/>
           </a:solidFill>
-          <a:ln>
-            <a:noFill/>
+          <a:ln w="19050">
+            <a:solidFill>
+              <a:srgbClr val="003366"/>
+            </a:solidFill>
           </a:ln>
         </p:spPr>
         <p:style>
@@ -9694,8 +10549,8 @@
         </p:nvSpPr>
         <p:spPr>
           <a:xfrm>
-            <a:off x="640080" y="1755648"/>
-            <a:ext cx="2286000" cy="365760"/>
+            <a:off x="4251960" y="1280160"/>
+            <a:ext cx="3200400" cy="457200"/>
           </a:xfrm>
           <a:prstGeom prst="rect">
             <a:avLst/>
@@ -9709,7 +10564,7 @@
           <a:lstStyle/>
           <a:p>
             <a:pPr algn="l">
-              <a:defRPr sz="1500" b="1">
+              <a:defRPr sz="2000" b="1">
                 <a:solidFill>
                   <a:srgbClr val="003366"/>
                 </a:solidFill>
@@ -9717,7 +10572,7 @@
               </a:defRPr>
             </a:pPr>
             <a:r>
-              <a:t>Production policy</a:t>
+              <a:t>⚠️ Limitations</a:t>
             </a:r>
           </a:p>
         </p:txBody>
@@ -9730,8 +10585,8 @@
         </p:nvSpPr>
         <p:spPr>
           <a:xfrm>
-            <a:off x="3017520" y="1755648"/>
-            <a:ext cx="8503920" cy="365760"/>
+            <a:off x="4251960" y="1828800"/>
+            <a:ext cx="3200400" cy="4389120"/>
           </a:xfrm>
           <a:prstGeom prst="rect">
             <a:avLst/>
@@ -9744,16 +10599,99 @@
           </a:bodyPr>
           <a:lstStyle/>
           <a:p>
-            <a:pPr algn="l">
-              <a:defRPr sz="1400" b="0">
+            <a:pPr>
+              <a:spcAft>
+                <a:spcPts val="800"/>
+              </a:spcAft>
+              <a:defRPr sz="1500">
                 <a:solidFill>
                   <a:srgbClr val="333333"/>
                 </a:solidFill>
-                <a:latin typeface="Consolas"/>
-              </a:defRPr>
-            </a:pPr>
-            <a:r>
-              <a:t>python agent/train_rl.py --steps 1000000 --seed 42 --randomize --randomize-weight</a:t>
+                <a:latin typeface="Calibri"/>
+              </a:defRPr>
+            </a:pPr>
+            <a:r>
+              <a:t>PPO is level with the receding-horizon, not ahead of it</a:t>
+            </a:r>
+          </a:p>
+          <a:p>
+            <a:pPr>
+              <a:spcAft>
+                <a:spcPts val="800"/>
+              </a:spcAft>
+              <a:defRPr sz="1500">
+                <a:solidFill>
+                  <a:srgbClr val="333333"/>
+                </a:solidFill>
+                <a:latin typeface="Calibri"/>
+              </a:defRPr>
+            </a:pPr>
+            <a:r>
+              <a:t>Initializing from the controller does not close the gap: more uniform, but 6.6% less removal rate and 12.9% more energy</a:t>
+            </a:r>
+          </a:p>
+          <a:p>
+            <a:pPr>
+              <a:spcAft>
+                <a:spcPts val="800"/>
+              </a:spcAft>
+              <a:defRPr sz="1500">
+                <a:solidFill>
+                  <a:srgbClr val="333333"/>
+                </a:solidFill>
+                <a:latin typeface="Calibri"/>
+              </a:defRPr>
+            </a:pPr>
+            <a:r>
+              <a:t>Ablation uses 150k steps/weight (vs 1M production)</a:t>
+            </a:r>
+          </a:p>
+          <a:p>
+            <a:pPr>
+              <a:spcAft>
+                <a:spcPts val="800"/>
+              </a:spcAft>
+              <a:defRPr sz="1500">
+                <a:solidFill>
+                  <a:srgbClr val="333333"/>
+                </a:solidFill>
+                <a:latin typeface="Calibri"/>
+              </a:defRPr>
+            </a:pPr>
+            <a:r>
+              <a:t>The reward charges a pass, the metric is a part</a:t>
+            </a:r>
+          </a:p>
+          <a:p>
+            <a:pPr>
+              <a:spcAft>
+                <a:spcPts val="800"/>
+              </a:spcAft>
+              <a:defRPr sz="1500">
+                <a:solidFill>
+                  <a:srgbClr val="333333"/>
+                </a:solidFill>
+                <a:latin typeface="Calibri"/>
+              </a:defRPr>
+            </a:pPr>
+            <a:r>
+              <a:t>Micro-topography is simplified (no chatter/vibration)</a:t>
+            </a:r>
+          </a:p>
+          <a:p>
+            <a:pPr>
+              <a:spcAft>
+                <a:spcPts val="800"/>
+              </a:spcAft>
+              <a:defRPr sz="1500">
+                <a:solidFill>
+                  <a:srgbClr val="333333"/>
+                </a:solidFill>
+                <a:latin typeface="Calibri"/>
+              </a:defRPr>
+            </a:pPr>
+            <a:r>
+              <a:t>Sim-only, no real machine calibration yet</a:t>
             </a:r>
           </a:p>
         </p:txBody>
@@ -9766,8 +10704,8 @@
         </p:nvSpPr>
         <p:spPr>
           <a:xfrm>
-            <a:off x="457200" y="2194560"/>
-            <a:ext cx="11247120" cy="411480"/>
+            <a:off x="7772400" y="1188720"/>
+            <a:ext cx="3566160" cy="5303520"/>
           </a:xfrm>
           <a:prstGeom prst="rect">
             <a:avLst/>
@@ -9775,8 +10713,10 @@
           <a:solidFill>
             <a:srgbClr val="F0F0F0"/>
           </a:solidFill>
-          <a:ln>
-            <a:noFill/>
+          <a:ln w="19050">
+            <a:solidFill>
+              <a:srgbClr val="003366"/>
+            </a:solidFill>
           </a:ln>
         </p:spPr>
         <p:style>
@@ -9809,8 +10749,8 @@
         </p:nvSpPr>
         <p:spPr>
           <a:xfrm>
-            <a:off x="640080" y="2212848"/>
-            <a:ext cx="2286000" cy="365760"/>
+            <a:off x="7955280" y="1280160"/>
+            <a:ext cx="3200400" cy="457200"/>
           </a:xfrm>
           <a:prstGeom prst="rect">
             <a:avLst/>
@@ -9824,7 +10764,7 @@
           <a:lstStyle/>
           <a:p>
             <a:pPr algn="l">
-              <a:defRPr sz="1500" b="1">
+              <a:defRPr sz="2000" b="1">
                 <a:solidFill>
                   <a:srgbClr val="003366"/>
                 </a:solidFill>
@@ -9832,7 +10772,7 @@
               </a:defRPr>
             </a:pPr>
             <a:r>
-              <a:t>One pinned weight</a:t>
+              <a:t>🚀 Future Work</a:t>
             </a:r>
           </a:p>
         </p:txBody>
@@ -9845,8 +10785,8 @@
         </p:nvSpPr>
         <p:spPr>
           <a:xfrm>
-            <a:off x="3017520" y="2212848"/>
-            <a:ext cx="8503920" cy="365760"/>
+            <a:off x="7955280" y="1828800"/>
+            <a:ext cx="3200400" cy="4389120"/>
           </a:xfrm>
           <a:prstGeom prst="rect">
             <a:avLst/>
@@ -9859,936 +10799,99 @@
           </a:bodyPr>
           <a:lstStyle/>
           <a:p>
-            <a:pPr algn="l">
-              <a:defRPr sz="1400" b="0">
+            <a:pPr>
+              <a:spcAft>
+                <a:spcPts val="800"/>
+              </a:spcAft>
+              <a:defRPr sz="1500">
                 <a:solidFill>
                   <a:srgbClr val="333333"/>
                 </a:solidFill>
-                <a:latin typeface="Consolas"/>
-              </a:defRPr>
-            </a:pPr>
-            <a:r>
-              <a:t>python agent/train_rl.py --steps 150000 --seed 42 --randomize --w2 0.4</a:t>
-            </a:r>
-          </a:p>
-        </p:txBody>
-      </p:sp>
-      <p:sp>
-        <p:nvSpPr>
-          <p:cNvPr id="13" name="Rectangle 12"/>
-          <p:cNvSpPr/>
-          <p:nvPr/>
-        </p:nvSpPr>
-        <p:spPr>
-          <a:xfrm>
-            <a:off x="457200" y="2651760"/>
-            <a:ext cx="11247120" cy="411480"/>
-          </a:xfrm>
-          <a:prstGeom prst="rect">
-            <a:avLst/>
-          </a:prstGeom>
-          <a:solidFill>
-            <a:srgbClr val="FFFFFF"/>
-          </a:solidFill>
-          <a:ln>
-            <a:noFill/>
-          </a:ln>
-        </p:spPr>
-        <p:style>
-          <a:lnRef idx="1">
-            <a:schemeClr val="accent1"/>
-          </a:lnRef>
-          <a:fillRef idx="3">
-            <a:schemeClr val="accent1"/>
-          </a:fillRef>
-          <a:effectRef idx="2">
-            <a:schemeClr val="accent1"/>
-          </a:effectRef>
-          <a:fontRef idx="minor">
-            <a:schemeClr val="lt1"/>
-          </a:fontRef>
-        </p:style>
-        <p:txBody>
-          <a:bodyPr rtlCol="0" anchor="ctr"/>
-          <a:lstStyle/>
-          <a:p>
-            <a:pPr algn="ctr"/>
-          </a:p>
-        </p:txBody>
-      </p:sp>
-      <p:sp>
-        <p:nvSpPr>
-          <p:cNvPr id="14" name="TextBox 13"/>
-          <p:cNvSpPr txBox="1"/>
-          <p:nvPr/>
-        </p:nvSpPr>
-        <p:spPr>
-          <a:xfrm>
-            <a:off x="640080" y="2670048"/>
-            <a:ext cx="2286000" cy="365760"/>
-          </a:xfrm>
-          <a:prstGeom prst="rect">
-            <a:avLst/>
-          </a:prstGeom>
-          <a:noFill/>
-        </p:spPr>
-        <p:txBody>
-          <a:bodyPr wrap="square">
-            <a:spAutoFit/>
-          </a:bodyPr>
-          <a:lstStyle/>
-          <a:p>
-            <a:pPr algn="l">
-              <a:defRPr sz="1500" b="1">
-                <a:solidFill>
-                  <a:srgbClr val="003366"/>
-                </a:solidFill>
-                <a:latin typeface="Calibri"/>
-              </a:defRPr>
-            </a:pPr>
-            <a:r>
-              <a:t>Ablation grid</a:t>
-            </a:r>
-          </a:p>
-        </p:txBody>
-      </p:sp>
-      <p:sp>
-        <p:nvSpPr>
-          <p:cNvPr id="15" name="TextBox 14"/>
-          <p:cNvSpPr txBox="1"/>
-          <p:nvPr/>
-        </p:nvSpPr>
-        <p:spPr>
-          <a:xfrm>
-            <a:off x="3017520" y="2670048"/>
-            <a:ext cx="8503920" cy="365760"/>
-          </a:xfrm>
-          <a:prstGeom prst="rect">
-            <a:avLst/>
-          </a:prstGeom>
-          <a:noFill/>
-        </p:spPr>
-        <p:txBody>
-          <a:bodyPr wrap="square">
-            <a:spAutoFit/>
-          </a:bodyPr>
-          <a:lstStyle/>
-          <a:p>
-            <a:pPr algn="l">
-              <a:defRPr sz="1400" b="0">
+                <a:latin typeface="Calibri"/>
+              </a:defRPr>
+            </a:pPr>
+            <a:r>
+              <a:t>Compare against a restricted controller (is the gap an information gap?)</a:t>
+            </a:r>
+          </a:p>
+          <a:p>
+            <a:pPr>
+              <a:spcAft>
+                <a:spcPts val="800"/>
+              </a:spcAft>
+              <a:defRPr sz="1500">
                 <a:solidFill>
                   <a:srgbClr val="333333"/>
                 </a:solidFill>
-                <a:latin typeface="Consolas"/>
-              </a:defRPr>
-            </a:pPr>
-            <a:r>
-              <a:t>python agent/train_rl_ablation.py --steps 150000 --scenarios 50 --slots 7</a:t>
-            </a:r>
-          </a:p>
-        </p:txBody>
-      </p:sp>
-      <p:sp>
-        <p:nvSpPr>
-          <p:cNvPr id="16" name="Rectangle 15"/>
-          <p:cNvSpPr/>
-          <p:nvPr/>
-        </p:nvSpPr>
-        <p:spPr>
-          <a:xfrm>
-            <a:off x="457200" y="3108960"/>
-            <a:ext cx="11247120" cy="411480"/>
-          </a:xfrm>
-          <a:prstGeom prst="rect">
-            <a:avLst/>
-          </a:prstGeom>
-          <a:solidFill>
-            <a:srgbClr val="F0F0F0"/>
-          </a:solidFill>
-          <a:ln>
-            <a:noFill/>
-          </a:ln>
-        </p:spPr>
-        <p:style>
-          <a:lnRef idx="1">
-            <a:schemeClr val="accent1"/>
-          </a:lnRef>
-          <a:fillRef idx="3">
-            <a:schemeClr val="accent1"/>
-          </a:fillRef>
-          <a:effectRef idx="2">
-            <a:schemeClr val="accent1"/>
-          </a:effectRef>
-          <a:fontRef idx="minor">
-            <a:schemeClr val="lt1"/>
-          </a:fontRef>
-        </p:style>
-        <p:txBody>
-          <a:bodyPr rtlCol="0" anchor="ctr"/>
-          <a:lstStyle/>
-          <a:p>
-            <a:pPr algn="ctr"/>
-          </a:p>
-        </p:txBody>
-      </p:sp>
-      <p:sp>
-        <p:nvSpPr>
-          <p:cNvPr id="17" name="TextBox 16"/>
-          <p:cNvSpPr txBox="1"/>
-          <p:nvPr/>
-        </p:nvSpPr>
-        <p:spPr>
-          <a:xfrm>
-            <a:off x="640080" y="3127248"/>
-            <a:ext cx="2286000" cy="365760"/>
-          </a:xfrm>
-          <a:prstGeom prst="rect">
-            <a:avLst/>
-          </a:prstGeom>
-          <a:noFill/>
-        </p:spPr>
-        <p:txBody>
-          <a:bodyPr wrap="square">
-            <a:spAutoFit/>
-          </a:bodyPr>
-          <a:lstStyle/>
-          <a:p>
-            <a:pPr algn="l">
-              <a:defRPr sz="1500" b="1">
-                <a:solidFill>
-                  <a:srgbClr val="003366"/>
-                </a:solidFill>
-                <a:latin typeface="Calibri"/>
-              </a:defRPr>
-            </a:pPr>
-            <a:r>
-              <a:t>Monte Carlo eval</a:t>
-            </a:r>
-          </a:p>
-        </p:txBody>
-      </p:sp>
-      <p:sp>
-        <p:nvSpPr>
-          <p:cNvPr id="18" name="TextBox 17"/>
-          <p:cNvSpPr txBox="1"/>
-          <p:nvPr/>
-        </p:nvSpPr>
-        <p:spPr>
-          <a:xfrm>
-            <a:off x="3017520" y="3127248"/>
-            <a:ext cx="8503920" cy="365760"/>
-          </a:xfrm>
-          <a:prstGeom prst="rect">
-            <a:avLst/>
-          </a:prstGeom>
-          <a:noFill/>
-        </p:spPr>
-        <p:txBody>
-          <a:bodyPr wrap="square">
-            <a:spAutoFit/>
-          </a:bodyPr>
-          <a:lstStyle/>
-          <a:p>
-            <a:pPr algn="l">
-              <a:defRPr sz="1400" b="0">
+                <a:latin typeface="Calibri"/>
+              </a:defRPr>
+            </a:pPr>
+            <a:r>
+              <a:t>Sim-to-real: calibrate on machine data, add noise/delay</a:t>
+            </a:r>
+          </a:p>
+          <a:p>
+            <a:pPr>
+              <a:spcAft>
+                <a:spcPts val="800"/>
+              </a:spcAft>
+              <a:defRPr sz="1500">
                 <a:solidFill>
                   <a:srgbClr val="333333"/>
                 </a:solidFill>
-                <a:latin typeface="Consolas"/>
-              </a:defRPr>
-            </a:pPr>
-            <a:r>
-              <a:t>python agent/evaluate.py --scenarios 100</a:t>
-            </a:r>
-          </a:p>
-        </p:txBody>
-      </p:sp>
-      <p:sp>
-        <p:nvSpPr>
-          <p:cNvPr id="19" name="Rectangle 18"/>
-          <p:cNvSpPr/>
-          <p:nvPr/>
-        </p:nvSpPr>
-        <p:spPr>
-          <a:xfrm>
-            <a:off x="457200" y="3566160"/>
-            <a:ext cx="11247120" cy="411480"/>
-          </a:xfrm>
-          <a:prstGeom prst="rect">
-            <a:avLst/>
-          </a:prstGeom>
-          <a:solidFill>
-            <a:srgbClr val="FFFFFF"/>
-          </a:solidFill>
-          <a:ln>
-            <a:noFill/>
-          </a:ln>
-        </p:spPr>
-        <p:style>
-          <a:lnRef idx="1">
-            <a:schemeClr val="accent1"/>
-          </a:lnRef>
-          <a:fillRef idx="3">
-            <a:schemeClr val="accent1"/>
-          </a:fillRef>
-          <a:effectRef idx="2">
-            <a:schemeClr val="accent1"/>
-          </a:effectRef>
-          <a:fontRef idx="minor">
-            <a:schemeClr val="lt1"/>
-          </a:fontRef>
-        </p:style>
-        <p:txBody>
-          <a:bodyPr rtlCol="0" anchor="ctr"/>
-          <a:lstStyle/>
-          <a:p>
-            <a:pPr algn="ctr"/>
-          </a:p>
-        </p:txBody>
-      </p:sp>
-      <p:sp>
-        <p:nvSpPr>
-          <p:cNvPr id="20" name="TextBox 19"/>
-          <p:cNvSpPr txBox="1"/>
-          <p:nvPr/>
-        </p:nvSpPr>
-        <p:spPr>
-          <a:xfrm>
-            <a:off x="640080" y="3584448"/>
-            <a:ext cx="2286000" cy="365760"/>
-          </a:xfrm>
-          <a:prstGeom prst="rect">
-            <a:avLst/>
-          </a:prstGeom>
-          <a:noFill/>
-        </p:spPr>
-        <p:txBody>
-          <a:bodyPr wrap="square">
-            <a:spAutoFit/>
-          </a:bodyPr>
-          <a:lstStyle/>
-          <a:p>
-            <a:pPr algn="l">
-              <a:defRPr sz="1500" b="1">
-                <a:solidFill>
-                  <a:srgbClr val="003366"/>
-                </a:solidFill>
-                <a:latin typeface="Calibri"/>
-              </a:defRPr>
-            </a:pPr>
-            <a:r>
-              <a:t>Weight sweep + compare</a:t>
-            </a:r>
-          </a:p>
-        </p:txBody>
-      </p:sp>
-      <p:sp>
-        <p:nvSpPr>
-          <p:cNvPr id="21" name="TextBox 20"/>
-          <p:cNvSpPr txBox="1"/>
-          <p:nvPr/>
-        </p:nvSpPr>
-        <p:spPr>
-          <a:xfrm>
-            <a:off x="3017520" y="3584448"/>
-            <a:ext cx="8503920" cy="365760"/>
-          </a:xfrm>
-          <a:prstGeom prst="rect">
-            <a:avLst/>
-          </a:prstGeom>
-          <a:noFill/>
-        </p:spPr>
-        <p:txBody>
-          <a:bodyPr wrap="square">
-            <a:spAutoFit/>
-          </a:bodyPr>
-          <a:lstStyle/>
-          <a:p>
-            <a:pPr algn="l">
-              <a:defRPr sz="1400" b="0">
+                <a:latin typeface="Calibri"/>
+              </a:defRPr>
+            </a:pPr>
+            <a:r>
+              <a:t>True multi-objective RL (Pareto-conditioned, hypervolume)</a:t>
+            </a:r>
+          </a:p>
+          <a:p>
+            <a:pPr>
+              <a:spcAft>
+                <a:spcPts val="800"/>
+              </a:spcAft>
+              <a:defRPr sz="1500">
                 <a:solidFill>
                   <a:srgbClr val="333333"/>
                 </a:solidFill>
-                <a:latin typeface="Consolas"/>
-              </a:defRPr>
-            </a:pPr>
-            <a:r>
-              <a:t>python agent/evaluate.py --sweep-weight --compare</a:t>
-            </a:r>
-          </a:p>
-        </p:txBody>
-      </p:sp>
-      <p:sp>
-        <p:nvSpPr>
-          <p:cNvPr id="22" name="Rectangle 21"/>
-          <p:cNvSpPr/>
-          <p:nvPr/>
-        </p:nvSpPr>
-        <p:spPr>
-          <a:xfrm>
-            <a:off x="457200" y="4023360"/>
-            <a:ext cx="11247120" cy="411480"/>
-          </a:xfrm>
-          <a:prstGeom prst="rect">
-            <a:avLst/>
-          </a:prstGeom>
-          <a:solidFill>
-            <a:srgbClr val="F0F0F0"/>
-          </a:solidFill>
-          <a:ln>
-            <a:noFill/>
-          </a:ln>
-        </p:spPr>
-        <p:style>
-          <a:lnRef idx="1">
-            <a:schemeClr val="accent1"/>
-          </a:lnRef>
-          <a:fillRef idx="3">
-            <a:schemeClr val="accent1"/>
-          </a:fillRef>
-          <a:effectRef idx="2">
-            <a:schemeClr val="accent1"/>
-          </a:effectRef>
-          <a:fontRef idx="minor">
-            <a:schemeClr val="lt1"/>
-          </a:fontRef>
-        </p:style>
-        <p:txBody>
-          <a:bodyPr rtlCol="0" anchor="ctr"/>
-          <a:lstStyle/>
-          <a:p>
-            <a:pPr algn="ctr"/>
-          </a:p>
-        </p:txBody>
-      </p:sp>
-      <p:sp>
-        <p:nvSpPr>
-          <p:cNvPr id="23" name="TextBox 22"/>
-          <p:cNvSpPr txBox="1"/>
-          <p:nvPr/>
-        </p:nvSpPr>
-        <p:spPr>
-          <a:xfrm>
-            <a:off x="640080" y="4041648"/>
-            <a:ext cx="2286000" cy="365760"/>
-          </a:xfrm>
-          <a:prstGeom prst="rect">
-            <a:avLst/>
-          </a:prstGeom>
-          <a:noFill/>
-        </p:spPr>
-        <p:txBody>
-          <a:bodyPr wrap="square">
-            <a:spAutoFit/>
-          </a:bodyPr>
-          <a:lstStyle/>
-          <a:p>
-            <a:pPr algn="l">
-              <a:defRPr sz="1500" b="1">
-                <a:solidFill>
-                  <a:srgbClr val="003366"/>
-                </a:solidFill>
-                <a:latin typeface="Calibri"/>
-              </a:defRPr>
-            </a:pPr>
-            <a:r>
-              <a:t>Classical baselines</a:t>
-            </a:r>
-          </a:p>
-        </p:txBody>
-      </p:sp>
-      <p:sp>
-        <p:nvSpPr>
-          <p:cNvPr id="24" name="TextBox 23"/>
-          <p:cNvSpPr txBox="1"/>
-          <p:nvPr/>
-        </p:nvSpPr>
-        <p:spPr>
-          <a:xfrm>
-            <a:off x="3017520" y="4041648"/>
-            <a:ext cx="8503920" cy="365760"/>
-          </a:xfrm>
-          <a:prstGeom prst="rect">
-            <a:avLst/>
-          </a:prstGeom>
-          <a:noFill/>
-        </p:spPr>
-        <p:txBody>
-          <a:bodyPr wrap="square">
-            <a:spAutoFit/>
-          </a:bodyPr>
-          <a:lstStyle/>
-          <a:p>
-            <a:pPr algn="l">
-              <a:defRPr sz="1400" b="0">
+                <a:latin typeface="Calibri"/>
+              </a:defRPr>
+            </a:pPr>
+            <a:r>
+              <a:t>Online adaptation: runtime w₂ optimizer for energy budget</a:t>
+            </a:r>
+          </a:p>
+          <a:p>
+            <a:pPr>
+              <a:spcAft>
+                <a:spcPts val="800"/>
+              </a:spcAft>
+              <a:defRPr sz="1500">
                 <a:solidFill>
                   <a:srgbClr val="333333"/>
                 </a:solidFill>
-                <a:latin typeface="Consolas"/>
-              </a:defRPr>
-            </a:pPr>
-            <a:r>
-              <a:t>python baselines/run_baselines.py</a:t>
-            </a:r>
-          </a:p>
-        </p:txBody>
-      </p:sp>
-      <p:sp>
-        <p:nvSpPr>
-          <p:cNvPr id="25" name="Rectangle 24"/>
-          <p:cNvSpPr/>
-          <p:nvPr/>
-        </p:nvSpPr>
-        <p:spPr>
-          <a:xfrm>
-            <a:off x="457200" y="4480560"/>
-            <a:ext cx="11247120" cy="411480"/>
-          </a:xfrm>
-          <a:prstGeom prst="rect">
-            <a:avLst/>
-          </a:prstGeom>
-          <a:solidFill>
-            <a:srgbClr val="FFFFFF"/>
-          </a:solidFill>
-          <a:ln>
-            <a:noFill/>
-          </a:ln>
-        </p:spPr>
-        <p:style>
-          <a:lnRef idx="1">
-            <a:schemeClr val="accent1"/>
-          </a:lnRef>
-          <a:fillRef idx="3">
-            <a:schemeClr val="accent1"/>
-          </a:fillRef>
-          <a:effectRef idx="2">
-            <a:schemeClr val="accent1"/>
-          </a:effectRef>
-          <a:fontRef idx="minor">
-            <a:schemeClr val="lt1"/>
-          </a:fontRef>
-        </p:style>
-        <p:txBody>
-          <a:bodyPr rtlCol="0" anchor="ctr"/>
-          <a:lstStyle/>
-          <a:p>
-            <a:pPr algn="ctr"/>
-          </a:p>
-        </p:txBody>
-      </p:sp>
-      <p:sp>
-        <p:nvSpPr>
-          <p:cNvPr id="26" name="TextBox 25"/>
-          <p:cNvSpPr txBox="1"/>
-          <p:nvPr/>
-        </p:nvSpPr>
-        <p:spPr>
-          <a:xfrm>
-            <a:off x="640080" y="4498848"/>
-            <a:ext cx="2286000" cy="365760"/>
-          </a:xfrm>
-          <a:prstGeom prst="rect">
-            <a:avLst/>
-          </a:prstGeom>
-          <a:noFill/>
-        </p:spPr>
-        <p:txBody>
-          <a:bodyPr wrap="square">
-            <a:spAutoFit/>
-          </a:bodyPr>
-          <a:lstStyle/>
-          <a:p>
-            <a:pPr algn="l">
-              <a:defRPr sz="1500" b="1">
-                <a:solidFill>
-                  <a:srgbClr val="003366"/>
-                </a:solidFill>
-                <a:latin typeface="Calibri"/>
-              </a:defRPr>
-            </a:pPr>
-            <a:r>
-              <a:t>Transfer experiment</a:t>
-            </a:r>
-          </a:p>
-        </p:txBody>
-      </p:sp>
-      <p:sp>
-        <p:nvSpPr>
-          <p:cNvPr id="27" name="TextBox 26"/>
-          <p:cNvSpPr txBox="1"/>
-          <p:nvPr/>
-        </p:nvSpPr>
-        <p:spPr>
-          <a:xfrm>
-            <a:off x="3017520" y="4498848"/>
-            <a:ext cx="8503920" cy="365760"/>
-          </a:xfrm>
-          <a:prstGeom prst="rect">
-            <a:avLst/>
-          </a:prstGeom>
-          <a:noFill/>
-        </p:spPr>
-        <p:txBody>
-          <a:bodyPr wrap="square">
-            <a:spAutoFit/>
-          </a:bodyPr>
-          <a:lstStyle/>
-          <a:p>
-            <a:pPr algn="l">
-              <a:defRPr sz="1400" b="0">
+                <a:latin typeface="Calibri"/>
+              </a:defRPr>
+            </a:pPr>
+            <a:r>
+              <a:t>Full 3D Digital Twin: toolpath viz, collision checking</a:t>
+            </a:r>
+          </a:p>
+          <a:p>
+            <a:pPr>
+              <a:spcAft>
+                <a:spcPts val="800"/>
+              </a:spcAft>
+              <a:defRPr sz="1500">
                 <a:solidFill>
                   <a:srgbClr val="333333"/>
                 </a:solidFill>
-                <a:latin typeface="Consolas"/>
-              </a:defRPr>
-            </a:pPr>
-            <a:r>
-              <a:t>python agent/transfer_experiment.py</a:t>
-            </a:r>
-          </a:p>
-        </p:txBody>
-      </p:sp>
-      <p:sp>
-        <p:nvSpPr>
-          <p:cNvPr id="28" name="Rectangle 27"/>
-          <p:cNvSpPr/>
-          <p:nvPr/>
-        </p:nvSpPr>
-        <p:spPr>
-          <a:xfrm>
-            <a:off x="457200" y="4937760"/>
-            <a:ext cx="11247120" cy="411480"/>
-          </a:xfrm>
-          <a:prstGeom prst="rect">
-            <a:avLst/>
-          </a:prstGeom>
-          <a:solidFill>
-            <a:srgbClr val="F0F0F0"/>
-          </a:solidFill>
-          <a:ln>
-            <a:noFill/>
-          </a:ln>
-        </p:spPr>
-        <p:style>
-          <a:lnRef idx="1">
-            <a:schemeClr val="accent1"/>
-          </a:lnRef>
-          <a:fillRef idx="3">
-            <a:schemeClr val="accent1"/>
-          </a:fillRef>
-          <a:effectRef idx="2">
-            <a:schemeClr val="accent1"/>
-          </a:effectRef>
-          <a:fontRef idx="minor">
-            <a:schemeClr val="lt1"/>
-          </a:fontRef>
-        </p:style>
-        <p:txBody>
-          <a:bodyPr rtlCol="0" anchor="ctr"/>
-          <a:lstStyle/>
-          <a:p>
-            <a:pPr algn="ctr"/>
-          </a:p>
-        </p:txBody>
-      </p:sp>
-      <p:sp>
-        <p:nvSpPr>
-          <p:cNvPr id="29" name="TextBox 28"/>
-          <p:cNvSpPr txBox="1"/>
-          <p:nvPr/>
-        </p:nvSpPr>
-        <p:spPr>
-          <a:xfrm>
-            <a:off x="640080" y="4956048"/>
-            <a:ext cx="2286000" cy="365760"/>
-          </a:xfrm>
-          <a:prstGeom prst="rect">
-            <a:avLst/>
-          </a:prstGeom>
-          <a:noFill/>
-        </p:spPr>
-        <p:txBody>
-          <a:bodyPr wrap="square">
-            <a:spAutoFit/>
-          </a:bodyPr>
-          <a:lstStyle/>
-          <a:p>
-            <a:pPr algn="l">
-              <a:defRPr sz="1500" b="1">
-                <a:solidFill>
-                  <a:srgbClr val="003366"/>
-                </a:solidFill>
-                <a:latin typeface="Calibri"/>
-              </a:defRPr>
-            </a:pPr>
-            <a:r>
-              <a:t>Regenerate RESULTS.md</a:t>
-            </a:r>
-          </a:p>
-        </p:txBody>
-      </p:sp>
-      <p:sp>
-        <p:nvSpPr>
-          <p:cNvPr id="30" name="TextBox 29"/>
-          <p:cNvSpPr txBox="1"/>
-          <p:nvPr/>
-        </p:nvSpPr>
-        <p:spPr>
-          <a:xfrm>
-            <a:off x="3017520" y="4956048"/>
-            <a:ext cx="8503920" cy="365760"/>
-          </a:xfrm>
-          <a:prstGeom prst="rect">
-            <a:avLst/>
-          </a:prstGeom>
-          <a:noFill/>
-        </p:spPr>
-        <p:txBody>
-          <a:bodyPr wrap="square">
-            <a:spAutoFit/>
-          </a:bodyPr>
-          <a:lstStyle/>
-          <a:p>
-            <a:pPr algn="l">
-              <a:defRPr sz="1400" b="0">
-                <a:solidFill>
-                  <a:srgbClr val="333333"/>
-                </a:solidFill>
-                <a:latin typeface="Consolas"/>
-              </a:defRPr>
-            </a:pPr>
-            <a:r>
-              <a:t>python agent/summarize_results.py</a:t>
-            </a:r>
-          </a:p>
-        </p:txBody>
-      </p:sp>
-      <p:sp>
-        <p:nvSpPr>
-          <p:cNvPr id="31" name="Rectangle 30"/>
-          <p:cNvSpPr/>
-          <p:nvPr/>
-        </p:nvSpPr>
-        <p:spPr>
-          <a:xfrm>
-            <a:off x="457200" y="5394960"/>
-            <a:ext cx="11247120" cy="411480"/>
-          </a:xfrm>
-          <a:prstGeom prst="rect">
-            <a:avLst/>
-          </a:prstGeom>
-          <a:solidFill>
-            <a:srgbClr val="FFFFFF"/>
-          </a:solidFill>
-          <a:ln>
-            <a:noFill/>
-          </a:ln>
-        </p:spPr>
-        <p:style>
-          <a:lnRef idx="1">
-            <a:schemeClr val="accent1"/>
-          </a:lnRef>
-          <a:fillRef idx="3">
-            <a:schemeClr val="accent1"/>
-          </a:fillRef>
-          <a:effectRef idx="2">
-            <a:schemeClr val="accent1"/>
-          </a:effectRef>
-          <a:fontRef idx="minor">
-            <a:schemeClr val="lt1"/>
-          </a:fontRef>
-        </p:style>
-        <p:txBody>
-          <a:bodyPr rtlCol="0" anchor="ctr"/>
-          <a:lstStyle/>
-          <a:p>
-            <a:pPr algn="ctr"/>
-          </a:p>
-        </p:txBody>
-      </p:sp>
-      <p:sp>
-        <p:nvSpPr>
-          <p:cNvPr id="32" name="TextBox 31"/>
-          <p:cNvSpPr txBox="1"/>
-          <p:nvPr/>
-        </p:nvSpPr>
-        <p:spPr>
-          <a:xfrm>
-            <a:off x="640080" y="5413248"/>
-            <a:ext cx="2286000" cy="365760"/>
-          </a:xfrm>
-          <a:prstGeom prst="rect">
-            <a:avLst/>
-          </a:prstGeom>
-          <a:noFill/>
-        </p:spPr>
-        <p:txBody>
-          <a:bodyPr wrap="square">
-            <a:spAutoFit/>
-          </a:bodyPr>
-          <a:lstStyle/>
-          <a:p>
-            <a:pPr algn="l">
-              <a:defRPr sz="1500" b="1">
-                <a:solidFill>
-                  <a:srgbClr val="003366"/>
-                </a:solidFill>
-                <a:latin typeface="Calibri"/>
-              </a:defRPr>
-            </a:pPr>
-            <a:r>
-              <a:t>Launch workstation</a:t>
-            </a:r>
-          </a:p>
-        </p:txBody>
-      </p:sp>
-      <p:sp>
-        <p:nvSpPr>
-          <p:cNvPr id="33" name="TextBox 32"/>
-          <p:cNvSpPr txBox="1"/>
-          <p:nvPr/>
-        </p:nvSpPr>
-        <p:spPr>
-          <a:xfrm>
-            <a:off x="3017520" y="5413248"/>
-            <a:ext cx="8503920" cy="365760"/>
-          </a:xfrm>
-          <a:prstGeom prst="rect">
-            <a:avLst/>
-          </a:prstGeom>
-          <a:noFill/>
-        </p:spPr>
-        <p:txBody>
-          <a:bodyPr wrap="square">
-            <a:spAutoFit/>
-          </a:bodyPr>
-          <a:lstStyle/>
-          <a:p>
-            <a:pPr algn="l">
-              <a:defRPr sz="1400" b="0">
-                <a:solidFill>
-                  <a:srgbClr val="333333"/>
-                </a:solidFill>
-                <a:latin typeface="Consolas"/>
-              </a:defRPr>
-            </a:pPr>
-            <a:r>
-              <a:t>streamlit run app.py</a:t>
-            </a:r>
-          </a:p>
-        </p:txBody>
-      </p:sp>
-      <p:sp>
-        <p:nvSpPr>
-          <p:cNvPr id="34" name="Rectangle 33"/>
-          <p:cNvSpPr/>
-          <p:nvPr/>
-        </p:nvSpPr>
-        <p:spPr>
-          <a:xfrm>
-            <a:off x="457200" y="5852160"/>
-            <a:ext cx="11247120" cy="411480"/>
-          </a:xfrm>
-          <a:prstGeom prst="rect">
-            <a:avLst/>
-          </a:prstGeom>
-          <a:solidFill>
-            <a:srgbClr val="F0F0F0"/>
-          </a:solidFill>
-          <a:ln>
-            <a:noFill/>
-          </a:ln>
-        </p:spPr>
-        <p:style>
-          <a:lnRef idx="1">
-            <a:schemeClr val="accent1"/>
-          </a:lnRef>
-          <a:fillRef idx="3">
-            <a:schemeClr val="accent1"/>
-          </a:fillRef>
-          <a:effectRef idx="2">
-            <a:schemeClr val="accent1"/>
-          </a:effectRef>
-          <a:fontRef idx="minor">
-            <a:schemeClr val="lt1"/>
-          </a:fontRef>
-        </p:style>
-        <p:txBody>
-          <a:bodyPr rtlCol="0" anchor="ctr"/>
-          <a:lstStyle/>
-          <a:p>
-            <a:pPr algn="ctr"/>
-          </a:p>
-        </p:txBody>
-      </p:sp>
-      <p:sp>
-        <p:nvSpPr>
-          <p:cNvPr id="35" name="TextBox 34"/>
-          <p:cNvSpPr txBox="1"/>
-          <p:nvPr/>
-        </p:nvSpPr>
-        <p:spPr>
-          <a:xfrm>
-            <a:off x="640080" y="5870448"/>
-            <a:ext cx="2286000" cy="365760"/>
-          </a:xfrm>
-          <a:prstGeom prst="rect">
-            <a:avLst/>
-          </a:prstGeom>
-          <a:noFill/>
-        </p:spPr>
-        <p:txBody>
-          <a:bodyPr wrap="square">
-            <a:spAutoFit/>
-          </a:bodyPr>
-          <a:lstStyle/>
-          <a:p>
-            <a:pPr algn="l">
-              <a:defRPr sz="1500" b="1">
-                <a:solidFill>
-                  <a:srgbClr val="003366"/>
-                </a:solidFill>
-                <a:latin typeface="Calibri"/>
-              </a:defRPr>
-            </a:pPr>
-            <a:r>
-              <a:t>Full pipeline</a:t>
-            </a:r>
-          </a:p>
-        </p:txBody>
-      </p:sp>
-      <p:sp>
-        <p:nvSpPr>
-          <p:cNvPr id="36" name="TextBox 35"/>
-          <p:cNvSpPr txBox="1"/>
-          <p:nvPr/>
-        </p:nvSpPr>
-        <p:spPr>
-          <a:xfrm>
-            <a:off x="3017520" y="5870448"/>
-            <a:ext cx="8503920" cy="365760"/>
-          </a:xfrm>
-          <a:prstGeom prst="rect">
-            <a:avLst/>
-          </a:prstGeom>
-          <a:noFill/>
-        </p:spPr>
-        <p:txBody>
-          <a:bodyPr wrap="square">
-            <a:spAutoFit/>
-          </a:bodyPr>
-          <a:lstStyle/>
-          <a:p>
-            <a:pPr algn="l">
-              <a:defRPr sz="1400" b="0">
-                <a:solidFill>
-                  <a:srgbClr val="333333"/>
-                </a:solidFill>
-                <a:latin typeface="Consolas"/>
-              </a:defRPr>
-            </a:pPr>
-            <a:r>
-              <a:t>python agent/run_pipeline.py --steps 1000000</a:t>
+                <a:latin typeface="Calibri"/>
+              </a:defRPr>
+            </a:pPr>
+            <a:r>
+              <a:t>Deploy on edge hardware for real-time control</a:t>
             </a:r>
           </a:p>
         </p:txBody>
@@ -10827,8 +10930,8 @@
         </p:nvSpPr>
         <p:spPr>
           <a:xfrm>
-            <a:off x="914400" y="2286000"/>
-            <a:ext cx="10362895" cy="50800"/>
+            <a:off x="457200" y="731520"/>
+            <a:ext cx="11247120" cy="50800"/>
           </a:xfrm>
           <a:prstGeom prst="rect">
             <a:avLst/>
@@ -10870,7 +10973,7 @@
         </p:nvSpPr>
         <p:spPr>
           <a:xfrm>
-            <a:off x="914400" y="1371600"/>
+            <a:off x="914400" y="1097280"/>
             <a:ext cx="10362895" cy="914400"/>
           </a:xfrm>
           <a:prstGeom prst="rect">
@@ -10885,7 +10988,7 @@
           <a:lstStyle/>
           <a:p>
             <a:pPr algn="ctr">
-              <a:defRPr sz="5000" b="1">
+              <a:defRPr sz="4000" b="1">
                 <a:solidFill>
                   <a:srgbClr val="FFFFFF"/>
                 </a:solidFill>
@@ -10893,7 +10996,7 @@
               </a:defRPr>
             </a:pPr>
             <a:r>
-              <a:t>Thank You</a:t>
+              <a:t>Conclusion</a:t>
             </a:r>
           </a:p>
         </p:txBody>
@@ -10906,8 +11009,8 @@
         </p:nvSpPr>
         <p:spPr>
           <a:xfrm>
-            <a:off x="914400" y="2560320"/>
-            <a:ext cx="10362895" cy="731520"/>
+            <a:off x="914400" y="1965960"/>
+            <a:ext cx="10362895" cy="411480"/>
           </a:xfrm>
           <a:prstGeom prst="rect">
             <a:avLst/>
@@ -10920,16 +11023,16 @@
           </a:bodyPr>
           <a:lstStyle/>
           <a:p>
-            <a:pPr algn="ctr">
-              <a:defRPr sz="3600" b="0">
-                <a:solidFill>
-                  <a:srgbClr val="CC9900"/>
-                </a:solidFill>
-                <a:latin typeface="Calibri"/>
-              </a:defRPr>
-            </a:pPr>
-            <a:r>
-              <a:t>Questions &amp; Discussion</a:t>
+            <a:pPr algn="l">
+              <a:defRPr sz="1600" b="0">
+                <a:solidFill>
+                  <a:srgbClr val="FFFFFF"/>
+                </a:solidFill>
+                <a:latin typeface="Calibri"/>
+              </a:defRPr>
+            </a:pPr>
+            <a:r>
+              <a:t>🏭 Physics-grounded Digital Twin: speed-dependent cutting energy, tool wear, roughness, breakage</a:t>
             </a:r>
           </a:p>
         </p:txBody>
@@ -10942,8 +11045,8 @@
         </p:nvSpPr>
         <p:spPr>
           <a:xfrm>
-            <a:off x="914400" y="3657600"/>
-            <a:ext cx="10362895" cy="548640"/>
+            <a:off x="914400" y="2377440"/>
+            <a:ext cx="10362895" cy="411480"/>
           </a:xfrm>
           <a:prstGeom prst="rect">
             <a:avLst/>
@@ -10956,8 +11059,8 @@
           </a:bodyPr>
           <a:lstStyle/>
           <a:p>
-            <a:pPr algn="ctr">
-              <a:defRPr sz="2000" b="0">
+            <a:pPr algn="l">
+              <a:defRPr sz="1600" b="0">
                 <a:solidFill>
                   <a:srgbClr val="FFFFFF"/>
                 </a:solidFill>
@@ -10965,7 +11068,7 @@
               </a:defRPr>
             </a:pPr>
             <a:r>
-              <a:t>Repository: G:/My Drive/IITM/AI in Mfg</a:t>
+              <a:t>🤖 One environment (MillingDTEnv-v1): domain randomization, 11-D observation with the context</a:t>
             </a:r>
           </a:p>
         </p:txBody>
@@ -10978,8 +11081,8 @@
         </p:nvSpPr>
         <p:spPr>
           <a:xfrm>
-            <a:off x="914400" y="4389120"/>
-            <a:ext cx="10362895" cy="548640"/>
+            <a:off x="914400" y="2788920"/>
+            <a:ext cx="10362895" cy="411480"/>
           </a:xfrm>
           <a:prstGeom prst="rect">
             <a:avLst/>
@@ -10992,16 +11095,16 @@
           </a:bodyPr>
           <a:lstStyle/>
           <a:p>
-            <a:pPr algn="ctr">
-              <a:defRPr sz="1800" b="0">
-                <a:solidFill>
-                  <a:srgbClr val="B4C8DC"/>
-                </a:solidFill>
-                <a:latin typeface="Calibri"/>
-              </a:defRPr>
-            </a:pPr>
-            <a:r>
-              <a:t>All code, data, results, and documentation in the repository</a:t>
+            <a:pPr algn="l">
+              <a:defRPr sz="1600" b="0">
+                <a:solidFill>
+                  <a:srgbClr val="FFFFFF"/>
+                </a:solidFill>
+                <a:latin typeface="Calibri"/>
+              </a:defRPr>
+            </a:pPr>
+            <a:r>
+              <a:t>📊 One production policy (1M steps): the energy weight is a runtime query, not a retrain</a:t>
             </a:r>
           </a:p>
         </p:txBody>
@@ -11014,8 +11117,8 @@
         </p:nvSpPr>
         <p:spPr>
           <a:xfrm>
-            <a:off x="914400" y="5303520"/>
-            <a:ext cx="10362895" cy="548640"/>
+            <a:off x="914400" y="3200400"/>
+            <a:ext cx="10362895" cy="411480"/>
           </a:xfrm>
           <a:prstGeom prst="rect">
             <a:avLst/>
@@ -11028,8 +11131,267 @@
           </a:bodyPr>
           <a:lstStyle/>
           <a:p>
+            <a:pPr algn="l">
+              <a:defRPr sz="1600" b="0">
+                <a:solidFill>
+                  <a:srgbClr val="FFFFFF"/>
+                </a:solidFill>
+                <a:latin typeface="Calibri"/>
+              </a:defRPr>
+            </a:pPr>
+            <a:r>
+              <a:t>🔬 Monte Carlo (100 scenarios, 95% CIs), ablation frontier, sweep vs 21 per-weight policies</a:t>
+            </a:r>
+          </a:p>
+        </p:txBody>
+      </p:sp>
+      <p:sp>
+        <p:nvSpPr>
+          <p:cNvPr id="8" name="TextBox 7"/>
+          <p:cNvSpPr txBox="1"/>
+          <p:nvPr/>
+        </p:nvSpPr>
+        <p:spPr>
+          <a:xfrm>
+            <a:off x="914400" y="3611880"/>
+            <a:ext cx="10362895" cy="411480"/>
+          </a:xfrm>
+          <a:prstGeom prst="rect">
+            <a:avLst/>
+          </a:prstGeom>
+          <a:noFill/>
+        </p:spPr>
+        <p:txBody>
+          <a:bodyPr wrap="square">
+            <a:spAutoFit/>
+          </a:bodyPr>
+          <a:lstStyle/>
+          <a:p>
+            <a:pPr algn="l">
+              <a:defRPr sz="1600" b="0">
+                <a:solidFill>
+                  <a:srgbClr val="FFFFFF"/>
+                </a:solidFill>
+                <a:latin typeface="Calibri"/>
+              </a:defRPr>
+            </a:pPr>
+            <a:r>
+              <a:t>⚔️ Six baselines on the same 50 episodes, level on the reward, no RL advantage yet</a:t>
+            </a:r>
+          </a:p>
+        </p:txBody>
+      </p:sp>
+      <p:sp>
+        <p:nvSpPr>
+          <p:cNvPr id="9" name="TextBox 8"/>
+          <p:cNvSpPr txBox="1"/>
+          <p:nvPr/>
+        </p:nvSpPr>
+        <p:spPr>
+          <a:xfrm>
+            <a:off x="914400" y="4023360"/>
+            <a:ext cx="10362895" cy="411480"/>
+          </a:xfrm>
+          <a:prstGeom prst="rect">
+            <a:avLst/>
+          </a:prstGeom>
+          <a:noFill/>
+        </p:spPr>
+        <p:txBody>
+          <a:bodyPr wrap="square">
+            <a:spAutoFit/>
+          </a:bodyPr>
+          <a:lstStyle/>
+          <a:p>
+            <a:pPr algn="l">
+              <a:defRPr sz="1600" b="0">
+                <a:solidFill>
+                  <a:srgbClr val="FFFFFF"/>
+                </a:solidFill>
+                <a:latin typeface="Calibri"/>
+              </a:defRPr>
+            </a:pPr>
+            <a:r>
+              <a:t>🧬 Controller init: more uniform (std 3.4 vs 30.0), no tool breakage, no gain on throughput</a:t>
+            </a:r>
+          </a:p>
+        </p:txBody>
+      </p:sp>
+      <p:sp>
+        <p:nvSpPr>
+          <p:cNvPr id="10" name="TextBox 9"/>
+          <p:cNvSpPr txBox="1"/>
+          <p:nvPr/>
+        </p:nvSpPr>
+        <p:spPr>
+          <a:xfrm>
+            <a:off x="914400" y="4434840"/>
+            <a:ext cx="10362895" cy="411480"/>
+          </a:xfrm>
+          <a:prstGeom prst="rect">
+            <a:avLst/>
+          </a:prstGeom>
+          <a:noFill/>
+        </p:spPr>
+        <p:txBody>
+          <a:bodyPr wrap="square">
+            <a:spAutoFit/>
+          </a:bodyPr>
+          <a:lstStyle/>
+          <a:p>
+            <a:pPr algn="l">
+              <a:defRPr sz="1600" b="0">
+                <a:solidFill>
+                  <a:srgbClr val="FFFFFF"/>
+                </a:solidFill>
+                <a:latin typeface="Calibri"/>
+              </a:defRPr>
+            </a:pPr>
+            <a:r>
+              <a:t>🔄 Transfer: the production policy needs no adaptation; the nominal-trained one does</a:t>
+            </a:r>
+          </a:p>
+        </p:txBody>
+      </p:sp>
+      <p:sp>
+        <p:nvSpPr>
+          <p:cNvPr id="11" name="TextBox 10"/>
+          <p:cNvSpPr txBox="1"/>
+          <p:nvPr/>
+        </p:nvSpPr>
+        <p:spPr>
+          <a:xfrm>
+            <a:off x="914400" y="4846320"/>
+            <a:ext cx="10362895" cy="411480"/>
+          </a:xfrm>
+          <a:prstGeom prst="rect">
+            <a:avLst/>
+          </a:prstGeom>
+          <a:noFill/>
+        </p:spPr>
+        <p:txBody>
+          <a:bodyPr wrap="square">
+            <a:spAutoFit/>
+          </a:bodyPr>
+          <a:lstStyle/>
+          <a:p>
+            <a:pPr algn="l">
+              <a:defRPr sz="1600" b="0">
+                <a:solidFill>
+                  <a:srgbClr val="FFFFFF"/>
+                </a:solidFill>
+                <a:latin typeface="Calibri"/>
+              </a:defRPr>
+            </a:pPr>
+            <a:r>
+              <a:t>🖥️ Interactive workstation: 2D stock depletion, micro-topography, G-code, controllers</a:t>
+            </a:r>
+          </a:p>
+        </p:txBody>
+      </p:sp>
+      <p:sp>
+        <p:nvSpPr>
+          <p:cNvPr id="12" name="TextBox 11"/>
+          <p:cNvSpPr txBox="1"/>
+          <p:nvPr/>
+        </p:nvSpPr>
+        <p:spPr>
+          <a:xfrm>
+            <a:off x="914400" y="5257800"/>
+            <a:ext cx="10362895" cy="411480"/>
+          </a:xfrm>
+          <a:prstGeom prst="rect">
+            <a:avLst/>
+          </a:prstGeom>
+          <a:noFill/>
+        </p:spPr>
+        <p:txBody>
+          <a:bodyPr wrap="square">
+            <a:spAutoFit/>
+          </a:bodyPr>
+          <a:lstStyle/>
+          <a:p>
+            <a:pPr algn="l">
+              <a:defRPr sz="1600" b="0">
+                <a:solidFill>
+                  <a:srgbClr val="FFFFFF"/>
+                </a:solidFill>
+                <a:latin typeface="Calibri"/>
+              </a:defRPr>
+            </a:pPr>
+            <a:r>
+              <a:t>🔁 Full reproducibility: every result table from committed artifacts by one script</a:t>
+            </a:r>
+          </a:p>
+        </p:txBody>
+      </p:sp>
+      <p:sp>
+        <p:nvSpPr>
+          <p:cNvPr id="13" name="Rectangle 12"/>
+          <p:cNvSpPr/>
+          <p:nvPr/>
+        </p:nvSpPr>
+        <p:spPr>
+          <a:xfrm>
+            <a:off x="914400" y="5669280"/>
+            <a:ext cx="10362895" cy="50800"/>
+          </a:xfrm>
+          <a:prstGeom prst="rect">
+            <a:avLst/>
+          </a:prstGeom>
+          <a:solidFill>
+            <a:srgbClr val="CC9900"/>
+          </a:solidFill>
+          <a:ln>
+            <a:noFill/>
+          </a:ln>
+        </p:spPr>
+        <p:style>
+          <a:lnRef idx="1">
+            <a:schemeClr val="accent1"/>
+          </a:lnRef>
+          <a:fillRef idx="3">
+            <a:schemeClr val="accent1"/>
+          </a:fillRef>
+          <a:effectRef idx="2">
+            <a:schemeClr val="accent1"/>
+          </a:effectRef>
+          <a:fontRef idx="minor">
+            <a:schemeClr val="lt1"/>
+          </a:fontRef>
+        </p:style>
+        <p:txBody>
+          <a:bodyPr rtlCol="0" anchor="ctr"/>
+          <a:lstStyle/>
+          <a:p>
+            <a:pPr algn="ctr"/>
+          </a:p>
+        </p:txBody>
+      </p:sp>
+      <p:sp>
+        <p:nvSpPr>
+          <p:cNvPr id="14" name="TextBox 13"/>
+          <p:cNvSpPr txBox="1"/>
+          <p:nvPr/>
+        </p:nvSpPr>
+        <p:spPr>
+          <a:xfrm>
+            <a:off x="914400" y="5779008"/>
+            <a:ext cx="10362895" cy="822960"/>
+          </a:xfrm>
+          <a:prstGeom prst="rect">
+            <a:avLst/>
+          </a:prstGeom>
+          <a:noFill/>
+        </p:spPr>
+        <p:txBody>
+          <a:bodyPr wrap="square">
+            <a:spAutoFit/>
+          </a:bodyPr>
+          <a:lstStyle/>
+          <a:p>
             <a:pPr algn="ctr">
-              <a:defRPr sz="1800" b="0">
+              <a:defRPr sz="1500" b="1">
                 <a:solidFill>
                   <a:srgbClr val="CC9900"/>
                 </a:solidFill>
@@ -11037,7 +11399,1607 @@
               </a:defRPr>
             </a:pPr>
             <a:r>
-              <a:t>ME6324 — AI in Manufacturing  •  IIT Madras</a:t>
+              <a:t>Key Scientific Finding: The speed-dependent specific cutting energy creates a genuine energy/throughput trade-off. Across the measured frontier the removal rate falls 8.4% while the energy of the part falls 9.5%. One conditioned policy reaches that whole frontier at runtime, beats the 21 policies trained per weight, and transfers to a harder material with no adaptation.</a:t>
+            </a:r>
+          </a:p>
+        </p:txBody>
+      </p:sp>
+    </p:spTree>
+  </p:cSld>
+  <p:clrMapOvr>
+    <a:masterClrMapping/>
+  </p:clrMapOvr>
+</p:sld>
+</file>
+
+<file path=ppt/slides/slide19.xml><?xml version="1.0" encoding="utf-8"?>
+<p:sld xmlns:a="http://schemas.openxmlformats.org/drawingml/2006/main" xmlns:p="http://schemas.openxmlformats.org/presentationml/2006/main" xmlns:r="http://schemas.openxmlformats.org/officeDocument/2006/relationships">
+  <p:cSld>
+    <p:bg>
+      <p:bgPr>
+        <a:solidFill>
+          <a:srgbClr val="FFFFFF"/>
+        </a:solidFill>
+        <a:effectLst/>
+      </p:bgPr>
+    </p:bg>
+    <p:spTree>
+      <p:nvGrpSpPr>
+        <p:cNvPr id="1" name=""/>
+        <p:cNvGrpSpPr/>
+        <p:nvPr/>
+      </p:nvGrpSpPr>
+      <p:grpSpPr/>
+      <p:sp>
+        <p:nvSpPr>
+          <p:cNvPr id="2" name="Rectangle 1"/>
+          <p:cNvSpPr/>
+          <p:nvPr/>
+        </p:nvSpPr>
+        <p:spPr>
+          <a:xfrm>
+            <a:off x="0" y="0"/>
+            <a:ext cx="12191695" cy="1005840"/>
+          </a:xfrm>
+          <a:prstGeom prst="rect">
+            <a:avLst/>
+          </a:prstGeom>
+          <a:solidFill>
+            <a:srgbClr val="003366"/>
+          </a:solidFill>
+          <a:ln>
+            <a:noFill/>
+          </a:ln>
+        </p:spPr>
+        <p:style>
+          <a:lnRef idx="1">
+            <a:schemeClr val="accent1"/>
+          </a:lnRef>
+          <a:fillRef idx="3">
+            <a:schemeClr val="accent1"/>
+          </a:fillRef>
+          <a:effectRef idx="2">
+            <a:schemeClr val="accent1"/>
+          </a:effectRef>
+          <a:fontRef idx="minor">
+            <a:schemeClr val="lt1"/>
+          </a:fontRef>
+        </p:style>
+        <p:txBody>
+          <a:bodyPr rtlCol="0" anchor="ctr"/>
+          <a:lstStyle/>
+          <a:p>
+            <a:pPr algn="ctr"/>
+          </a:p>
+        </p:txBody>
+      </p:sp>
+      <p:sp>
+        <p:nvSpPr>
+          <p:cNvPr id="3" name="TextBox 2"/>
+          <p:cNvSpPr txBox="1"/>
+          <p:nvPr/>
+        </p:nvSpPr>
+        <p:spPr>
+          <a:xfrm>
+            <a:off x="457200" y="182880"/>
+            <a:ext cx="10972800" cy="640080"/>
+          </a:xfrm>
+          <a:prstGeom prst="rect">
+            <a:avLst/>
+          </a:prstGeom>
+          <a:noFill/>
+        </p:spPr>
+        <p:txBody>
+          <a:bodyPr wrap="square">
+            <a:spAutoFit/>
+          </a:bodyPr>
+          <a:lstStyle/>
+          <a:p>
+            <a:pPr algn="l">
+              <a:defRPr sz="3000" b="1">
+                <a:solidFill>
+                  <a:srgbClr val="FFFFFF"/>
+                </a:solidFill>
+                <a:latin typeface="Calibri"/>
+              </a:defRPr>
+            </a:pPr>
+            <a:r>
+              <a:t>Reproducibility: All Commands Run from Project Root</a:t>
+            </a:r>
+          </a:p>
+        </p:txBody>
+      </p:sp>
+      <p:sp>
+        <p:nvSpPr>
+          <p:cNvPr id="4" name="Rectangle 3"/>
+          <p:cNvSpPr/>
+          <p:nvPr/>
+        </p:nvSpPr>
+        <p:spPr>
+          <a:xfrm>
+            <a:off x="457200" y="1234440"/>
+            <a:ext cx="11247120" cy="384048"/>
+          </a:xfrm>
+          <a:prstGeom prst="rect">
+            <a:avLst/>
+          </a:prstGeom>
+          <a:solidFill>
+            <a:srgbClr val="F0F0F0"/>
+          </a:solidFill>
+          <a:ln>
+            <a:noFill/>
+          </a:ln>
+        </p:spPr>
+        <p:style>
+          <a:lnRef idx="1">
+            <a:schemeClr val="accent1"/>
+          </a:lnRef>
+          <a:fillRef idx="3">
+            <a:schemeClr val="accent1"/>
+          </a:fillRef>
+          <a:effectRef idx="2">
+            <a:schemeClr val="accent1"/>
+          </a:effectRef>
+          <a:fontRef idx="minor">
+            <a:schemeClr val="lt1"/>
+          </a:fontRef>
+        </p:style>
+        <p:txBody>
+          <a:bodyPr rtlCol="0" anchor="ctr"/>
+          <a:lstStyle/>
+          <a:p>
+            <a:pPr algn="ctr"/>
+          </a:p>
+        </p:txBody>
+      </p:sp>
+      <p:sp>
+        <p:nvSpPr>
+          <p:cNvPr id="5" name="TextBox 4"/>
+          <p:cNvSpPr txBox="1"/>
+          <p:nvPr/>
+        </p:nvSpPr>
+        <p:spPr>
+          <a:xfrm>
+            <a:off x="640080" y="1252728"/>
+            <a:ext cx="2743200" cy="365760"/>
+          </a:xfrm>
+          <a:prstGeom prst="rect">
+            <a:avLst/>
+          </a:prstGeom>
+          <a:noFill/>
+        </p:spPr>
+        <p:txBody>
+          <a:bodyPr wrap="square">
+            <a:spAutoFit/>
+          </a:bodyPr>
+          <a:lstStyle/>
+          <a:p>
+            <a:pPr algn="l">
+              <a:defRPr sz="1500" b="1">
+                <a:solidFill>
+                  <a:srgbClr val="003366"/>
+                </a:solidFill>
+                <a:latin typeface="Calibri"/>
+              </a:defRPr>
+            </a:pPr>
+            <a:r>
+              <a:t>Tests</a:t>
+            </a:r>
+          </a:p>
+        </p:txBody>
+      </p:sp>
+      <p:sp>
+        <p:nvSpPr>
+          <p:cNvPr id="6" name="TextBox 5"/>
+          <p:cNvSpPr txBox="1"/>
+          <p:nvPr/>
+        </p:nvSpPr>
+        <p:spPr>
+          <a:xfrm>
+            <a:off x="3474720" y="1252728"/>
+            <a:ext cx="8138160" cy="365760"/>
+          </a:xfrm>
+          <a:prstGeom prst="rect">
+            <a:avLst/>
+          </a:prstGeom>
+          <a:noFill/>
+        </p:spPr>
+        <p:txBody>
+          <a:bodyPr wrap="square">
+            <a:spAutoFit/>
+          </a:bodyPr>
+          <a:lstStyle/>
+          <a:p>
+            <a:pPr algn="l">
+              <a:defRPr sz="1300" b="0">
+                <a:solidFill>
+                  <a:srgbClr val="333333"/>
+                </a:solidFill>
+                <a:latin typeface="Consolas"/>
+              </a:defRPr>
+            </a:pPr>
+            <a:r>
+              <a:t>pytest tests/ -v</a:t>
+            </a:r>
+          </a:p>
+        </p:txBody>
+      </p:sp>
+      <p:sp>
+        <p:nvSpPr>
+          <p:cNvPr id="7" name="Rectangle 6"/>
+          <p:cNvSpPr/>
+          <p:nvPr/>
+        </p:nvSpPr>
+        <p:spPr>
+          <a:xfrm>
+            <a:off x="457200" y="1645920"/>
+            <a:ext cx="11247120" cy="384048"/>
+          </a:xfrm>
+          <a:prstGeom prst="rect">
+            <a:avLst/>
+          </a:prstGeom>
+          <a:solidFill>
+            <a:srgbClr val="FFFFFF"/>
+          </a:solidFill>
+          <a:ln>
+            <a:noFill/>
+          </a:ln>
+        </p:spPr>
+        <p:style>
+          <a:lnRef idx="1">
+            <a:schemeClr val="accent1"/>
+          </a:lnRef>
+          <a:fillRef idx="3">
+            <a:schemeClr val="accent1"/>
+          </a:fillRef>
+          <a:effectRef idx="2">
+            <a:schemeClr val="accent1"/>
+          </a:effectRef>
+          <a:fontRef idx="minor">
+            <a:schemeClr val="lt1"/>
+          </a:fontRef>
+        </p:style>
+        <p:txBody>
+          <a:bodyPr rtlCol="0" anchor="ctr"/>
+          <a:lstStyle/>
+          <a:p>
+            <a:pPr algn="ctr"/>
+          </a:p>
+        </p:txBody>
+      </p:sp>
+      <p:sp>
+        <p:nvSpPr>
+          <p:cNvPr id="8" name="TextBox 7"/>
+          <p:cNvSpPr txBox="1"/>
+          <p:nvPr/>
+        </p:nvSpPr>
+        <p:spPr>
+          <a:xfrm>
+            <a:off x="640080" y="1664208"/>
+            <a:ext cx="2743200" cy="365760"/>
+          </a:xfrm>
+          <a:prstGeom prst="rect">
+            <a:avLst/>
+          </a:prstGeom>
+          <a:noFill/>
+        </p:spPr>
+        <p:txBody>
+          <a:bodyPr wrap="square">
+            <a:spAutoFit/>
+          </a:bodyPr>
+          <a:lstStyle/>
+          <a:p>
+            <a:pPr algn="l">
+              <a:defRPr sz="1500" b="1">
+                <a:solidFill>
+                  <a:srgbClr val="003366"/>
+                </a:solidFill>
+                <a:latin typeface="Calibri"/>
+              </a:defRPr>
+            </a:pPr>
+            <a:r>
+              <a:t>Production policy</a:t>
+            </a:r>
+          </a:p>
+        </p:txBody>
+      </p:sp>
+      <p:sp>
+        <p:nvSpPr>
+          <p:cNvPr id="9" name="TextBox 8"/>
+          <p:cNvSpPr txBox="1"/>
+          <p:nvPr/>
+        </p:nvSpPr>
+        <p:spPr>
+          <a:xfrm>
+            <a:off x="3474720" y="1664208"/>
+            <a:ext cx="8138160" cy="365760"/>
+          </a:xfrm>
+          <a:prstGeom prst="rect">
+            <a:avLst/>
+          </a:prstGeom>
+          <a:noFill/>
+        </p:spPr>
+        <p:txBody>
+          <a:bodyPr wrap="square">
+            <a:spAutoFit/>
+          </a:bodyPr>
+          <a:lstStyle/>
+          <a:p>
+            <a:pPr algn="l">
+              <a:defRPr sz="1300" b="0">
+                <a:solidFill>
+                  <a:srgbClr val="333333"/>
+                </a:solidFill>
+                <a:latin typeface="Consolas"/>
+              </a:defRPr>
+            </a:pPr>
+            <a:r>
+              <a:t>python -m experiments.train_rl --steps 1000000 --seed 42 --randomize --randomize-weight</a:t>
+            </a:r>
+          </a:p>
+        </p:txBody>
+      </p:sp>
+      <p:sp>
+        <p:nvSpPr>
+          <p:cNvPr id="10" name="Rectangle 9"/>
+          <p:cNvSpPr/>
+          <p:nvPr/>
+        </p:nvSpPr>
+        <p:spPr>
+          <a:xfrm>
+            <a:off x="457200" y="2057400"/>
+            <a:ext cx="11247120" cy="384048"/>
+          </a:xfrm>
+          <a:prstGeom prst="rect">
+            <a:avLst/>
+          </a:prstGeom>
+          <a:solidFill>
+            <a:srgbClr val="F0F0F0"/>
+          </a:solidFill>
+          <a:ln>
+            <a:noFill/>
+          </a:ln>
+        </p:spPr>
+        <p:style>
+          <a:lnRef idx="1">
+            <a:schemeClr val="accent1"/>
+          </a:lnRef>
+          <a:fillRef idx="3">
+            <a:schemeClr val="accent1"/>
+          </a:fillRef>
+          <a:effectRef idx="2">
+            <a:schemeClr val="accent1"/>
+          </a:effectRef>
+          <a:fontRef idx="minor">
+            <a:schemeClr val="lt1"/>
+          </a:fontRef>
+        </p:style>
+        <p:txBody>
+          <a:bodyPr rtlCol="0" anchor="ctr"/>
+          <a:lstStyle/>
+          <a:p>
+            <a:pPr algn="ctr"/>
+          </a:p>
+        </p:txBody>
+      </p:sp>
+      <p:sp>
+        <p:nvSpPr>
+          <p:cNvPr id="11" name="TextBox 10"/>
+          <p:cNvSpPr txBox="1"/>
+          <p:nvPr/>
+        </p:nvSpPr>
+        <p:spPr>
+          <a:xfrm>
+            <a:off x="640080" y="2075688"/>
+            <a:ext cx="2743200" cy="365760"/>
+          </a:xfrm>
+          <a:prstGeom prst="rect">
+            <a:avLst/>
+          </a:prstGeom>
+          <a:noFill/>
+        </p:spPr>
+        <p:txBody>
+          <a:bodyPr wrap="square">
+            <a:spAutoFit/>
+          </a:bodyPr>
+          <a:lstStyle/>
+          <a:p>
+            <a:pPr algn="l">
+              <a:defRPr sz="1500" b="1">
+                <a:solidFill>
+                  <a:srgbClr val="003366"/>
+                </a:solidFill>
+                <a:latin typeface="Calibri"/>
+              </a:defRPr>
+            </a:pPr>
+            <a:r>
+              <a:t>One pinned weight</a:t>
+            </a:r>
+          </a:p>
+        </p:txBody>
+      </p:sp>
+      <p:sp>
+        <p:nvSpPr>
+          <p:cNvPr id="12" name="TextBox 11"/>
+          <p:cNvSpPr txBox="1"/>
+          <p:nvPr/>
+        </p:nvSpPr>
+        <p:spPr>
+          <a:xfrm>
+            <a:off x="3474720" y="2075688"/>
+            <a:ext cx="8138160" cy="365760"/>
+          </a:xfrm>
+          <a:prstGeom prst="rect">
+            <a:avLst/>
+          </a:prstGeom>
+          <a:noFill/>
+        </p:spPr>
+        <p:txBody>
+          <a:bodyPr wrap="square">
+            <a:spAutoFit/>
+          </a:bodyPr>
+          <a:lstStyle/>
+          <a:p>
+            <a:pPr algn="l">
+              <a:defRPr sz="1300" b="0">
+                <a:solidFill>
+                  <a:srgbClr val="333333"/>
+                </a:solidFill>
+                <a:latin typeface="Consolas"/>
+              </a:defRPr>
+            </a:pPr>
+            <a:r>
+              <a:t>python -m experiments.train_rl --steps 150000 --seed 42 --randomize --w2 0.6</a:t>
+            </a:r>
+          </a:p>
+        </p:txBody>
+      </p:sp>
+      <p:sp>
+        <p:nvSpPr>
+          <p:cNvPr id="13" name="Rectangle 12"/>
+          <p:cNvSpPr/>
+          <p:nvPr/>
+        </p:nvSpPr>
+        <p:spPr>
+          <a:xfrm>
+            <a:off x="457200" y="2468880"/>
+            <a:ext cx="11247120" cy="384048"/>
+          </a:xfrm>
+          <a:prstGeom prst="rect">
+            <a:avLst/>
+          </a:prstGeom>
+          <a:solidFill>
+            <a:srgbClr val="FFFFFF"/>
+          </a:solidFill>
+          <a:ln>
+            <a:noFill/>
+          </a:ln>
+        </p:spPr>
+        <p:style>
+          <a:lnRef idx="1">
+            <a:schemeClr val="accent1"/>
+          </a:lnRef>
+          <a:fillRef idx="3">
+            <a:schemeClr val="accent1"/>
+          </a:fillRef>
+          <a:effectRef idx="2">
+            <a:schemeClr val="accent1"/>
+          </a:effectRef>
+          <a:fontRef idx="minor">
+            <a:schemeClr val="lt1"/>
+          </a:fontRef>
+        </p:style>
+        <p:txBody>
+          <a:bodyPr rtlCol="0" anchor="ctr"/>
+          <a:lstStyle/>
+          <a:p>
+            <a:pPr algn="ctr"/>
+          </a:p>
+        </p:txBody>
+      </p:sp>
+      <p:sp>
+        <p:nvSpPr>
+          <p:cNvPr id="14" name="TextBox 13"/>
+          <p:cNvSpPr txBox="1"/>
+          <p:nvPr/>
+        </p:nvSpPr>
+        <p:spPr>
+          <a:xfrm>
+            <a:off x="640080" y="2487168"/>
+            <a:ext cx="2743200" cy="365760"/>
+          </a:xfrm>
+          <a:prstGeom prst="rect">
+            <a:avLst/>
+          </a:prstGeom>
+          <a:noFill/>
+        </p:spPr>
+        <p:txBody>
+          <a:bodyPr wrap="square">
+            <a:spAutoFit/>
+          </a:bodyPr>
+          <a:lstStyle/>
+          <a:p>
+            <a:pPr algn="l">
+              <a:defRPr sz="1500" b="1">
+                <a:solidFill>
+                  <a:srgbClr val="003366"/>
+                </a:solidFill>
+                <a:latin typeface="Calibri"/>
+              </a:defRPr>
+            </a:pPr>
+            <a:r>
+              <a:t>Ablation grid</a:t>
+            </a:r>
+          </a:p>
+        </p:txBody>
+      </p:sp>
+      <p:sp>
+        <p:nvSpPr>
+          <p:cNvPr id="15" name="TextBox 14"/>
+          <p:cNvSpPr txBox="1"/>
+          <p:nvPr/>
+        </p:nvSpPr>
+        <p:spPr>
+          <a:xfrm>
+            <a:off x="3474720" y="2487168"/>
+            <a:ext cx="8138160" cy="365760"/>
+          </a:xfrm>
+          <a:prstGeom prst="rect">
+            <a:avLst/>
+          </a:prstGeom>
+          <a:noFill/>
+        </p:spPr>
+        <p:txBody>
+          <a:bodyPr wrap="square">
+            <a:spAutoFit/>
+          </a:bodyPr>
+          <a:lstStyle/>
+          <a:p>
+            <a:pPr algn="l">
+              <a:defRPr sz="1300" b="0">
+                <a:solidFill>
+                  <a:srgbClr val="333333"/>
+                </a:solidFill>
+                <a:latin typeface="Consolas"/>
+              </a:defRPr>
+            </a:pPr>
+            <a:r>
+              <a:t>python -m experiments.train_rl_ablation --steps 150000 --scenarios 50 --slots 7</a:t>
+            </a:r>
+          </a:p>
+        </p:txBody>
+      </p:sp>
+      <p:sp>
+        <p:nvSpPr>
+          <p:cNvPr id="16" name="Rectangle 15"/>
+          <p:cNvSpPr/>
+          <p:nvPr/>
+        </p:nvSpPr>
+        <p:spPr>
+          <a:xfrm>
+            <a:off x="457200" y="2880360"/>
+            <a:ext cx="11247120" cy="384048"/>
+          </a:xfrm>
+          <a:prstGeom prst="rect">
+            <a:avLst/>
+          </a:prstGeom>
+          <a:solidFill>
+            <a:srgbClr val="F0F0F0"/>
+          </a:solidFill>
+          <a:ln>
+            <a:noFill/>
+          </a:ln>
+        </p:spPr>
+        <p:style>
+          <a:lnRef idx="1">
+            <a:schemeClr val="accent1"/>
+          </a:lnRef>
+          <a:fillRef idx="3">
+            <a:schemeClr val="accent1"/>
+          </a:fillRef>
+          <a:effectRef idx="2">
+            <a:schemeClr val="accent1"/>
+          </a:effectRef>
+          <a:fontRef idx="minor">
+            <a:schemeClr val="lt1"/>
+          </a:fontRef>
+        </p:style>
+        <p:txBody>
+          <a:bodyPr rtlCol="0" anchor="ctr"/>
+          <a:lstStyle/>
+          <a:p>
+            <a:pPr algn="ctr"/>
+          </a:p>
+        </p:txBody>
+      </p:sp>
+      <p:sp>
+        <p:nvSpPr>
+          <p:cNvPr id="17" name="TextBox 16"/>
+          <p:cNvSpPr txBox="1"/>
+          <p:nvPr/>
+        </p:nvSpPr>
+        <p:spPr>
+          <a:xfrm>
+            <a:off x="640080" y="2898648"/>
+            <a:ext cx="2743200" cy="365760"/>
+          </a:xfrm>
+          <a:prstGeom prst="rect">
+            <a:avLst/>
+          </a:prstGeom>
+          <a:noFill/>
+        </p:spPr>
+        <p:txBody>
+          <a:bodyPr wrap="square">
+            <a:spAutoFit/>
+          </a:bodyPr>
+          <a:lstStyle/>
+          <a:p>
+            <a:pPr algn="l">
+              <a:defRPr sz="1500" b="1">
+                <a:solidFill>
+                  <a:srgbClr val="003366"/>
+                </a:solidFill>
+                <a:latin typeface="Calibri"/>
+              </a:defRPr>
+            </a:pPr>
+            <a:r>
+              <a:t>Monte Carlo eval</a:t>
+            </a:r>
+          </a:p>
+        </p:txBody>
+      </p:sp>
+      <p:sp>
+        <p:nvSpPr>
+          <p:cNvPr id="18" name="TextBox 17"/>
+          <p:cNvSpPr txBox="1"/>
+          <p:nvPr/>
+        </p:nvSpPr>
+        <p:spPr>
+          <a:xfrm>
+            <a:off x="3474720" y="2898648"/>
+            <a:ext cx="8138160" cy="365760"/>
+          </a:xfrm>
+          <a:prstGeom prst="rect">
+            <a:avLst/>
+          </a:prstGeom>
+          <a:noFill/>
+        </p:spPr>
+        <p:txBody>
+          <a:bodyPr wrap="square">
+            <a:spAutoFit/>
+          </a:bodyPr>
+          <a:lstStyle/>
+          <a:p>
+            <a:pPr algn="l">
+              <a:defRPr sz="1300" b="0">
+                <a:solidFill>
+                  <a:srgbClr val="333333"/>
+                </a:solidFill>
+                <a:latin typeface="Consolas"/>
+              </a:defRPr>
+            </a:pPr>
+            <a:r>
+              <a:t>python -m experiments.evaluate --scenarios 100</a:t>
+            </a:r>
+          </a:p>
+        </p:txBody>
+      </p:sp>
+      <p:sp>
+        <p:nvSpPr>
+          <p:cNvPr id="19" name="Rectangle 18"/>
+          <p:cNvSpPr/>
+          <p:nvPr/>
+        </p:nvSpPr>
+        <p:spPr>
+          <a:xfrm>
+            <a:off x="457200" y="3291840"/>
+            <a:ext cx="11247120" cy="384048"/>
+          </a:xfrm>
+          <a:prstGeom prst="rect">
+            <a:avLst/>
+          </a:prstGeom>
+          <a:solidFill>
+            <a:srgbClr val="FFFFFF"/>
+          </a:solidFill>
+          <a:ln>
+            <a:noFill/>
+          </a:ln>
+        </p:spPr>
+        <p:style>
+          <a:lnRef idx="1">
+            <a:schemeClr val="accent1"/>
+          </a:lnRef>
+          <a:fillRef idx="3">
+            <a:schemeClr val="accent1"/>
+          </a:fillRef>
+          <a:effectRef idx="2">
+            <a:schemeClr val="accent1"/>
+          </a:effectRef>
+          <a:fontRef idx="minor">
+            <a:schemeClr val="lt1"/>
+          </a:fontRef>
+        </p:style>
+        <p:txBody>
+          <a:bodyPr rtlCol="0" anchor="ctr"/>
+          <a:lstStyle/>
+          <a:p>
+            <a:pPr algn="ctr"/>
+          </a:p>
+        </p:txBody>
+      </p:sp>
+      <p:sp>
+        <p:nvSpPr>
+          <p:cNvPr id="20" name="TextBox 19"/>
+          <p:cNvSpPr txBox="1"/>
+          <p:nvPr/>
+        </p:nvSpPr>
+        <p:spPr>
+          <a:xfrm>
+            <a:off x="640080" y="3310128"/>
+            <a:ext cx="2743200" cy="365760"/>
+          </a:xfrm>
+          <a:prstGeom prst="rect">
+            <a:avLst/>
+          </a:prstGeom>
+          <a:noFill/>
+        </p:spPr>
+        <p:txBody>
+          <a:bodyPr wrap="square">
+            <a:spAutoFit/>
+          </a:bodyPr>
+          <a:lstStyle/>
+          <a:p>
+            <a:pPr algn="l">
+              <a:defRPr sz="1500" b="1">
+                <a:solidFill>
+                  <a:srgbClr val="003366"/>
+                </a:solidFill>
+                <a:latin typeface="Calibri"/>
+              </a:defRPr>
+            </a:pPr>
+            <a:r>
+              <a:t>Weight sweep</a:t>
+            </a:r>
+          </a:p>
+        </p:txBody>
+      </p:sp>
+      <p:sp>
+        <p:nvSpPr>
+          <p:cNvPr id="21" name="TextBox 20"/>
+          <p:cNvSpPr txBox="1"/>
+          <p:nvPr/>
+        </p:nvSpPr>
+        <p:spPr>
+          <a:xfrm>
+            <a:off x="3474720" y="3310128"/>
+            <a:ext cx="8138160" cy="365760"/>
+          </a:xfrm>
+          <a:prstGeom prst="rect">
+            <a:avLst/>
+          </a:prstGeom>
+          <a:noFill/>
+        </p:spPr>
+        <p:txBody>
+          <a:bodyPr wrap="square">
+            <a:spAutoFit/>
+          </a:bodyPr>
+          <a:lstStyle/>
+          <a:p>
+            <a:pPr algn="l">
+              <a:defRPr sz="1300" b="0">
+                <a:solidFill>
+                  <a:srgbClr val="333333"/>
+                </a:solidFill>
+                <a:latin typeface="Consolas"/>
+              </a:defRPr>
+            </a:pPr>
+            <a:r>
+              <a:t>python -m experiments.evaluate --sweep-weight --scenarios 100</a:t>
+            </a:r>
+          </a:p>
+        </p:txBody>
+      </p:sp>
+      <p:sp>
+        <p:nvSpPr>
+          <p:cNvPr id="22" name="Rectangle 21"/>
+          <p:cNvSpPr/>
+          <p:nvPr/>
+        </p:nvSpPr>
+        <p:spPr>
+          <a:xfrm>
+            <a:off x="457200" y="3703320"/>
+            <a:ext cx="11247120" cy="384048"/>
+          </a:xfrm>
+          <a:prstGeom prst="rect">
+            <a:avLst/>
+          </a:prstGeom>
+          <a:solidFill>
+            <a:srgbClr val="F0F0F0"/>
+          </a:solidFill>
+          <a:ln>
+            <a:noFill/>
+          </a:ln>
+        </p:spPr>
+        <p:style>
+          <a:lnRef idx="1">
+            <a:schemeClr val="accent1"/>
+          </a:lnRef>
+          <a:fillRef idx="3">
+            <a:schemeClr val="accent1"/>
+          </a:fillRef>
+          <a:effectRef idx="2">
+            <a:schemeClr val="accent1"/>
+          </a:effectRef>
+          <a:fontRef idx="minor">
+            <a:schemeClr val="lt1"/>
+          </a:fontRef>
+        </p:style>
+        <p:txBody>
+          <a:bodyPr rtlCol="0" anchor="ctr"/>
+          <a:lstStyle/>
+          <a:p>
+            <a:pPr algn="ctr"/>
+          </a:p>
+        </p:txBody>
+      </p:sp>
+      <p:sp>
+        <p:nvSpPr>
+          <p:cNvPr id="23" name="TextBox 22"/>
+          <p:cNvSpPr txBox="1"/>
+          <p:nvPr/>
+        </p:nvSpPr>
+        <p:spPr>
+          <a:xfrm>
+            <a:off x="640080" y="3721608"/>
+            <a:ext cx="2743200" cy="365760"/>
+          </a:xfrm>
+          <a:prstGeom prst="rect">
+            <a:avLst/>
+          </a:prstGeom>
+          <a:noFill/>
+        </p:spPr>
+        <p:txBody>
+          <a:bodyPr wrap="square">
+            <a:spAutoFit/>
+          </a:bodyPr>
+          <a:lstStyle/>
+          <a:p>
+            <a:pPr algn="l">
+              <a:defRPr sz="1500" b="1">
+                <a:solidFill>
+                  <a:srgbClr val="003366"/>
+                </a:solidFill>
+                <a:latin typeface="Calibri"/>
+              </a:defRPr>
+            </a:pPr>
+            <a:r>
+              <a:t>Compare with per-weight policies</a:t>
+            </a:r>
+          </a:p>
+        </p:txBody>
+      </p:sp>
+      <p:sp>
+        <p:nvSpPr>
+          <p:cNvPr id="24" name="TextBox 23"/>
+          <p:cNvSpPr txBox="1"/>
+          <p:nvPr/>
+        </p:nvSpPr>
+        <p:spPr>
+          <a:xfrm>
+            <a:off x="3474720" y="3721608"/>
+            <a:ext cx="8138160" cy="365760"/>
+          </a:xfrm>
+          <a:prstGeom prst="rect">
+            <a:avLst/>
+          </a:prstGeom>
+          <a:noFill/>
+        </p:spPr>
+        <p:txBody>
+          <a:bodyPr wrap="square">
+            <a:spAutoFit/>
+          </a:bodyPr>
+          <a:lstStyle/>
+          <a:p>
+            <a:pPr algn="l">
+              <a:defRPr sz="1300" b="0">
+                <a:solidFill>
+                  <a:srgbClr val="333333"/>
+                </a:solidFill>
+                <a:latin typeface="Consolas"/>
+              </a:defRPr>
+            </a:pPr>
+            <a:r>
+              <a:t>python -m experiments.evaluate --compare-only</a:t>
+            </a:r>
+          </a:p>
+        </p:txBody>
+      </p:sp>
+      <p:sp>
+        <p:nvSpPr>
+          <p:cNvPr id="25" name="Rectangle 24"/>
+          <p:cNvSpPr/>
+          <p:nvPr/>
+        </p:nvSpPr>
+        <p:spPr>
+          <a:xfrm>
+            <a:off x="457200" y="4114800"/>
+            <a:ext cx="11247120" cy="384048"/>
+          </a:xfrm>
+          <a:prstGeom prst="rect">
+            <a:avLst/>
+          </a:prstGeom>
+          <a:solidFill>
+            <a:srgbClr val="FFFFFF"/>
+          </a:solidFill>
+          <a:ln>
+            <a:noFill/>
+          </a:ln>
+        </p:spPr>
+        <p:style>
+          <a:lnRef idx="1">
+            <a:schemeClr val="accent1"/>
+          </a:lnRef>
+          <a:fillRef idx="3">
+            <a:schemeClr val="accent1"/>
+          </a:fillRef>
+          <a:effectRef idx="2">
+            <a:schemeClr val="accent1"/>
+          </a:effectRef>
+          <a:fontRef idx="minor">
+            <a:schemeClr val="lt1"/>
+          </a:fontRef>
+        </p:style>
+        <p:txBody>
+          <a:bodyPr rtlCol="0" anchor="ctr"/>
+          <a:lstStyle/>
+          <a:p>
+            <a:pPr algn="ctr"/>
+          </a:p>
+        </p:txBody>
+      </p:sp>
+      <p:sp>
+        <p:nvSpPr>
+          <p:cNvPr id="26" name="TextBox 25"/>
+          <p:cNvSpPr txBox="1"/>
+          <p:nvPr/>
+        </p:nvSpPr>
+        <p:spPr>
+          <a:xfrm>
+            <a:off x="640080" y="4133088"/>
+            <a:ext cx="2743200" cy="365760"/>
+          </a:xfrm>
+          <a:prstGeom prst="rect">
+            <a:avLst/>
+          </a:prstGeom>
+          <a:noFill/>
+        </p:spPr>
+        <p:txBody>
+          <a:bodyPr wrap="square">
+            <a:spAutoFit/>
+          </a:bodyPr>
+          <a:lstStyle/>
+          <a:p>
+            <a:pPr algn="l">
+              <a:defRPr sz="1500" b="1">
+                <a:solidFill>
+                  <a:srgbClr val="003366"/>
+                </a:solidFill>
+                <a:latin typeface="Calibri"/>
+              </a:defRPr>
+            </a:pPr>
+            <a:r>
+              <a:t>Classical baselines</a:t>
+            </a:r>
+          </a:p>
+        </p:txBody>
+      </p:sp>
+      <p:sp>
+        <p:nvSpPr>
+          <p:cNvPr id="27" name="TextBox 26"/>
+          <p:cNvSpPr txBox="1"/>
+          <p:nvPr/>
+        </p:nvSpPr>
+        <p:spPr>
+          <a:xfrm>
+            <a:off x="3474720" y="4133088"/>
+            <a:ext cx="8138160" cy="365760"/>
+          </a:xfrm>
+          <a:prstGeom prst="rect">
+            <a:avLst/>
+          </a:prstGeom>
+          <a:noFill/>
+        </p:spPr>
+        <p:txBody>
+          <a:bodyPr wrap="square">
+            <a:spAutoFit/>
+          </a:bodyPr>
+          <a:lstStyle/>
+          <a:p>
+            <a:pPr algn="l">
+              <a:defRPr sz="1300" b="0">
+                <a:solidFill>
+                  <a:srgbClr val="333333"/>
+                </a:solidFill>
+                <a:latin typeface="Consolas"/>
+              </a:defRPr>
+            </a:pPr>
+            <a:r>
+              <a:t>python -m experiments.run_baselines</a:t>
+            </a:r>
+          </a:p>
+        </p:txBody>
+      </p:sp>
+      <p:sp>
+        <p:nvSpPr>
+          <p:cNvPr id="28" name="Rectangle 27"/>
+          <p:cNvSpPr/>
+          <p:nvPr/>
+        </p:nvSpPr>
+        <p:spPr>
+          <a:xfrm>
+            <a:off x="457200" y="4526280"/>
+            <a:ext cx="11247120" cy="384048"/>
+          </a:xfrm>
+          <a:prstGeom prst="rect">
+            <a:avLst/>
+          </a:prstGeom>
+          <a:solidFill>
+            <a:srgbClr val="F0F0F0"/>
+          </a:solidFill>
+          <a:ln>
+            <a:noFill/>
+          </a:ln>
+        </p:spPr>
+        <p:style>
+          <a:lnRef idx="1">
+            <a:schemeClr val="accent1"/>
+          </a:lnRef>
+          <a:fillRef idx="3">
+            <a:schemeClr val="accent1"/>
+          </a:fillRef>
+          <a:effectRef idx="2">
+            <a:schemeClr val="accent1"/>
+          </a:effectRef>
+          <a:fontRef idx="minor">
+            <a:schemeClr val="lt1"/>
+          </a:fontRef>
+        </p:style>
+        <p:txBody>
+          <a:bodyPr rtlCol="0" anchor="ctr"/>
+          <a:lstStyle/>
+          <a:p>
+            <a:pPr algn="ctr"/>
+          </a:p>
+        </p:txBody>
+      </p:sp>
+      <p:sp>
+        <p:nvSpPr>
+          <p:cNvPr id="29" name="TextBox 28"/>
+          <p:cNvSpPr txBox="1"/>
+          <p:nvPr/>
+        </p:nvSpPr>
+        <p:spPr>
+          <a:xfrm>
+            <a:off x="640080" y="4544568"/>
+            <a:ext cx="2743200" cy="365760"/>
+          </a:xfrm>
+          <a:prstGeom prst="rect">
+            <a:avLst/>
+          </a:prstGeom>
+          <a:noFill/>
+        </p:spPr>
+        <p:txBody>
+          <a:bodyPr wrap="square">
+            <a:spAutoFit/>
+          </a:bodyPr>
+          <a:lstStyle/>
+          <a:p>
+            <a:pPr algn="l">
+              <a:defRPr sz="1500" b="1">
+                <a:solidFill>
+                  <a:srgbClr val="003366"/>
+                </a:solidFill>
+                <a:latin typeface="Calibri"/>
+              </a:defRPr>
+            </a:pPr>
+            <a:r>
+              <a:t>Transfer experiment</a:t>
+            </a:r>
+          </a:p>
+        </p:txBody>
+      </p:sp>
+      <p:sp>
+        <p:nvSpPr>
+          <p:cNvPr id="30" name="TextBox 29"/>
+          <p:cNvSpPr txBox="1"/>
+          <p:nvPr/>
+        </p:nvSpPr>
+        <p:spPr>
+          <a:xfrm>
+            <a:off x="3474720" y="4544568"/>
+            <a:ext cx="8138160" cy="365760"/>
+          </a:xfrm>
+          <a:prstGeom prst="rect">
+            <a:avLst/>
+          </a:prstGeom>
+          <a:noFill/>
+        </p:spPr>
+        <p:txBody>
+          <a:bodyPr wrap="square">
+            <a:spAutoFit/>
+          </a:bodyPr>
+          <a:lstStyle/>
+          <a:p>
+            <a:pPr algn="l">
+              <a:defRPr sz="1300" b="0">
+                <a:solidFill>
+                  <a:srgbClr val="333333"/>
+                </a:solidFill>
+                <a:latin typeface="Consolas"/>
+              </a:defRPr>
+            </a:pPr>
+            <a:r>
+              <a:t>python -m experiments.transfer_experiment 300000 50000</a:t>
+            </a:r>
+          </a:p>
+        </p:txBody>
+      </p:sp>
+      <p:sp>
+        <p:nvSpPr>
+          <p:cNvPr id="31" name="Rectangle 30"/>
+          <p:cNvSpPr/>
+          <p:nvPr/>
+        </p:nvSpPr>
+        <p:spPr>
+          <a:xfrm>
+            <a:off x="457200" y="4937760"/>
+            <a:ext cx="11247120" cy="384048"/>
+          </a:xfrm>
+          <a:prstGeom prst="rect">
+            <a:avLst/>
+          </a:prstGeom>
+          <a:solidFill>
+            <a:srgbClr val="FFFFFF"/>
+          </a:solidFill>
+          <a:ln>
+            <a:noFill/>
+          </a:ln>
+        </p:spPr>
+        <p:style>
+          <a:lnRef idx="1">
+            <a:schemeClr val="accent1"/>
+          </a:lnRef>
+          <a:fillRef idx="3">
+            <a:schemeClr val="accent1"/>
+          </a:fillRef>
+          <a:effectRef idx="2">
+            <a:schemeClr val="accent1"/>
+          </a:effectRef>
+          <a:fontRef idx="minor">
+            <a:schemeClr val="lt1"/>
+          </a:fontRef>
+        </p:style>
+        <p:txBody>
+          <a:bodyPr rtlCol="0" anchor="ctr"/>
+          <a:lstStyle/>
+          <a:p>
+            <a:pPr algn="ctr"/>
+          </a:p>
+        </p:txBody>
+      </p:sp>
+      <p:sp>
+        <p:nvSpPr>
+          <p:cNvPr id="32" name="TextBox 31"/>
+          <p:cNvSpPr txBox="1"/>
+          <p:nvPr/>
+        </p:nvSpPr>
+        <p:spPr>
+          <a:xfrm>
+            <a:off x="640080" y="4956048"/>
+            <a:ext cx="2743200" cy="365760"/>
+          </a:xfrm>
+          <a:prstGeom prst="rect">
+            <a:avLst/>
+          </a:prstGeom>
+          <a:noFill/>
+        </p:spPr>
+        <p:txBody>
+          <a:bodyPr wrap="square">
+            <a:spAutoFit/>
+          </a:bodyPr>
+          <a:lstStyle/>
+          <a:p>
+            <a:pPr algn="l">
+              <a:defRPr sz="1500" b="1">
+                <a:solidFill>
+                  <a:srgbClr val="003366"/>
+                </a:solidFill>
+                <a:latin typeface="Calibri"/>
+              </a:defRPr>
+            </a:pPr>
+            <a:r>
+              <a:t>Controller initialization</a:t>
+            </a:r>
+          </a:p>
+        </p:txBody>
+      </p:sp>
+      <p:sp>
+        <p:nvSpPr>
+          <p:cNvPr id="33" name="TextBox 32"/>
+          <p:cNvSpPr txBox="1"/>
+          <p:nvPr/>
+        </p:nvSpPr>
+        <p:spPr>
+          <a:xfrm>
+            <a:off x="3474720" y="4956048"/>
+            <a:ext cx="8138160" cy="365760"/>
+          </a:xfrm>
+          <a:prstGeom prst="rect">
+            <a:avLst/>
+          </a:prstGeom>
+          <a:noFill/>
+        </p:spPr>
+        <p:txBody>
+          <a:bodyPr wrap="square">
+            <a:spAutoFit/>
+          </a:bodyPr>
+          <a:lstStyle/>
+          <a:p>
+            <a:pPr algn="l">
+              <a:defRPr sz="1300" b="0">
+                <a:solidFill>
+                  <a:srgbClr val="333333"/>
+                </a:solidFill>
+                <a:latin typeface="Consolas"/>
+              </a:defRPr>
+            </a:pPr>
+            <a:r>
+              <a:t>python -m experiments.controller_experiment 1000000 2000</a:t>
+            </a:r>
+          </a:p>
+        </p:txBody>
+      </p:sp>
+      <p:sp>
+        <p:nvSpPr>
+          <p:cNvPr id="34" name="Rectangle 33"/>
+          <p:cNvSpPr/>
+          <p:nvPr/>
+        </p:nvSpPr>
+        <p:spPr>
+          <a:xfrm>
+            <a:off x="457200" y="5349240"/>
+            <a:ext cx="11247120" cy="384048"/>
+          </a:xfrm>
+          <a:prstGeom prst="rect">
+            <a:avLst/>
+          </a:prstGeom>
+          <a:solidFill>
+            <a:srgbClr val="F0F0F0"/>
+          </a:solidFill>
+          <a:ln>
+            <a:noFill/>
+          </a:ln>
+        </p:spPr>
+        <p:style>
+          <a:lnRef idx="1">
+            <a:schemeClr val="accent1"/>
+          </a:lnRef>
+          <a:fillRef idx="3">
+            <a:schemeClr val="accent1"/>
+          </a:fillRef>
+          <a:effectRef idx="2">
+            <a:schemeClr val="accent1"/>
+          </a:effectRef>
+          <a:fontRef idx="minor">
+            <a:schemeClr val="lt1"/>
+          </a:fontRef>
+        </p:style>
+        <p:txBody>
+          <a:bodyPr rtlCol="0" anchor="ctr"/>
+          <a:lstStyle/>
+          <a:p>
+            <a:pPr algn="ctr"/>
+          </a:p>
+        </p:txBody>
+      </p:sp>
+      <p:sp>
+        <p:nvSpPr>
+          <p:cNvPr id="35" name="TextBox 34"/>
+          <p:cNvSpPr txBox="1"/>
+          <p:nvPr/>
+        </p:nvSpPr>
+        <p:spPr>
+          <a:xfrm>
+            <a:off x="640080" y="5367528"/>
+            <a:ext cx="2743200" cy="365760"/>
+          </a:xfrm>
+          <a:prstGeom prst="rect">
+            <a:avLst/>
+          </a:prstGeom>
+          <a:noFill/>
+        </p:spPr>
+        <p:txBody>
+          <a:bodyPr wrap="square">
+            <a:spAutoFit/>
+          </a:bodyPr>
+          <a:lstStyle/>
+          <a:p>
+            <a:pPr algn="l">
+              <a:defRPr sz="1500" b="1">
+                <a:solidFill>
+                  <a:srgbClr val="003366"/>
+                </a:solidFill>
+                <a:latin typeface="Calibri"/>
+              </a:defRPr>
+            </a:pPr>
+            <a:r>
+              <a:t>Regenerate RESULTS.md</a:t>
+            </a:r>
+          </a:p>
+        </p:txBody>
+      </p:sp>
+      <p:sp>
+        <p:nvSpPr>
+          <p:cNvPr id="36" name="TextBox 35"/>
+          <p:cNvSpPr txBox="1"/>
+          <p:nvPr/>
+        </p:nvSpPr>
+        <p:spPr>
+          <a:xfrm>
+            <a:off x="3474720" y="5367528"/>
+            <a:ext cx="8138160" cy="365760"/>
+          </a:xfrm>
+          <a:prstGeom prst="rect">
+            <a:avLst/>
+          </a:prstGeom>
+          <a:noFill/>
+        </p:spPr>
+        <p:txBody>
+          <a:bodyPr wrap="square">
+            <a:spAutoFit/>
+          </a:bodyPr>
+          <a:lstStyle/>
+          <a:p>
+            <a:pPr algn="l">
+              <a:defRPr sz="1300" b="0">
+                <a:solidFill>
+                  <a:srgbClr val="333333"/>
+                </a:solidFill>
+                <a:latin typeface="Consolas"/>
+              </a:defRPr>
+            </a:pPr>
+            <a:r>
+              <a:t>python -m experiments.summarize_results</a:t>
+            </a:r>
+          </a:p>
+        </p:txBody>
+      </p:sp>
+      <p:sp>
+        <p:nvSpPr>
+          <p:cNvPr id="37" name="Rectangle 36"/>
+          <p:cNvSpPr/>
+          <p:nvPr/>
+        </p:nvSpPr>
+        <p:spPr>
+          <a:xfrm>
+            <a:off x="457200" y="5760720"/>
+            <a:ext cx="11247120" cy="384048"/>
+          </a:xfrm>
+          <a:prstGeom prst="rect">
+            <a:avLst/>
+          </a:prstGeom>
+          <a:solidFill>
+            <a:srgbClr val="FFFFFF"/>
+          </a:solidFill>
+          <a:ln>
+            <a:noFill/>
+          </a:ln>
+        </p:spPr>
+        <p:style>
+          <a:lnRef idx="1">
+            <a:schemeClr val="accent1"/>
+          </a:lnRef>
+          <a:fillRef idx="3">
+            <a:schemeClr val="accent1"/>
+          </a:fillRef>
+          <a:effectRef idx="2">
+            <a:schemeClr val="accent1"/>
+          </a:effectRef>
+          <a:fontRef idx="minor">
+            <a:schemeClr val="lt1"/>
+          </a:fontRef>
+        </p:style>
+        <p:txBody>
+          <a:bodyPr rtlCol="0" anchor="ctr"/>
+          <a:lstStyle/>
+          <a:p>
+            <a:pPr algn="ctr"/>
+          </a:p>
+        </p:txBody>
+      </p:sp>
+      <p:sp>
+        <p:nvSpPr>
+          <p:cNvPr id="38" name="TextBox 37"/>
+          <p:cNvSpPr txBox="1"/>
+          <p:nvPr/>
+        </p:nvSpPr>
+        <p:spPr>
+          <a:xfrm>
+            <a:off x="640080" y="5779008"/>
+            <a:ext cx="2743200" cy="365760"/>
+          </a:xfrm>
+          <a:prstGeom prst="rect">
+            <a:avLst/>
+          </a:prstGeom>
+          <a:noFill/>
+        </p:spPr>
+        <p:txBody>
+          <a:bodyPr wrap="square">
+            <a:spAutoFit/>
+          </a:bodyPr>
+          <a:lstStyle/>
+          <a:p>
+            <a:pPr algn="l">
+              <a:defRPr sz="1500" b="1">
+                <a:solidFill>
+                  <a:srgbClr val="003366"/>
+                </a:solidFill>
+                <a:latin typeface="Calibri"/>
+              </a:defRPr>
+            </a:pPr>
+            <a:r>
+              <a:t>Launch workstation</a:t>
+            </a:r>
+          </a:p>
+        </p:txBody>
+      </p:sp>
+      <p:sp>
+        <p:nvSpPr>
+          <p:cNvPr id="39" name="TextBox 38"/>
+          <p:cNvSpPr txBox="1"/>
+          <p:nvPr/>
+        </p:nvSpPr>
+        <p:spPr>
+          <a:xfrm>
+            <a:off x="3474720" y="5779008"/>
+            <a:ext cx="8138160" cy="365760"/>
+          </a:xfrm>
+          <a:prstGeom prst="rect">
+            <a:avLst/>
+          </a:prstGeom>
+          <a:noFill/>
+        </p:spPr>
+        <p:txBody>
+          <a:bodyPr wrap="square">
+            <a:spAutoFit/>
+          </a:bodyPr>
+          <a:lstStyle/>
+          <a:p>
+            <a:pPr algn="l">
+              <a:defRPr sz="1300" b="0">
+                <a:solidFill>
+                  <a:srgbClr val="333333"/>
+                </a:solidFill>
+                <a:latin typeface="Consolas"/>
+              </a:defRPr>
+            </a:pPr>
+            <a:r>
+              <a:t>streamlit run app.py</a:t>
+            </a:r>
+          </a:p>
+        </p:txBody>
+      </p:sp>
+      <p:sp>
+        <p:nvSpPr>
+          <p:cNvPr id="40" name="Rectangle 39"/>
+          <p:cNvSpPr/>
+          <p:nvPr/>
+        </p:nvSpPr>
+        <p:spPr>
+          <a:xfrm>
+            <a:off x="457200" y="6172200"/>
+            <a:ext cx="11247120" cy="384048"/>
+          </a:xfrm>
+          <a:prstGeom prst="rect">
+            <a:avLst/>
+          </a:prstGeom>
+          <a:solidFill>
+            <a:srgbClr val="F0F0F0"/>
+          </a:solidFill>
+          <a:ln>
+            <a:noFill/>
+          </a:ln>
+        </p:spPr>
+        <p:style>
+          <a:lnRef idx="1">
+            <a:schemeClr val="accent1"/>
+          </a:lnRef>
+          <a:fillRef idx="3">
+            <a:schemeClr val="accent1"/>
+          </a:fillRef>
+          <a:effectRef idx="2">
+            <a:schemeClr val="accent1"/>
+          </a:effectRef>
+          <a:fontRef idx="minor">
+            <a:schemeClr val="lt1"/>
+          </a:fontRef>
+        </p:style>
+        <p:txBody>
+          <a:bodyPr rtlCol="0" anchor="ctr"/>
+          <a:lstStyle/>
+          <a:p>
+            <a:pPr algn="ctr"/>
+          </a:p>
+        </p:txBody>
+      </p:sp>
+      <p:sp>
+        <p:nvSpPr>
+          <p:cNvPr id="41" name="TextBox 40"/>
+          <p:cNvSpPr txBox="1"/>
+          <p:nvPr/>
+        </p:nvSpPr>
+        <p:spPr>
+          <a:xfrm>
+            <a:off x="640080" y="6190488"/>
+            <a:ext cx="2743200" cy="365760"/>
+          </a:xfrm>
+          <a:prstGeom prst="rect">
+            <a:avLst/>
+          </a:prstGeom>
+          <a:noFill/>
+        </p:spPr>
+        <p:txBody>
+          <a:bodyPr wrap="square">
+            <a:spAutoFit/>
+          </a:bodyPr>
+          <a:lstStyle/>
+          <a:p>
+            <a:pPr algn="l">
+              <a:defRPr sz="1500" b="1">
+                <a:solidFill>
+                  <a:srgbClr val="003366"/>
+                </a:solidFill>
+                <a:latin typeface="Calibri"/>
+              </a:defRPr>
+            </a:pPr>
+            <a:r>
+              <a:t>Full pipeline</a:t>
+            </a:r>
+          </a:p>
+        </p:txBody>
+      </p:sp>
+      <p:sp>
+        <p:nvSpPr>
+          <p:cNvPr id="42" name="TextBox 41"/>
+          <p:cNvSpPr txBox="1"/>
+          <p:nvPr/>
+        </p:nvSpPr>
+        <p:spPr>
+          <a:xfrm>
+            <a:off x="3474720" y="6190488"/>
+            <a:ext cx="8138160" cy="365760"/>
+          </a:xfrm>
+          <a:prstGeom prst="rect">
+            <a:avLst/>
+          </a:prstGeom>
+          <a:noFill/>
+        </p:spPr>
+        <p:txBody>
+          <a:bodyPr wrap="square">
+            <a:spAutoFit/>
+          </a:bodyPr>
+          <a:lstStyle/>
+          <a:p>
+            <a:pPr algn="l">
+              <a:defRPr sz="1300" b="0">
+                <a:solidFill>
+                  <a:srgbClr val="333333"/>
+                </a:solidFill>
+                <a:latin typeface="Consolas"/>
+              </a:defRPr>
+            </a:pPr>
+            <a:r>
+              <a:t>python -m experiments.run_pipeline --steps 1000000</a:t>
             </a:r>
           </a:p>
         </p:txBody>
@@ -11695,6 +13657,255 @@
 </p:sld>
 </file>
 
+<file path=ppt/slides/slide20.xml><?xml version="1.0" encoding="utf-8"?>
+<p:sld xmlns:a="http://schemas.openxmlformats.org/drawingml/2006/main" xmlns:p="http://schemas.openxmlformats.org/presentationml/2006/main" xmlns:r="http://schemas.openxmlformats.org/officeDocument/2006/relationships">
+  <p:cSld>
+    <p:bg>
+      <p:bgPr>
+        <a:solidFill>
+          <a:srgbClr val="003366"/>
+        </a:solidFill>
+        <a:effectLst/>
+      </p:bgPr>
+    </p:bg>
+    <p:spTree>
+      <p:nvGrpSpPr>
+        <p:cNvPr id="1" name=""/>
+        <p:cNvGrpSpPr/>
+        <p:nvPr/>
+      </p:nvGrpSpPr>
+      <p:grpSpPr/>
+      <p:sp>
+        <p:nvSpPr>
+          <p:cNvPr id="2" name="Rectangle 1"/>
+          <p:cNvSpPr/>
+          <p:nvPr/>
+        </p:nvSpPr>
+        <p:spPr>
+          <a:xfrm>
+            <a:off x="914400" y="2286000"/>
+            <a:ext cx="10362895" cy="50800"/>
+          </a:xfrm>
+          <a:prstGeom prst="rect">
+            <a:avLst/>
+          </a:prstGeom>
+          <a:solidFill>
+            <a:srgbClr val="CC9900"/>
+          </a:solidFill>
+          <a:ln>
+            <a:noFill/>
+          </a:ln>
+        </p:spPr>
+        <p:style>
+          <a:lnRef idx="1">
+            <a:schemeClr val="accent1"/>
+          </a:lnRef>
+          <a:fillRef idx="3">
+            <a:schemeClr val="accent1"/>
+          </a:fillRef>
+          <a:effectRef idx="2">
+            <a:schemeClr val="accent1"/>
+          </a:effectRef>
+          <a:fontRef idx="minor">
+            <a:schemeClr val="lt1"/>
+          </a:fontRef>
+        </p:style>
+        <p:txBody>
+          <a:bodyPr rtlCol="0" anchor="ctr"/>
+          <a:lstStyle/>
+          <a:p>
+            <a:pPr algn="ctr"/>
+          </a:p>
+        </p:txBody>
+      </p:sp>
+      <p:sp>
+        <p:nvSpPr>
+          <p:cNvPr id="3" name="TextBox 2"/>
+          <p:cNvSpPr txBox="1"/>
+          <p:nvPr/>
+        </p:nvSpPr>
+        <p:spPr>
+          <a:xfrm>
+            <a:off x="914400" y="1371600"/>
+            <a:ext cx="10362895" cy="914400"/>
+          </a:xfrm>
+          <a:prstGeom prst="rect">
+            <a:avLst/>
+          </a:prstGeom>
+          <a:noFill/>
+        </p:spPr>
+        <p:txBody>
+          <a:bodyPr wrap="square">
+            <a:spAutoFit/>
+          </a:bodyPr>
+          <a:lstStyle/>
+          <a:p>
+            <a:pPr algn="ctr">
+              <a:defRPr sz="5000" b="1">
+                <a:solidFill>
+                  <a:srgbClr val="FFFFFF"/>
+                </a:solidFill>
+                <a:latin typeface="Calibri"/>
+              </a:defRPr>
+            </a:pPr>
+            <a:r>
+              <a:t>Thank You</a:t>
+            </a:r>
+          </a:p>
+        </p:txBody>
+      </p:sp>
+      <p:sp>
+        <p:nvSpPr>
+          <p:cNvPr id="4" name="TextBox 3"/>
+          <p:cNvSpPr txBox="1"/>
+          <p:nvPr/>
+        </p:nvSpPr>
+        <p:spPr>
+          <a:xfrm>
+            <a:off x="914400" y="2560320"/>
+            <a:ext cx="10362895" cy="731520"/>
+          </a:xfrm>
+          <a:prstGeom prst="rect">
+            <a:avLst/>
+          </a:prstGeom>
+          <a:noFill/>
+        </p:spPr>
+        <p:txBody>
+          <a:bodyPr wrap="square">
+            <a:spAutoFit/>
+          </a:bodyPr>
+          <a:lstStyle/>
+          <a:p>
+            <a:pPr algn="ctr">
+              <a:defRPr sz="3600" b="0">
+                <a:solidFill>
+                  <a:srgbClr val="CC9900"/>
+                </a:solidFill>
+                <a:latin typeface="Calibri"/>
+              </a:defRPr>
+            </a:pPr>
+            <a:r>
+              <a:t>Questions &amp; Discussion</a:t>
+            </a:r>
+          </a:p>
+        </p:txBody>
+      </p:sp>
+      <p:sp>
+        <p:nvSpPr>
+          <p:cNvPr id="5" name="TextBox 4"/>
+          <p:cNvSpPr txBox="1"/>
+          <p:nvPr/>
+        </p:nvSpPr>
+        <p:spPr>
+          <a:xfrm>
+            <a:off x="914400" y="3657600"/>
+            <a:ext cx="10362895" cy="548640"/>
+          </a:xfrm>
+          <a:prstGeom prst="rect">
+            <a:avLst/>
+          </a:prstGeom>
+          <a:noFill/>
+        </p:spPr>
+        <p:txBody>
+          <a:bodyPr wrap="square">
+            <a:spAutoFit/>
+          </a:bodyPr>
+          <a:lstStyle/>
+          <a:p>
+            <a:pPr algn="ctr">
+              <a:defRPr sz="2000" b="0">
+                <a:solidFill>
+                  <a:srgbClr val="FFFFFF"/>
+                </a:solidFill>
+                <a:latin typeface="Calibri"/>
+              </a:defRPr>
+            </a:pPr>
+            <a:r>
+              <a:t>Repository: G:/My Drive/IITM/AI in Mfg</a:t>
+            </a:r>
+          </a:p>
+        </p:txBody>
+      </p:sp>
+      <p:sp>
+        <p:nvSpPr>
+          <p:cNvPr id="6" name="TextBox 5"/>
+          <p:cNvSpPr txBox="1"/>
+          <p:nvPr/>
+        </p:nvSpPr>
+        <p:spPr>
+          <a:xfrm>
+            <a:off x="914400" y="4389120"/>
+            <a:ext cx="10362895" cy="548640"/>
+          </a:xfrm>
+          <a:prstGeom prst="rect">
+            <a:avLst/>
+          </a:prstGeom>
+          <a:noFill/>
+        </p:spPr>
+        <p:txBody>
+          <a:bodyPr wrap="square">
+            <a:spAutoFit/>
+          </a:bodyPr>
+          <a:lstStyle/>
+          <a:p>
+            <a:pPr algn="ctr">
+              <a:defRPr sz="1800" b="0">
+                <a:solidFill>
+                  <a:srgbClr val="B4C8DC"/>
+                </a:solidFill>
+                <a:latin typeface="Calibri"/>
+              </a:defRPr>
+            </a:pPr>
+            <a:r>
+              <a:t>All code, data, results, and documentation in the repository</a:t>
+            </a:r>
+          </a:p>
+        </p:txBody>
+      </p:sp>
+      <p:sp>
+        <p:nvSpPr>
+          <p:cNvPr id="7" name="TextBox 6"/>
+          <p:cNvSpPr txBox="1"/>
+          <p:nvPr/>
+        </p:nvSpPr>
+        <p:spPr>
+          <a:xfrm>
+            <a:off x="914400" y="5303520"/>
+            <a:ext cx="10362895" cy="548640"/>
+          </a:xfrm>
+          <a:prstGeom prst="rect">
+            <a:avLst/>
+          </a:prstGeom>
+          <a:noFill/>
+        </p:spPr>
+        <p:txBody>
+          <a:bodyPr wrap="square">
+            <a:spAutoFit/>
+          </a:bodyPr>
+          <a:lstStyle/>
+          <a:p>
+            <a:pPr algn="ctr">
+              <a:defRPr sz="1800" b="0">
+                <a:solidFill>
+                  <a:srgbClr val="CC9900"/>
+                </a:solidFill>
+                <a:latin typeface="Calibri"/>
+              </a:defRPr>
+            </a:pPr>
+            <a:r>
+              <a:t>ME6324, AI in Manufacturing  •  IIT Madras</a:t>
+            </a:r>
+          </a:p>
+        </p:txBody>
+      </p:sp>
+    </p:spTree>
+  </p:cSld>
+  <p:clrMapOvr>
+    <a:masterClrMapping/>
+  </p:clrMapOvr>
+</p:sld>
+</file>
+
 <file path=ppt/slides/slide3.xml><?xml version="1.0" encoding="utf-8"?>
 <p:sld xmlns:a="http://schemas.openxmlformats.org/drawingml/2006/main" xmlns:p="http://schemas.openxmlformats.org/presentationml/2006/main" xmlns:r="http://schemas.openxmlformats.org/officeDocument/2006/relationships">
   <p:cSld>
@@ -13708,7 +15919,7 @@
               </a:defRPr>
             </a:pPr>
             <a:r>
-              <a:t>Digital Twin Physics (config/physics.py — single source of truth)</a:t>
+              <a:t>Digital Twin Physics (MillingDT/config/physics.py, single source of truth)</a:t>
             </a:r>
           </a:p>
         </p:txBody>
@@ -15106,7 +17317,7 @@
               </a:defRPr>
             </a:pPr>
             <a:r>
-              <a:t>  8-10: the context — w₂, C_wear [0.6,1.4], k₁ [0.8,1.2]</a:t>
+              <a:t>  8-10: the context: w₂, C_wear [0.6,1.4], k₁ [0.8,1.2]</a:t>
             </a:r>
           </a:p>
           <a:p>
@@ -16255,7 +18466,7 @@
               </a:defRPr>
             </a:pPr>
             <a:r>
-              <a:t>    → models/PPO_seed42/</a:t>
+              <a:t>    → results/run_PPO_seed42/</a:t>
             </a:r>
           </a:p>
           <a:p>
@@ -16498,7 +18709,7 @@
               </a:defRPr>
             </a:pPr>
             <a:r>
-              <a:t>Results: Production Policy — Monte Carlo Sweep (100 Scenarios)</a:t>
+              <a:t>Results: Production Policy, Monte Carlo Sweep (100 Scenarios)</a:t>
             </a:r>
           </a:p>
         </p:txBody>
@@ -17686,7 +19897,7 @@
               </a:defRPr>
             </a:pPr>
             <a:r>
-              <a:t>• Finished surface ALWAYS within spec (0% violations) — the part quality holds</a:t>
+              <a:t>• Finished surface ALWAYS within spec (0% violations), the part quality holds</a:t>
             </a:r>
           </a:p>
           <a:p>

--- a/report/presentation.pptx
+++ b/report/presentation.pptx
@@ -7783,7 +7783,7 @@
         </p:nvSpPr>
         <p:spPr>
           <a:xfrm>
-            <a:off x="457200" y="4023360"/>
+            <a:off x="457200" y="3977639"/>
             <a:ext cx="11247120" cy="457200"/>
           </a:xfrm>
           <a:prstGeom prst="rect">
@@ -7819,8 +7819,8 @@
         </p:nvSpPr>
         <p:spPr>
           <a:xfrm>
-            <a:off x="457200" y="4434840"/>
-            <a:ext cx="11247120" cy="2148840"/>
+            <a:off x="457200" y="4480560"/>
+            <a:ext cx="11247120" cy="2331720"/>
           </a:xfrm>
           <a:prstGeom prst="rect">
             <a:avLst/>
@@ -7864,7 +7864,7 @@
         </p:nvSpPr>
         <p:spPr>
           <a:xfrm>
-            <a:off x="731520" y="4526280"/>
+            <a:off x="731520" y="4553712"/>
             <a:ext cx="10698480" cy="365760"/>
           </a:xfrm>
           <a:prstGeom prst="rect">
@@ -7901,7 +7901,7 @@
         <p:spPr>
           <a:xfrm>
             <a:off x="731520" y="4983480"/>
-            <a:ext cx="10698480" cy="1554480"/>
+            <a:ext cx="10698480" cy="1737360"/>
           </a:xfrm>
           <a:prstGeom prst="rect">
             <a:avLst/>
@@ -7918,7 +7918,7 @@
               <a:spcAft>
                 <a:spcPts val="400"/>
               </a:spcAft>
-              <a:defRPr sz="1300">
+              <a:defRPr sz="1200">
                 <a:solidFill>
                   <a:srgbClr val="333333"/>
                 </a:solidFill>
@@ -7934,7 +7934,7 @@
               <a:spcAft>
                 <a:spcPts val="400"/>
               </a:spcAft>
-              <a:defRPr sz="1300">
+              <a:defRPr sz="1200">
                 <a:solidFill>
                   <a:srgbClr val="333333"/>
                 </a:solidFill>
@@ -7950,7 +7950,7 @@
               <a:spcAft>
                 <a:spcPts val="400"/>
               </a:spcAft>
-              <a:defRPr sz="1300">
+              <a:defRPr sz="1200">
                 <a:solidFill>
                   <a:srgbClr val="333333"/>
                 </a:solidFill>
@@ -7966,7 +7966,7 @@
               <a:spcAft>
                 <a:spcPts val="400"/>
               </a:spcAft>
-              <a:defRPr sz="1300">
+              <a:defRPr sz="1200">
                 <a:solidFill>
                   <a:srgbClr val="333333"/>
                 </a:solidFill>
@@ -7982,7 +7982,7 @@
               <a:spcAft>
                 <a:spcPts val="400"/>
               </a:spcAft>
-              <a:defRPr sz="1300">
+              <a:defRPr sz="1200">
                 <a:solidFill>
                   <a:srgbClr val="333333"/>
                 </a:solidFill>
@@ -9347,7 +9347,7 @@
         <p:spPr>
           <a:xfrm>
             <a:off x="457200" y="1234440"/>
-            <a:ext cx="11247120" cy="2286000"/>
+            <a:ext cx="11247120" cy="2606040"/>
           </a:xfrm>
           <a:prstGeom prst="rect">
             <a:avLst/>
@@ -9428,7 +9428,7 @@
         <p:spPr>
           <a:xfrm>
             <a:off x="731520" y="1828800"/>
-            <a:ext cx="10698480" cy="1645920"/>
+            <a:ext cx="10698480" cy="1920240"/>
           </a:xfrm>
           <a:prstGeom prst="rect">
             <a:avLst/>
@@ -9498,8 +9498,8 @@
         </p:nvSpPr>
         <p:spPr>
           <a:xfrm>
-            <a:off x="457200" y="3703320"/>
-            <a:ext cx="11247120" cy="2606040"/>
+            <a:off x="457200" y="3931920"/>
+            <a:ext cx="11247120" cy="2377440"/>
           </a:xfrm>
           <a:prstGeom prst="rect">
             <a:avLst/>
@@ -9543,7 +9543,7 @@
         </p:nvSpPr>
         <p:spPr>
           <a:xfrm>
-            <a:off x="731520" y="3794760"/>
+            <a:off x="731520" y="4023360"/>
             <a:ext cx="10698480" cy="365760"/>
           </a:xfrm>
           <a:prstGeom prst="rect">
@@ -9579,8 +9579,8 @@
         </p:nvSpPr>
         <p:spPr>
           <a:xfrm>
-            <a:off x="731520" y="4251960"/>
-            <a:ext cx="10698480" cy="1920240"/>
+            <a:off x="731520" y="4480560"/>
+            <a:ext cx="10698480" cy="1737360"/>
           </a:xfrm>
           <a:prstGeom prst="rect">
             <a:avLst/>
@@ -14930,7 +14930,7 @@
         <p:spPr>
           <a:xfrm>
             <a:off x="457200" y="4754880"/>
-            <a:ext cx="11292840" cy="1463040"/>
+            <a:ext cx="11292840" cy="1828800"/>
           </a:xfrm>
           <a:prstGeom prst="rect">
             <a:avLst/>
@@ -15011,7 +15011,7 @@
         <p:spPr>
           <a:xfrm>
             <a:off x="731520" y="5394960"/>
-            <a:ext cx="10698480" cy="731520"/>
+            <a:ext cx="10698480" cy="1097280"/>
           </a:xfrm>
           <a:prstGeom prst="rect">
             <a:avLst/>
@@ -15036,7 +15036,7 @@
               </a:defRPr>
             </a:pPr>
             <a:r>
-              <a:t>Inside a perfect digital twin the learned policy and the model-based controller are comparable: the policy is ahead on the physical metrics and behind on the breakage, and the gap the reward does show is partly the reward's artifact. Its advantage appears where the controller's information advantage disappears: the regime map puts a number on it, at about 2% of the wear measurement's range.</a:t>
+              <a:t>Inside a perfect digital twin the learned policy and the model-based controller are comparable: the policy is ahead on the physical metrics and behind on the breakage, and the gap the reward does show is partly the reward's artifact. Its advantage appears where the controller's information advantage disappears: the crossover is at about 2% of the wear measurement's range.</a:t>
             </a:r>
           </a:p>
         </p:txBody>
@@ -19282,7 +19282,7 @@
         </p:nvSpPr>
         <p:spPr>
           <a:xfrm>
-            <a:off x="457200" y="1485900"/>
+            <a:off x="457200" y="1476756"/>
             <a:ext cx="11247120" cy="283464"/>
           </a:xfrm>
           <a:prstGeom prst="rect">
@@ -19325,7 +19325,7 @@
         </p:nvSpPr>
         <p:spPr>
           <a:xfrm>
-            <a:off x="640080" y="1495044"/>
+            <a:off x="640080" y="1485900"/>
             <a:ext cx="2743200" cy="274320"/>
           </a:xfrm>
           <a:prstGeom prst="rect">
@@ -19361,7 +19361,7 @@
         </p:nvSpPr>
         <p:spPr>
           <a:xfrm>
-            <a:off x="3474720" y="1495044"/>
+            <a:off x="3474720" y="1485900"/>
             <a:ext cx="8138160" cy="274320"/>
           </a:xfrm>
           <a:prstGeom prst="rect">
@@ -19397,7 +19397,7 @@
         </p:nvSpPr>
         <p:spPr>
           <a:xfrm>
-            <a:off x="457200" y="1783080"/>
+            <a:off x="457200" y="1764792"/>
             <a:ext cx="11247120" cy="283464"/>
           </a:xfrm>
           <a:prstGeom prst="rect">
@@ -19440,7 +19440,7 @@
         </p:nvSpPr>
         <p:spPr>
           <a:xfrm>
-            <a:off x="640080" y="1792224"/>
+            <a:off x="640080" y="1773936"/>
             <a:ext cx="2743200" cy="274320"/>
           </a:xfrm>
           <a:prstGeom prst="rect">
@@ -19476,7 +19476,7 @@
         </p:nvSpPr>
         <p:spPr>
           <a:xfrm>
-            <a:off x="3474720" y="1792224"/>
+            <a:off x="3474720" y="1773936"/>
             <a:ext cx="8138160" cy="274320"/>
           </a:xfrm>
           <a:prstGeom prst="rect">
@@ -19512,7 +19512,7 @@
         </p:nvSpPr>
         <p:spPr>
           <a:xfrm>
-            <a:off x="457200" y="2080260"/>
+            <a:off x="457200" y="2052828"/>
             <a:ext cx="11247120" cy="283464"/>
           </a:xfrm>
           <a:prstGeom prst="rect">
@@ -19555,7 +19555,7 @@
         </p:nvSpPr>
         <p:spPr>
           <a:xfrm>
-            <a:off x="640080" y="2089404"/>
+            <a:off x="640080" y="2061972"/>
             <a:ext cx="2743200" cy="274320"/>
           </a:xfrm>
           <a:prstGeom prst="rect">
@@ -19591,7 +19591,7 @@
         </p:nvSpPr>
         <p:spPr>
           <a:xfrm>
-            <a:off x="3474720" y="2089404"/>
+            <a:off x="3474720" y="2061972"/>
             <a:ext cx="8138160" cy="274320"/>
           </a:xfrm>
           <a:prstGeom prst="rect">
@@ -19627,7 +19627,7 @@
         </p:nvSpPr>
         <p:spPr>
           <a:xfrm>
-            <a:off x="457200" y="2377440"/>
+            <a:off x="457200" y="2340864"/>
             <a:ext cx="11247120" cy="283464"/>
           </a:xfrm>
           <a:prstGeom prst="rect">
@@ -19670,7 +19670,7 @@
         </p:nvSpPr>
         <p:spPr>
           <a:xfrm>
-            <a:off x="640080" y="2386584"/>
+            <a:off x="640080" y="2350008"/>
             <a:ext cx="2743200" cy="274320"/>
           </a:xfrm>
           <a:prstGeom prst="rect">
@@ -19706,7 +19706,7 @@
         </p:nvSpPr>
         <p:spPr>
           <a:xfrm>
-            <a:off x="3474720" y="2386584"/>
+            <a:off x="3474720" y="2350008"/>
             <a:ext cx="8138160" cy="274320"/>
           </a:xfrm>
           <a:prstGeom prst="rect">
@@ -19742,7 +19742,7 @@
         </p:nvSpPr>
         <p:spPr>
           <a:xfrm>
-            <a:off x="457200" y="2674620"/>
+            <a:off x="457200" y="2628900"/>
             <a:ext cx="11247120" cy="283464"/>
           </a:xfrm>
           <a:prstGeom prst="rect">
@@ -19785,7 +19785,7 @@
         </p:nvSpPr>
         <p:spPr>
           <a:xfrm>
-            <a:off x="640080" y="2683764"/>
+            <a:off x="640080" y="2638044"/>
             <a:ext cx="2743200" cy="274320"/>
           </a:xfrm>
           <a:prstGeom prst="rect">
@@ -19821,7 +19821,7 @@
         </p:nvSpPr>
         <p:spPr>
           <a:xfrm>
-            <a:off x="3474720" y="2683764"/>
+            <a:off x="3474720" y="2638044"/>
             <a:ext cx="8138160" cy="274320"/>
           </a:xfrm>
           <a:prstGeom prst="rect">
@@ -19857,7 +19857,7 @@
         </p:nvSpPr>
         <p:spPr>
           <a:xfrm>
-            <a:off x="457200" y="2971800"/>
+            <a:off x="457200" y="2916936"/>
             <a:ext cx="11247120" cy="283464"/>
           </a:xfrm>
           <a:prstGeom prst="rect">
@@ -19900,7 +19900,7 @@
         </p:nvSpPr>
         <p:spPr>
           <a:xfrm>
-            <a:off x="640080" y="2980944"/>
+            <a:off x="640080" y="2926080"/>
             <a:ext cx="2743200" cy="274320"/>
           </a:xfrm>
           <a:prstGeom prst="rect">
@@ -19936,7 +19936,7 @@
         </p:nvSpPr>
         <p:spPr>
           <a:xfrm>
-            <a:off x="3474720" y="2980944"/>
+            <a:off x="3474720" y="2926080"/>
             <a:ext cx="8138160" cy="274320"/>
           </a:xfrm>
           <a:prstGeom prst="rect">
@@ -19972,7 +19972,7 @@
         </p:nvSpPr>
         <p:spPr>
           <a:xfrm>
-            <a:off x="457200" y="3268980"/>
+            <a:off x="457200" y="3204972"/>
             <a:ext cx="11247120" cy="283464"/>
           </a:xfrm>
           <a:prstGeom prst="rect">
@@ -20015,7 +20015,7 @@
         </p:nvSpPr>
         <p:spPr>
           <a:xfrm>
-            <a:off x="640080" y="3278124"/>
+            <a:off x="640080" y="3214116"/>
             <a:ext cx="2743200" cy="274320"/>
           </a:xfrm>
           <a:prstGeom prst="rect">
@@ -20051,7 +20051,7 @@
         </p:nvSpPr>
         <p:spPr>
           <a:xfrm>
-            <a:off x="3474720" y="3278124"/>
+            <a:off x="3474720" y="3214116"/>
             <a:ext cx="8138160" cy="274320"/>
           </a:xfrm>
           <a:prstGeom prst="rect">
@@ -20087,7 +20087,7 @@
         </p:nvSpPr>
         <p:spPr>
           <a:xfrm>
-            <a:off x="457200" y="3566160"/>
+            <a:off x="457200" y="3493008"/>
             <a:ext cx="11247120" cy="283464"/>
           </a:xfrm>
           <a:prstGeom prst="rect">
@@ -20130,7 +20130,7 @@
         </p:nvSpPr>
         <p:spPr>
           <a:xfrm>
-            <a:off x="640080" y="3575304"/>
+            <a:off x="640080" y="3502152"/>
             <a:ext cx="2743200" cy="274320"/>
           </a:xfrm>
           <a:prstGeom prst="rect">
@@ -20166,7 +20166,7 @@
         </p:nvSpPr>
         <p:spPr>
           <a:xfrm>
-            <a:off x="3474720" y="3575304"/>
+            <a:off x="3474720" y="3502152"/>
             <a:ext cx="8138160" cy="274320"/>
           </a:xfrm>
           <a:prstGeom prst="rect">
@@ -20202,7 +20202,7 @@
         </p:nvSpPr>
         <p:spPr>
           <a:xfrm>
-            <a:off x="457200" y="3863340"/>
+            <a:off x="457200" y="3781044"/>
             <a:ext cx="11247120" cy="283464"/>
           </a:xfrm>
           <a:prstGeom prst="rect">
@@ -20245,7 +20245,7 @@
         </p:nvSpPr>
         <p:spPr>
           <a:xfrm>
-            <a:off x="640080" y="3872484"/>
+            <a:off x="640080" y="3790188"/>
             <a:ext cx="2743200" cy="274320"/>
           </a:xfrm>
           <a:prstGeom prst="rect">
@@ -20281,7 +20281,7 @@
         </p:nvSpPr>
         <p:spPr>
           <a:xfrm>
-            <a:off x="3474720" y="3872484"/>
+            <a:off x="3474720" y="3790188"/>
             <a:ext cx="8138160" cy="274320"/>
           </a:xfrm>
           <a:prstGeom prst="rect">
@@ -20317,7 +20317,7 @@
         </p:nvSpPr>
         <p:spPr>
           <a:xfrm>
-            <a:off x="457200" y="4160520"/>
+            <a:off x="457200" y="4069080"/>
             <a:ext cx="11247120" cy="283464"/>
           </a:xfrm>
           <a:prstGeom prst="rect">
@@ -20360,7 +20360,7 @@
         </p:nvSpPr>
         <p:spPr>
           <a:xfrm>
-            <a:off x="640080" y="4169664"/>
+            <a:off x="640080" y="4078224"/>
             <a:ext cx="2743200" cy="274320"/>
           </a:xfrm>
           <a:prstGeom prst="rect">
@@ -20396,7 +20396,7 @@
         </p:nvSpPr>
         <p:spPr>
           <a:xfrm>
-            <a:off x="3474720" y="4169664"/>
+            <a:off x="3474720" y="4078224"/>
             <a:ext cx="8138160" cy="274320"/>
           </a:xfrm>
           <a:prstGeom prst="rect">
@@ -20432,7 +20432,7 @@
         </p:nvSpPr>
         <p:spPr>
           <a:xfrm>
-            <a:off x="457200" y="4457700"/>
+            <a:off x="457200" y="4357116"/>
             <a:ext cx="11247120" cy="283464"/>
           </a:xfrm>
           <a:prstGeom prst="rect">
@@ -20475,7 +20475,7 @@
         </p:nvSpPr>
         <p:spPr>
           <a:xfrm>
-            <a:off x="640080" y="4466844"/>
+            <a:off x="640080" y="4366260"/>
             <a:ext cx="2743200" cy="274320"/>
           </a:xfrm>
           <a:prstGeom prst="rect">
@@ -20511,7 +20511,7 @@
         </p:nvSpPr>
         <p:spPr>
           <a:xfrm>
-            <a:off x="3474720" y="4466844"/>
+            <a:off x="3474720" y="4366260"/>
             <a:ext cx="8138160" cy="274320"/>
           </a:xfrm>
           <a:prstGeom prst="rect">
@@ -20547,7 +20547,7 @@
         </p:nvSpPr>
         <p:spPr>
           <a:xfrm>
-            <a:off x="457200" y="4754880"/>
+            <a:off x="457200" y="4645152"/>
             <a:ext cx="11247120" cy="283464"/>
           </a:xfrm>
           <a:prstGeom prst="rect">
@@ -20590,7 +20590,7 @@
         </p:nvSpPr>
         <p:spPr>
           <a:xfrm>
-            <a:off x="640080" y="4764024"/>
+            <a:off x="640080" y="4654296"/>
             <a:ext cx="2743200" cy="274320"/>
           </a:xfrm>
           <a:prstGeom prst="rect">
@@ -20626,7 +20626,7 @@
         </p:nvSpPr>
         <p:spPr>
           <a:xfrm>
-            <a:off x="3474720" y="4764024"/>
+            <a:off x="3474720" y="4654296"/>
             <a:ext cx="8138160" cy="274320"/>
           </a:xfrm>
           <a:prstGeom prst="rect">
@@ -20662,7 +20662,7 @@
         </p:nvSpPr>
         <p:spPr>
           <a:xfrm>
-            <a:off x="457200" y="5052060"/>
+            <a:off x="457200" y="4933188"/>
             <a:ext cx="11247120" cy="283464"/>
           </a:xfrm>
           <a:prstGeom prst="rect">
@@ -20705,7 +20705,7 @@
         </p:nvSpPr>
         <p:spPr>
           <a:xfrm>
-            <a:off x="640080" y="5061204"/>
+            <a:off x="640080" y="4942332"/>
             <a:ext cx="2743200" cy="274320"/>
           </a:xfrm>
           <a:prstGeom prst="rect">
@@ -20741,7 +20741,7 @@
         </p:nvSpPr>
         <p:spPr>
           <a:xfrm>
-            <a:off x="3474720" y="5061204"/>
+            <a:off x="3474720" y="4942332"/>
             <a:ext cx="8138160" cy="274320"/>
           </a:xfrm>
           <a:prstGeom prst="rect">
@@ -20777,7 +20777,7 @@
         </p:nvSpPr>
         <p:spPr>
           <a:xfrm>
-            <a:off x="457200" y="5349240"/>
+            <a:off x="457200" y="5221224"/>
             <a:ext cx="11247120" cy="283464"/>
           </a:xfrm>
           <a:prstGeom prst="rect">
@@ -20820,7 +20820,7 @@
         </p:nvSpPr>
         <p:spPr>
           <a:xfrm>
-            <a:off x="640080" y="5358384"/>
+            <a:off x="640080" y="5230368"/>
             <a:ext cx="2743200" cy="274320"/>
           </a:xfrm>
           <a:prstGeom prst="rect">
@@ -20856,7 +20856,7 @@
         </p:nvSpPr>
         <p:spPr>
           <a:xfrm>
-            <a:off x="3474720" y="5358384"/>
+            <a:off x="3474720" y="5230368"/>
             <a:ext cx="8138160" cy="274320"/>
           </a:xfrm>
           <a:prstGeom prst="rect">
@@ -20892,7 +20892,7 @@
         </p:nvSpPr>
         <p:spPr>
           <a:xfrm>
-            <a:off x="457200" y="5646420"/>
+            <a:off x="457200" y="5509260"/>
             <a:ext cx="11247120" cy="283464"/>
           </a:xfrm>
           <a:prstGeom prst="rect">
@@ -20935,7 +20935,7 @@
         </p:nvSpPr>
         <p:spPr>
           <a:xfrm>
-            <a:off x="640080" y="5655564"/>
+            <a:off x="640080" y="5518404"/>
             <a:ext cx="2743200" cy="274320"/>
           </a:xfrm>
           <a:prstGeom prst="rect">
@@ -20971,7 +20971,7 @@
         </p:nvSpPr>
         <p:spPr>
           <a:xfrm>
-            <a:off x="3474720" y="5655564"/>
+            <a:off x="3474720" y="5518404"/>
             <a:ext cx="8138160" cy="274320"/>
           </a:xfrm>
           <a:prstGeom prst="rect">
@@ -21007,7 +21007,7 @@
         </p:nvSpPr>
         <p:spPr>
           <a:xfrm>
-            <a:off x="457200" y="5943600"/>
+            <a:off x="457200" y="5797296"/>
             <a:ext cx="11247120" cy="283464"/>
           </a:xfrm>
           <a:prstGeom prst="rect">
@@ -21050,7 +21050,7 @@
         </p:nvSpPr>
         <p:spPr>
           <a:xfrm>
-            <a:off x="640080" y="5952744"/>
+            <a:off x="640080" y="5806440"/>
             <a:ext cx="2743200" cy="274320"/>
           </a:xfrm>
           <a:prstGeom prst="rect">
@@ -21086,7 +21086,7 @@
         </p:nvSpPr>
         <p:spPr>
           <a:xfrm>
-            <a:off x="3474720" y="5952744"/>
+            <a:off x="3474720" y="5806440"/>
             <a:ext cx="8138160" cy="274320"/>
           </a:xfrm>
           <a:prstGeom prst="rect">
@@ -21122,7 +21122,7 @@
         </p:nvSpPr>
         <p:spPr>
           <a:xfrm>
-            <a:off x="457200" y="6240780"/>
+            <a:off x="457200" y="6085332"/>
             <a:ext cx="11247120" cy="283464"/>
           </a:xfrm>
           <a:prstGeom prst="rect">
@@ -21165,7 +21165,7 @@
         </p:nvSpPr>
         <p:spPr>
           <a:xfrm>
-            <a:off x="640080" y="6249924"/>
+            <a:off x="640080" y="6094476"/>
             <a:ext cx="2743200" cy="274320"/>
           </a:xfrm>
           <a:prstGeom prst="rect">
@@ -21201,7 +21201,7 @@
         </p:nvSpPr>
         <p:spPr>
           <a:xfrm>
-            <a:off x="3474720" y="6249924"/>
+            <a:off x="3474720" y="6094476"/>
             <a:ext cx="8138160" cy="274320"/>
           </a:xfrm>
           <a:prstGeom prst="rect">
@@ -21237,7 +21237,7 @@
         </p:nvSpPr>
         <p:spPr>
           <a:xfrm>
-            <a:off x="457200" y="6537960"/>
+            <a:off x="457200" y="6373368"/>
             <a:ext cx="11247120" cy="283464"/>
           </a:xfrm>
           <a:prstGeom prst="rect">
@@ -21280,7 +21280,7 @@
         </p:nvSpPr>
         <p:spPr>
           <a:xfrm>
-            <a:off x="640080" y="6547104"/>
+            <a:off x="640080" y="6382512"/>
             <a:ext cx="2743200" cy="274320"/>
           </a:xfrm>
           <a:prstGeom prst="rect">
@@ -21316,7 +21316,7 @@
         </p:nvSpPr>
         <p:spPr>
           <a:xfrm>
-            <a:off x="3474720" y="6547104"/>
+            <a:off x="3474720" y="6382512"/>
             <a:ext cx="8138160" cy="274320"/>
           </a:xfrm>
           <a:prstGeom prst="rect">

--- a/report/presentation.pptx
+++ b/report/presentation.pptx
@@ -28135,9 +28135,9 @@
           <a:p>
             <a:pPr>
               <a:spcAft>
-                <a:spcPts val="600"/>
+                <a:spcPts val="400"/>
               </a:spcAft>
-              <a:defRPr sz="1500">
+              <a:defRPr sz="1400">
                 <a:solidFill>
                   <a:srgbClr val="333333"/>
                 </a:solidFill>
@@ -28151,9 +28151,9 @@
           <a:p>
             <a:pPr>
               <a:spcAft>
-                <a:spcPts val="600"/>
+                <a:spcPts val="400"/>
               </a:spcAft>
-              <a:defRPr sz="1500">
+              <a:defRPr sz="1400">
                 <a:solidFill>
                   <a:srgbClr val="333333"/>
                 </a:solidFill>
@@ -28167,9 +28167,9 @@
           <a:p>
             <a:pPr>
               <a:spcAft>
-                <a:spcPts val="600"/>
+                <a:spcPts val="400"/>
               </a:spcAft>
-              <a:defRPr sz="1500">
+              <a:defRPr sz="1400">
                 <a:solidFill>
                   <a:srgbClr val="333333"/>
                 </a:solidFill>
@@ -28183,22 +28183,25 @@
           <a:p>
             <a:pPr>
               <a:spcAft>
-                <a:spcPts val="600"/>
+                <a:spcPts val="400"/>
               </a:spcAft>
-              <a:defRPr sz="1500">
+              <a:defRPr sz="1400">
                 <a:solidFill>
                   <a:srgbClr val="333333"/>
                 </a:solidFill>
                 <a:latin typeface="Calibri"/>
               </a:defRPr>
             </a:pPr>
+            <a:r>
+              <a:t>2️⃣ Ablation grid: 7 weights × 3 seeds = 21 policies</a:t>
+            </a:r>
           </a:p>
           <a:p>
             <a:pPr>
               <a:spcAft>
-                <a:spcPts val="600"/>
+                <a:spcPts val="400"/>
               </a:spcAft>
-              <a:defRPr sz="1500">
+              <a:defRPr sz="1400">
                 <a:solidFill>
                   <a:srgbClr val="333333"/>
                 </a:solidFill>
@@ -28206,15 +28209,15 @@
               </a:defRPr>
             </a:pPr>
             <a:r>
-              <a:t>2️⃣ Ablation grid: 7 weights × 3 seeds = 21 policies</a:t>
+              <a:t>    w₂ ∈ {0.0, 0.2, 0.4, 0.5, 0.6, 0.8, 1.0}</a:t>
             </a:r>
           </a:p>
           <a:p>
             <a:pPr>
               <a:spcAft>
-                <a:spcPts val="600"/>
+                <a:spcPts val="400"/>
               </a:spcAft>
-              <a:defRPr sz="1500">
+              <a:defRPr sz="1400">
                 <a:solidFill>
                   <a:srgbClr val="333333"/>
                 </a:solidFill>
@@ -28222,15 +28225,15 @@
               </a:defRPr>
             </a:pPr>
             <a:r>
-              <a:t>    w₂ ∈ {0.0, 0.2, 0.4, 0.5, 0.6, 0.8, 1.0}</a:t>
+              <a:t>    seeds {42, 43, 44}, 150k steps each</a:t>
             </a:r>
           </a:p>
           <a:p>
             <a:pPr>
               <a:spcAft>
-                <a:spcPts val="600"/>
+                <a:spcPts val="400"/>
               </a:spcAft>
-              <a:defRPr sz="1500">
+              <a:defRPr sz="1400">
                 <a:solidFill>
                   <a:srgbClr val="333333"/>
                 </a:solidFill>
@@ -28238,15 +28241,15 @@
               </a:defRPr>
             </a:pPr>
             <a:r>
-              <a:t>    seeds {42, 43, 44}, 150k steps each</a:t>
+              <a:t>    weight PINNED at training and at evaluation</a:t>
             </a:r>
           </a:p>
           <a:p>
             <a:pPr>
               <a:spcAft>
-                <a:spcPts val="600"/>
+                <a:spcPts val="400"/>
               </a:spcAft>
-              <a:defRPr sz="1500">
+              <a:defRPr sz="1400">
                 <a:solidFill>
                   <a:srgbClr val="333333"/>
                 </a:solidFill>
@@ -28254,15 +28257,15 @@
               </a:defRPr>
             </a:pPr>
             <a:r>
-              <a:t>    weight PINNED at training, evaluated at that</a:t>
+              <a:t>3️⃣ Batch-aware policy: 1M steps on MillingDTBatchEnv-v1</a:t>
             </a:r>
           </a:p>
           <a:p>
             <a:pPr>
               <a:spcAft>
-                <a:spcPts val="600"/>
+                <a:spcPts val="400"/>
               </a:spcAft>
-              <a:defRPr sz="1500">
+              <a:defRPr sz="1400">
                 <a:solidFill>
                   <a:srgbClr val="333333"/>
                 </a:solidFill>
@@ -28270,102 +28273,31 @@
               </a:defRPr>
             </a:pPr>
             <a:r>
-              <a:t>    same weight</a:t>
+              <a:t>4️⃣ Noisy-measurement policy: 1M steps, --obs-noise 0.05</a:t>
             </a:r>
           </a:p>
           <a:p>
             <a:pPr>
               <a:spcAft>
-                <a:spcPts val="600"/>
+                <a:spcPts val="400"/>
               </a:spcAft>
-              <a:defRPr sz="1500">
+              <a:defRPr sz="1400">
                 <a:solidFill>
                   <a:srgbClr val="333333"/>
                 </a:solidFill>
                 <a:latin typeface="Calibri"/>
               </a:defRPr>
             </a:pPr>
+            <a:r>
+              <a:t>Heartbeat callback: queue signal every 1000 steps</a:t>
+            </a:r>
           </a:p>
           <a:p>
             <a:pPr>
               <a:spcAft>
-                <a:spcPts val="600"/>
+                <a:spcPts val="400"/>
               </a:spcAft>
-              <a:defRPr sz="1500">
-                <a:solidFill>
-                  <a:srgbClr val="333333"/>
-                </a:solidFill>
-                <a:latin typeface="Calibri"/>
-              </a:defRPr>
-            </a:pPr>
-            <a:r>
-              <a:t>3️⃣ Batch-aware policy: 1M steps on MillingDTBatchEnv-v1</a:t>
-            </a:r>
-          </a:p>
-          <a:p>
-            <a:pPr>
-              <a:spcAft>
-                <a:spcPts val="600"/>
-              </a:spcAft>
-              <a:defRPr sz="1500">
-                <a:solidFill>
-                  <a:srgbClr val="333333"/>
-                </a:solidFill>
-                <a:latin typeface="Calibri"/>
-              </a:defRPr>
-            </a:pPr>
-          </a:p>
-          <a:p>
-            <a:pPr>
-              <a:spcAft>
-                <a:spcPts val="600"/>
-              </a:spcAft>
-              <a:defRPr sz="1500">
-                <a:solidFill>
-                  <a:srgbClr val="333333"/>
-                </a:solidFill>
-                <a:latin typeface="Calibri"/>
-              </a:defRPr>
-            </a:pPr>
-            <a:r>
-              <a:t>4️⃣ Noisy-measurement policy: 1M steps, --obs-noise 0.05</a:t>
-            </a:r>
-          </a:p>
-          <a:p>
-            <a:pPr>
-              <a:spcAft>
-                <a:spcPts val="600"/>
-              </a:spcAft>
-              <a:defRPr sz="1500">
-                <a:solidFill>
-                  <a:srgbClr val="333333"/>
-                </a:solidFill>
-                <a:latin typeface="Calibri"/>
-              </a:defRPr>
-            </a:pPr>
-          </a:p>
-          <a:p>
-            <a:pPr>
-              <a:spcAft>
-                <a:spcPts val="600"/>
-              </a:spcAft>
-              <a:defRPr sz="1500">
-                <a:solidFill>
-                  <a:srgbClr val="333333"/>
-                </a:solidFill>
-                <a:latin typeface="Calibri"/>
-              </a:defRPr>
-            </a:pPr>
-            <a:r>
-              <a:t>Heartbeat callback: queue signal every 1000 steps</a:t>
-            </a:r>
-          </a:p>
-          <a:p>
-            <a:pPr>
-              <a:spcAft>
-                <a:spcPts val="600"/>
-              </a:spcAft>
-              <a:defRPr sz="1500">
+              <a:defRPr sz="1400">
                 <a:solidFill>
                   <a:srgbClr val="333333"/>
                 </a:solidFill>

--- a/report/presentation.pptx
+++ b/report/presentation.pptx
@@ -15993,7 +15993,7 @@
               </a:defRPr>
             </a:pPr>
             <a:r>
-              <a:t>Inside a perfect digital twin the learned policy and the model-based controller are comparable: the policy is ahead on the physical metrics and behind on the breakage, and the gap the reward does show is partly the reward's artifact. Its advantage appears where the controller's information advantage disappears: the learned policy is the better operator whenever the setup's model of the machine is wrong by more than about 2%.</a:t>
+              <a:t>Inside a perfect digital twin the learned policy and the model-based controller are comparable: the policy is ahead on the physical metrics and behind on the breakage, and the gap the reward does show is partly the reward's artifact. Its advantage appears where the controller's information advantage disappears: the learned policy is the better operator once the wear measurement is noisier than about 2% of its range.</a:t>
             </a:r>
           </a:p>
         </p:txBody>
